--- a/INTEGRA Editor Project.pptx
+++ b/INTEGRA Editor Project.pptx
@@ -6,14 +6,13 @@
   </p:sldMasterIdLst>
   <p:sldIdLst>
     <p:sldId id="256" r:id="rId2"/>
-    <p:sldId id="257" r:id="rId3"/>
-    <p:sldId id="258" r:id="rId4"/>
-    <p:sldId id="259" r:id="rId5"/>
-    <p:sldId id="260" r:id="rId6"/>
-    <p:sldId id="261" r:id="rId7"/>
-    <p:sldId id="263" r:id="rId8"/>
-    <p:sldId id="262" r:id="rId9"/>
-    <p:sldId id="264" r:id="rId10"/>
+    <p:sldId id="266" r:id="rId3"/>
+    <p:sldId id="265" r:id="rId4"/>
+    <p:sldId id="257" r:id="rId5"/>
+    <p:sldId id="258" r:id="rId6"/>
+    <p:sldId id="259" r:id="rId7"/>
+    <p:sldId id="260" r:id="rId8"/>
+    <p:sldId id="264" r:id="rId9"/>
   </p:sldIdLst>
   <p:sldSz cx="12192000" cy="6858000"/>
   <p:notesSz cx="6858000" cy="9144000"/>
@@ -267,7 +266,7 @@
           <a:p>
             <a:fld id="{CB813C40-EE66-436C-AD33-4DC4D8836DCF}" type="datetimeFigureOut">
               <a:rPr lang="it-IT" smtClean="0"/>
-              <a:t>02/12/2025</a:t>
+              <a:t>03/12/2025</a:t>
             </a:fld>
             <a:endParaRPr lang="it-IT"/>
           </a:p>
@@ -465,7 +464,7 @@
           <a:p>
             <a:fld id="{CB813C40-EE66-436C-AD33-4DC4D8836DCF}" type="datetimeFigureOut">
               <a:rPr lang="it-IT" smtClean="0"/>
-              <a:t>02/12/2025</a:t>
+              <a:t>03/12/2025</a:t>
             </a:fld>
             <a:endParaRPr lang="it-IT"/>
           </a:p>
@@ -673,7 +672,7 @@
           <a:p>
             <a:fld id="{CB813C40-EE66-436C-AD33-4DC4D8836DCF}" type="datetimeFigureOut">
               <a:rPr lang="it-IT" smtClean="0"/>
-              <a:t>02/12/2025</a:t>
+              <a:t>03/12/2025</a:t>
             </a:fld>
             <a:endParaRPr lang="it-IT"/>
           </a:p>
@@ -871,7 +870,7 @@
           <a:p>
             <a:fld id="{CB813C40-EE66-436C-AD33-4DC4D8836DCF}" type="datetimeFigureOut">
               <a:rPr lang="it-IT" smtClean="0"/>
-              <a:t>02/12/2025</a:t>
+              <a:t>03/12/2025</a:t>
             </a:fld>
             <a:endParaRPr lang="it-IT"/>
           </a:p>
@@ -1146,7 +1145,7 @@
           <a:p>
             <a:fld id="{CB813C40-EE66-436C-AD33-4DC4D8836DCF}" type="datetimeFigureOut">
               <a:rPr lang="it-IT" smtClean="0"/>
-              <a:t>02/12/2025</a:t>
+              <a:t>03/12/2025</a:t>
             </a:fld>
             <a:endParaRPr lang="it-IT"/>
           </a:p>
@@ -1411,7 +1410,7 @@
           <a:p>
             <a:fld id="{CB813C40-EE66-436C-AD33-4DC4D8836DCF}" type="datetimeFigureOut">
               <a:rPr lang="it-IT" smtClean="0"/>
-              <a:t>02/12/2025</a:t>
+              <a:t>03/12/2025</a:t>
             </a:fld>
             <a:endParaRPr lang="it-IT"/>
           </a:p>
@@ -1823,7 +1822,7 @@
           <a:p>
             <a:fld id="{CB813C40-EE66-436C-AD33-4DC4D8836DCF}" type="datetimeFigureOut">
               <a:rPr lang="it-IT" smtClean="0"/>
-              <a:t>02/12/2025</a:t>
+              <a:t>03/12/2025</a:t>
             </a:fld>
             <a:endParaRPr lang="it-IT"/>
           </a:p>
@@ -1964,7 +1963,7 @@
           <a:p>
             <a:fld id="{CB813C40-EE66-436C-AD33-4DC4D8836DCF}" type="datetimeFigureOut">
               <a:rPr lang="it-IT" smtClean="0"/>
-              <a:t>02/12/2025</a:t>
+              <a:t>03/12/2025</a:t>
             </a:fld>
             <a:endParaRPr lang="it-IT"/>
           </a:p>
@@ -2077,7 +2076,7 @@
           <a:p>
             <a:fld id="{CB813C40-EE66-436C-AD33-4DC4D8836DCF}" type="datetimeFigureOut">
               <a:rPr lang="it-IT" smtClean="0"/>
-              <a:t>02/12/2025</a:t>
+              <a:t>03/12/2025</a:t>
             </a:fld>
             <a:endParaRPr lang="it-IT"/>
           </a:p>
@@ -2388,7 +2387,7 @@
           <a:p>
             <a:fld id="{CB813C40-EE66-436C-AD33-4DC4D8836DCF}" type="datetimeFigureOut">
               <a:rPr lang="it-IT" smtClean="0"/>
-              <a:t>02/12/2025</a:t>
+              <a:t>03/12/2025</a:t>
             </a:fld>
             <a:endParaRPr lang="it-IT"/>
           </a:p>
@@ -2676,7 +2675,7 @@
           <a:p>
             <a:fld id="{CB813C40-EE66-436C-AD33-4DC4D8836DCF}" type="datetimeFigureOut">
               <a:rPr lang="it-IT" smtClean="0"/>
-              <a:t>02/12/2025</a:t>
+              <a:t>03/12/2025</a:t>
             </a:fld>
             <a:endParaRPr lang="it-IT"/>
           </a:p>
@@ -2917,7 +2916,7 @@
           <a:p>
             <a:fld id="{CB813C40-EE66-436C-AD33-4DC4D8836DCF}" type="datetimeFigureOut">
               <a:rPr lang="it-IT" smtClean="0"/>
-              <a:t>02/12/2025</a:t>
+              <a:t>03/12/2025</a:t>
             </a:fld>
             <a:endParaRPr lang="it-IT"/>
           </a:p>
@@ -3348,6 +3347,1577 @@
         </p:nvSpPr>
         <p:spPr>
           <a:xfrm>
+            <a:off x="294968" y="99773"/>
+            <a:ext cx="2509020" cy="523220"/>
+          </a:xfrm>
+          <a:prstGeom prst="rect">
+            <a:avLst/>
+          </a:prstGeom>
+          <a:noFill/>
+        </p:spPr>
+        <p:txBody>
+          <a:bodyPr wrap="none" rtlCol="0">
+            <a:spAutoFit/>
+          </a:bodyPr>
+          <a:lstStyle/>
+          <a:p>
+            <a:r>
+              <a:rPr lang="it-IT" sz="2800" dirty="0" err="1"/>
+              <a:t>Overview</a:t>
+            </a:r>
+            <a:r>
+              <a:rPr lang="it-IT" sz="2800" dirty="0"/>
+              <a:t> (1/2):</a:t>
+            </a:r>
+          </a:p>
+        </p:txBody>
+      </p:sp>
+      <p:sp>
+        <p:nvSpPr>
+          <p:cNvPr id="2" name="CasellaDiTesto 1">
+            <a:extLst>
+              <a:ext uri="{FF2B5EF4-FFF2-40B4-BE49-F238E27FC236}">
+                <a16:creationId xmlns:a16="http://schemas.microsoft.com/office/drawing/2014/main" id="{9450ECAF-07CA-BD1B-0488-36ACFCDD2EF1}"/>
+              </a:ext>
+            </a:extLst>
+          </p:cNvPr>
+          <p:cNvSpPr txBox="1"/>
+          <p:nvPr/>
+        </p:nvSpPr>
+        <p:spPr>
+          <a:xfrm>
+            <a:off x="0" y="608430"/>
+            <a:ext cx="12192000" cy="5985998"/>
+          </a:xfrm>
+          <a:prstGeom prst="rect">
+            <a:avLst/>
+          </a:prstGeom>
+          <a:noFill/>
+        </p:spPr>
+        <p:txBody>
+          <a:bodyPr wrap="square" rtlCol="0">
+            <a:spAutoFit/>
+          </a:bodyPr>
+          <a:lstStyle/>
+          <a:p>
+            <a:pPr marL="342900" indent="-342900">
+              <a:lnSpc>
+                <a:spcPct val="150000"/>
+              </a:lnSpc>
+              <a:buFont typeface="+mj-lt"/>
+              <a:buAutoNum type="arabicPeriod"/>
+            </a:pPr>
+            <a:r>
+              <a:rPr lang="it-IT" sz="1400" dirty="0" err="1"/>
+              <a:t>This</a:t>
+            </a:r>
+            <a:r>
+              <a:rPr lang="it-IT" sz="1400" dirty="0"/>
+              <a:t> SW </a:t>
+            </a:r>
+            <a:r>
+              <a:rPr lang="it-IT" sz="1400" dirty="0" err="1"/>
+              <a:t>will</a:t>
+            </a:r>
+            <a:r>
+              <a:rPr lang="it-IT" sz="1400" dirty="0"/>
+              <a:t> target </a:t>
+            </a:r>
+            <a:r>
+              <a:rPr lang="it-IT" sz="1400" dirty="0" err="1"/>
+              <a:t>both</a:t>
+            </a:r>
+            <a:r>
+              <a:rPr lang="it-IT" sz="1400" dirty="0"/>
+              <a:t> a web </a:t>
+            </a:r>
+            <a:r>
+              <a:rPr lang="it-IT" sz="1400" dirty="0" err="1"/>
+              <a:t>application</a:t>
+            </a:r>
+            <a:r>
+              <a:rPr lang="it-IT" sz="1400" dirty="0"/>
+              <a:t> </a:t>
+            </a:r>
+            <a:r>
+              <a:rPr lang="it-IT" sz="1400" dirty="0" err="1"/>
+              <a:t>using</a:t>
+            </a:r>
+            <a:r>
+              <a:rPr lang="it-IT" sz="1400" dirty="0"/>
+              <a:t> </a:t>
+            </a:r>
+            <a:r>
+              <a:rPr lang="it-IT" sz="1400" dirty="0" err="1"/>
+              <a:t>Angular</a:t>
+            </a:r>
+            <a:r>
+              <a:rPr lang="it-IT" sz="1400" dirty="0"/>
+              <a:t> and a desktop </a:t>
+            </a:r>
+            <a:r>
+              <a:rPr lang="it-IT" sz="1400" dirty="0" err="1"/>
+              <a:t>application</a:t>
+            </a:r>
+            <a:r>
+              <a:rPr lang="it-IT" sz="1400" dirty="0"/>
+              <a:t> </a:t>
+            </a:r>
+            <a:r>
+              <a:rPr lang="it-IT" sz="1400" dirty="0" err="1"/>
+              <a:t>converting</a:t>
+            </a:r>
+            <a:r>
+              <a:rPr lang="it-IT" sz="1400" dirty="0"/>
+              <a:t> </a:t>
+            </a:r>
+            <a:r>
+              <a:rPr lang="it-IT" sz="1400" dirty="0" err="1"/>
+              <a:t>Angular</a:t>
+            </a:r>
+            <a:r>
+              <a:rPr lang="it-IT" sz="1400" dirty="0"/>
+              <a:t> with Electron.</a:t>
+            </a:r>
+          </a:p>
+          <a:p>
+            <a:pPr marL="342900" indent="-342900">
+              <a:lnSpc>
+                <a:spcPct val="150000"/>
+              </a:lnSpc>
+              <a:buFont typeface="+mj-lt"/>
+              <a:buAutoNum type="arabicPeriod"/>
+            </a:pPr>
+            <a:r>
+              <a:rPr lang="it-IT" sz="1400" dirty="0" err="1"/>
+              <a:t>This</a:t>
+            </a:r>
+            <a:r>
+              <a:rPr lang="it-IT" sz="1400" dirty="0"/>
+              <a:t> SW </a:t>
+            </a:r>
+            <a:r>
+              <a:rPr lang="it-IT" sz="1400" dirty="0" err="1"/>
+              <a:t>will</a:t>
+            </a:r>
+            <a:r>
+              <a:rPr lang="it-IT" sz="1400" dirty="0"/>
+              <a:t> </a:t>
+            </a:r>
+            <a:r>
+              <a:rPr lang="it-IT" sz="1400" dirty="0" err="1"/>
+              <a:t>implement</a:t>
+            </a:r>
+            <a:r>
+              <a:rPr lang="it-IT" sz="1400" dirty="0"/>
+              <a:t> a special editor </a:t>
+            </a:r>
+            <a:r>
+              <a:rPr lang="it-IT" sz="1400" dirty="0" err="1"/>
+              <a:t>able</a:t>
+            </a:r>
+            <a:r>
+              <a:rPr lang="it-IT" sz="1400" dirty="0"/>
+              <a:t> to </a:t>
+            </a:r>
+            <a:r>
+              <a:rPr lang="it-IT" sz="1400" dirty="0" err="1"/>
+              <a:t>run</a:t>
+            </a:r>
+            <a:r>
+              <a:rPr lang="it-IT" sz="1400" dirty="0"/>
+              <a:t> </a:t>
+            </a:r>
+            <a:r>
+              <a:rPr lang="it-IT" sz="1400" dirty="0" err="1"/>
+              <a:t>simulations</a:t>
+            </a:r>
+            <a:r>
+              <a:rPr lang="it-IT" sz="1400" dirty="0"/>
+              <a:t> in the </a:t>
+            </a:r>
+            <a:r>
+              <a:rPr lang="it-IT" sz="1400" dirty="0" err="1"/>
+              <a:t>Analog</a:t>
+            </a:r>
+            <a:r>
+              <a:rPr lang="it-IT" sz="1400" dirty="0"/>
+              <a:t> and RF Domain.</a:t>
+            </a:r>
+          </a:p>
+          <a:p>
+            <a:pPr marL="342900" indent="-342900">
+              <a:lnSpc>
+                <a:spcPct val="150000"/>
+              </a:lnSpc>
+              <a:buFont typeface="+mj-lt"/>
+              <a:buAutoNum type="arabicPeriod"/>
+            </a:pPr>
+            <a:r>
+              <a:rPr lang="it-IT" sz="1400" dirty="0"/>
+              <a:t>The SW </a:t>
+            </a:r>
+            <a:r>
+              <a:rPr lang="it-IT" sz="1400" dirty="0" err="1"/>
+              <a:t>will</a:t>
+            </a:r>
+            <a:r>
+              <a:rPr lang="it-IT" sz="1400" dirty="0"/>
+              <a:t> integrate (</a:t>
+            </a:r>
+            <a:r>
+              <a:rPr lang="it-IT" sz="1400" dirty="0" err="1"/>
+              <a:t>that</a:t>
+            </a:r>
+            <a:r>
+              <a:rPr lang="it-IT" sz="1400" dirty="0"/>
+              <a:t> </a:t>
+            </a:r>
+            <a:r>
+              <a:rPr lang="it-IT" sz="1400" dirty="0" err="1"/>
+              <a:t>is</a:t>
+            </a:r>
+            <a:r>
+              <a:rPr lang="it-IT" sz="1400" dirty="0"/>
+              <a:t> </a:t>
+            </a:r>
+            <a:r>
+              <a:rPr lang="it-IT" sz="1400" dirty="0" err="1"/>
+              <a:t>why</a:t>
+            </a:r>
+            <a:r>
+              <a:rPr lang="it-IT" sz="1400" dirty="0"/>
+              <a:t> INTEGRA </a:t>
+            </a:r>
+            <a:r>
+              <a:rPr lang="it-IT" sz="1400" dirty="0" err="1"/>
+              <a:t>is</a:t>
+            </a:r>
+            <a:r>
+              <a:rPr lang="it-IT" sz="1400" dirty="0"/>
+              <a:t> the name) a </a:t>
+            </a:r>
+            <a:r>
+              <a:rPr lang="it-IT" sz="1400" dirty="0" err="1"/>
+              <a:t>number</a:t>
+            </a:r>
+            <a:r>
+              <a:rPr lang="it-IT" sz="1400" dirty="0"/>
+              <a:t> </a:t>
+            </a:r>
+            <a:r>
+              <a:rPr lang="it-IT" sz="1400" dirty="0" err="1"/>
+              <a:t>solvers</a:t>
+            </a:r>
+            <a:r>
+              <a:rPr lang="it-IT" sz="1400" dirty="0"/>
+              <a:t> and </a:t>
+            </a:r>
+            <a:r>
+              <a:rPr lang="it-IT" sz="1400" dirty="0" err="1"/>
+              <a:t>calculators</a:t>
+            </a:r>
+            <a:r>
+              <a:rPr lang="it-IT" sz="1400" dirty="0"/>
+              <a:t> in the </a:t>
+            </a:r>
+            <a:r>
+              <a:rPr lang="it-IT" sz="1400" dirty="0" err="1"/>
+              <a:t>Analog</a:t>
+            </a:r>
+            <a:r>
+              <a:rPr lang="it-IT" sz="1400" dirty="0"/>
+              <a:t> and RF Domain.</a:t>
+            </a:r>
+          </a:p>
+          <a:p>
+            <a:pPr marL="342900" indent="-342900">
+              <a:lnSpc>
+                <a:spcPct val="150000"/>
+              </a:lnSpc>
+              <a:buFont typeface="+mj-lt"/>
+              <a:buAutoNum type="arabicPeriod"/>
+            </a:pPr>
+            <a:r>
+              <a:rPr lang="it-IT" sz="1400" dirty="0"/>
+              <a:t>The </a:t>
+            </a:r>
+            <a:r>
+              <a:rPr lang="it-IT" sz="1400" dirty="0" err="1"/>
+              <a:t>solvers</a:t>
+            </a:r>
+            <a:r>
+              <a:rPr lang="it-IT" sz="1400" dirty="0"/>
+              <a:t> are in general </a:t>
+            </a:r>
+            <a:r>
+              <a:rPr lang="it-IT" sz="1400" dirty="0" err="1"/>
+              <a:t>connected</a:t>
+            </a:r>
+            <a:r>
+              <a:rPr lang="it-IT" sz="1400" dirty="0"/>
+              <a:t> to a </a:t>
+            </a:r>
+            <a:r>
+              <a:rPr lang="it-IT" sz="1400" b="1" dirty="0"/>
+              <a:t>Board</a:t>
+            </a:r>
+            <a:r>
+              <a:rPr lang="it-IT" sz="1400" dirty="0"/>
+              <a:t> and </a:t>
+            </a:r>
+            <a:r>
+              <a:rPr lang="it-IT" sz="1400" dirty="0" err="1"/>
+              <a:t>they</a:t>
+            </a:r>
+            <a:r>
+              <a:rPr lang="it-IT" sz="1400" dirty="0"/>
+              <a:t> </a:t>
+            </a:r>
+            <a:r>
+              <a:rPr lang="it-IT" sz="1400" dirty="0" err="1"/>
+              <a:t>have</a:t>
+            </a:r>
+            <a:r>
+              <a:rPr lang="it-IT" sz="1400" dirty="0"/>
+              <a:t> a special editor to </a:t>
+            </a:r>
+            <a:r>
+              <a:rPr lang="it-IT" sz="1400" dirty="0" err="1"/>
+              <a:t>draw</a:t>
+            </a:r>
+            <a:r>
+              <a:rPr lang="it-IT" sz="1400" dirty="0"/>
+              <a:t> the model (</a:t>
+            </a:r>
+            <a:r>
+              <a:rPr lang="it-IT" sz="1400" dirty="0" err="1"/>
+              <a:t>i,.e</a:t>
+            </a:r>
+            <a:r>
+              <a:rPr lang="it-IT" sz="1400" dirty="0"/>
+              <a:t> </a:t>
+            </a:r>
+            <a:r>
+              <a:rPr lang="it-IT" sz="1400" dirty="0" err="1"/>
+              <a:t>schematic</a:t>
+            </a:r>
+            <a:r>
+              <a:rPr lang="it-IT" sz="1400" dirty="0"/>
+              <a:t> editor for s-</a:t>
+            </a:r>
+            <a:r>
+              <a:rPr lang="it-IT" sz="1400" dirty="0" err="1"/>
+              <a:t>parameters</a:t>
+            </a:r>
+            <a:r>
+              <a:rPr lang="it-IT" sz="1400" dirty="0"/>
+              <a:t>, etc.).</a:t>
+            </a:r>
+          </a:p>
+          <a:p>
+            <a:pPr marL="342900" indent="-342900">
+              <a:lnSpc>
+                <a:spcPct val="150000"/>
+              </a:lnSpc>
+              <a:buFont typeface="+mj-lt"/>
+              <a:buAutoNum type="arabicPeriod"/>
+            </a:pPr>
+            <a:r>
+              <a:rPr lang="it-IT" sz="1400" dirty="0"/>
+              <a:t>The </a:t>
+            </a:r>
+            <a:r>
+              <a:rPr lang="it-IT" sz="1400" dirty="0" err="1"/>
+              <a:t>calculators</a:t>
+            </a:r>
+            <a:r>
+              <a:rPr lang="it-IT" sz="1400" dirty="0"/>
+              <a:t> are </a:t>
+            </a:r>
+            <a:r>
+              <a:rPr lang="it-IT" sz="1400" dirty="0" err="1"/>
+              <a:t>instead</a:t>
+            </a:r>
+            <a:r>
+              <a:rPr lang="it-IT" sz="1400" dirty="0"/>
+              <a:t> </a:t>
+            </a:r>
+            <a:r>
+              <a:rPr lang="it-IT" sz="1400" dirty="0" err="1"/>
+              <a:t>connected</a:t>
+            </a:r>
+            <a:r>
+              <a:rPr lang="it-IT" sz="1400" dirty="0"/>
+              <a:t> to an </a:t>
+            </a:r>
+            <a:r>
+              <a:rPr lang="it-IT" sz="1400" b="1" dirty="0"/>
+              <a:t>App</a:t>
+            </a:r>
+            <a:r>
+              <a:rPr lang="it-IT" sz="1400" dirty="0"/>
+              <a:t> </a:t>
+            </a:r>
+            <a:r>
+              <a:rPr lang="it-IT" sz="1400" dirty="0" err="1"/>
+              <a:t>designed</a:t>
+            </a:r>
+            <a:r>
+              <a:rPr lang="it-IT" sz="1400" dirty="0"/>
+              <a:t> to </a:t>
+            </a:r>
+            <a:r>
+              <a:rPr lang="it-IT" sz="1400" dirty="0" err="1"/>
+              <a:t>get</a:t>
+            </a:r>
+            <a:r>
+              <a:rPr lang="it-IT" sz="1400" dirty="0"/>
+              <a:t> the inputs from the user and </a:t>
+            </a:r>
+            <a:r>
+              <a:rPr lang="it-IT" sz="1400" dirty="0" err="1"/>
+              <a:t>run</a:t>
+            </a:r>
+            <a:r>
+              <a:rPr lang="it-IT" sz="1400" dirty="0"/>
+              <a:t> a fast </a:t>
+            </a:r>
+            <a:r>
+              <a:rPr lang="it-IT" sz="1400" dirty="0" err="1"/>
+              <a:t>calculation</a:t>
+            </a:r>
+            <a:r>
+              <a:rPr lang="it-IT" sz="1400" dirty="0"/>
+              <a:t> (RF line-up </a:t>
+            </a:r>
+            <a:r>
+              <a:rPr lang="it-IT" sz="1400" dirty="0" err="1"/>
+              <a:t>analyzer</a:t>
+            </a:r>
+            <a:r>
+              <a:rPr lang="it-IT" sz="1400" dirty="0"/>
+              <a:t>).</a:t>
+            </a:r>
+          </a:p>
+          <a:p>
+            <a:pPr marL="342900" indent="-342900">
+              <a:lnSpc>
+                <a:spcPct val="150000"/>
+              </a:lnSpc>
+              <a:buFont typeface="+mj-lt"/>
+              <a:buAutoNum type="arabicPeriod"/>
+            </a:pPr>
+            <a:r>
+              <a:rPr lang="it-IT" sz="1400" dirty="0"/>
+              <a:t>In </a:t>
+            </a:r>
+            <a:r>
+              <a:rPr lang="it-IT" sz="1400" dirty="0" err="1"/>
+              <a:t>addition</a:t>
+            </a:r>
+            <a:r>
+              <a:rPr lang="it-IT" sz="1400" dirty="0"/>
+              <a:t> the SW </a:t>
+            </a:r>
+            <a:r>
+              <a:rPr lang="it-IT" sz="1400" dirty="0" err="1"/>
+              <a:t>has</a:t>
+            </a:r>
+            <a:r>
+              <a:rPr lang="it-IT" sz="1400" dirty="0"/>
+              <a:t> </a:t>
+            </a:r>
+            <a:r>
+              <a:rPr lang="it-IT" sz="1400" dirty="0" err="1"/>
+              <a:t>also</a:t>
+            </a:r>
+            <a:r>
+              <a:rPr lang="it-IT" sz="1400" dirty="0"/>
+              <a:t> </a:t>
+            </a:r>
+            <a:r>
+              <a:rPr lang="it-IT" sz="1400" b="1" dirty="0"/>
+              <a:t>Data</a:t>
+            </a:r>
+            <a:r>
+              <a:rPr lang="it-IT" sz="1400" dirty="0"/>
+              <a:t> (</a:t>
+            </a:r>
+            <a:r>
+              <a:rPr lang="it-IT" sz="1400" dirty="0" err="1"/>
+              <a:t>which</a:t>
+            </a:r>
+            <a:r>
+              <a:rPr lang="it-IT" sz="1400" dirty="0"/>
+              <a:t> are the </a:t>
+            </a:r>
+            <a:r>
+              <a:rPr lang="it-IT" sz="1400" dirty="0" err="1"/>
+              <a:t>imported</a:t>
+            </a:r>
+            <a:r>
+              <a:rPr lang="it-IT" sz="1400" dirty="0"/>
+              <a:t> data from </a:t>
+            </a:r>
+            <a:r>
+              <a:rPr lang="it-IT" sz="1400" dirty="0" err="1"/>
+              <a:t>external</a:t>
+            </a:r>
+            <a:r>
+              <a:rPr lang="it-IT" sz="1400" dirty="0"/>
+              <a:t>) and </a:t>
+            </a:r>
+            <a:r>
+              <a:rPr lang="it-IT" sz="1400" b="1" dirty="0"/>
+              <a:t>Dataset</a:t>
+            </a:r>
+            <a:r>
+              <a:rPr lang="it-IT" sz="1400" dirty="0"/>
+              <a:t> (</a:t>
+            </a:r>
+            <a:r>
+              <a:rPr lang="it-IT" sz="1400" dirty="0" err="1"/>
+              <a:t>which</a:t>
+            </a:r>
+            <a:r>
+              <a:rPr lang="it-IT" sz="1400" dirty="0"/>
+              <a:t> are the </a:t>
+            </a:r>
+            <a:r>
+              <a:rPr lang="it-IT" sz="1400" dirty="0" err="1"/>
+              <a:t>results</a:t>
+            </a:r>
+            <a:r>
+              <a:rPr lang="it-IT" sz="1400" dirty="0"/>
+              <a:t> </a:t>
+            </a:r>
+            <a:r>
+              <a:rPr lang="it-IT" sz="1400" dirty="0" err="1"/>
+              <a:t>computed</a:t>
+            </a:r>
+            <a:r>
+              <a:rPr lang="it-IT" sz="1400" dirty="0"/>
+              <a:t> by the </a:t>
+            </a:r>
+            <a:r>
+              <a:rPr lang="it-IT" sz="1400" dirty="0" err="1"/>
+              <a:t>wasm</a:t>
+            </a:r>
+            <a:r>
+              <a:rPr lang="it-IT" sz="1400" dirty="0"/>
+              <a:t> solver).</a:t>
+            </a:r>
+          </a:p>
+          <a:p>
+            <a:pPr marL="342900" indent="-342900">
+              <a:lnSpc>
+                <a:spcPct val="150000"/>
+              </a:lnSpc>
+              <a:buFont typeface="+mj-lt"/>
+              <a:buAutoNum type="arabicPeriod"/>
+            </a:pPr>
+            <a:r>
+              <a:rPr lang="it-IT" sz="1400" dirty="0"/>
+              <a:t>The SW </a:t>
+            </a:r>
+            <a:r>
+              <a:rPr lang="it-IT" sz="1400" dirty="0" err="1"/>
+              <a:t>will</a:t>
+            </a:r>
+            <a:r>
+              <a:rPr lang="it-IT" sz="1400" dirty="0"/>
+              <a:t> </a:t>
+            </a:r>
+            <a:r>
+              <a:rPr lang="it-IT" sz="1400" dirty="0" err="1"/>
+              <a:t>implement</a:t>
+            </a:r>
+            <a:r>
+              <a:rPr lang="it-IT" sz="1400" dirty="0"/>
+              <a:t> </a:t>
+            </a:r>
+            <a:r>
+              <a:rPr lang="it-IT" sz="1400" dirty="0" err="1"/>
+              <a:t>memory-saving</a:t>
+            </a:r>
+            <a:r>
+              <a:rPr lang="it-IT" sz="1400" dirty="0"/>
+              <a:t> </a:t>
+            </a:r>
+            <a:r>
+              <a:rPr lang="it-IT" sz="1400" dirty="0" err="1"/>
+              <a:t>methods</a:t>
+            </a:r>
+            <a:r>
+              <a:rPr lang="it-IT" sz="1400" dirty="0"/>
+              <a:t> to </a:t>
+            </a:r>
+            <a:r>
+              <a:rPr lang="it-IT" sz="1400" dirty="0" err="1"/>
+              <a:t>minimize</a:t>
+            </a:r>
+            <a:r>
+              <a:rPr lang="it-IT" sz="1400" dirty="0"/>
+              <a:t> the JS </a:t>
+            </a:r>
+            <a:r>
+              <a:rPr lang="it-IT" sz="1400" dirty="0" err="1"/>
+              <a:t>memory</a:t>
+            </a:r>
+            <a:r>
+              <a:rPr lang="it-IT" sz="1400" dirty="0"/>
+              <a:t> on the </a:t>
+            </a:r>
+            <a:r>
+              <a:rPr lang="it-IT" sz="1400" dirty="0" err="1"/>
+              <a:t>broser</a:t>
+            </a:r>
+            <a:r>
+              <a:rPr lang="it-IT" sz="1400" dirty="0"/>
+              <a:t>.</a:t>
+            </a:r>
+          </a:p>
+          <a:p>
+            <a:pPr marL="342900" indent="-342900">
+              <a:lnSpc>
+                <a:spcPct val="150000"/>
+              </a:lnSpc>
+              <a:buFont typeface="+mj-lt"/>
+              <a:buAutoNum type="arabicPeriod"/>
+            </a:pPr>
+            <a:r>
+              <a:rPr lang="it-IT" sz="1400" dirty="0"/>
+              <a:t>The SW in the </a:t>
+            </a:r>
+            <a:r>
+              <a:rPr lang="it-IT" sz="1400" dirty="0" err="1"/>
+              <a:t>wep</a:t>
+            </a:r>
+            <a:r>
+              <a:rPr lang="it-IT" sz="1400" dirty="0"/>
+              <a:t> app </a:t>
+            </a:r>
+            <a:r>
+              <a:rPr lang="it-IT" sz="1400" dirty="0" err="1"/>
+              <a:t>will</a:t>
+            </a:r>
+            <a:r>
+              <a:rPr lang="it-IT" sz="1400" dirty="0"/>
+              <a:t> </a:t>
+            </a:r>
+            <a:r>
+              <a:rPr lang="it-IT" sz="1400" dirty="0" err="1"/>
+              <a:t>run</a:t>
+            </a:r>
+            <a:r>
+              <a:rPr lang="it-IT" sz="1400" dirty="0"/>
+              <a:t> </a:t>
+            </a:r>
+            <a:r>
+              <a:rPr lang="it-IT" sz="1400" dirty="0" err="1"/>
+              <a:t>all</a:t>
+            </a:r>
+            <a:r>
+              <a:rPr lang="it-IT" sz="1400" dirty="0"/>
+              <a:t> the </a:t>
+            </a:r>
+            <a:r>
+              <a:rPr lang="it-IT" sz="1400" dirty="0" err="1"/>
+              <a:t>simulations</a:t>
+            </a:r>
+            <a:r>
+              <a:rPr lang="it-IT" sz="1400" dirty="0"/>
+              <a:t> client-side </a:t>
+            </a:r>
+            <a:r>
+              <a:rPr lang="it-IT" sz="1400" dirty="0" err="1"/>
+              <a:t>using</a:t>
+            </a:r>
+            <a:r>
+              <a:rPr lang="it-IT" sz="1400" dirty="0"/>
+              <a:t> WASM and </a:t>
+            </a:r>
+            <a:r>
+              <a:rPr lang="it-IT" sz="1400" dirty="0" err="1"/>
+              <a:t>WebGPU</a:t>
+            </a:r>
+            <a:r>
+              <a:rPr lang="it-IT" sz="1400" dirty="0"/>
+              <a:t>.</a:t>
+            </a:r>
+          </a:p>
+          <a:p>
+            <a:pPr marL="800100" lvl="1" indent="-342900">
+              <a:lnSpc>
+                <a:spcPct val="150000"/>
+              </a:lnSpc>
+              <a:buFont typeface="Arial" panose="020B0604020202020204" pitchFamily="34" charset="0"/>
+              <a:buChar char="•"/>
+            </a:pPr>
+            <a:r>
+              <a:rPr lang="it-IT" sz="1400" dirty="0" err="1"/>
+              <a:t>Only</a:t>
+            </a:r>
+            <a:r>
+              <a:rPr lang="it-IT" sz="1400" dirty="0"/>
+              <a:t> one </a:t>
+            </a:r>
+            <a:r>
+              <a:rPr lang="it-IT" sz="1400" dirty="0" err="1"/>
+              <a:t>simulation</a:t>
+            </a:r>
+            <a:r>
+              <a:rPr lang="it-IT" sz="1400" dirty="0"/>
+              <a:t> </a:t>
+            </a:r>
+            <a:r>
+              <a:rPr lang="it-IT" sz="1400" dirty="0" err="1"/>
+              <a:t>at</a:t>
+            </a:r>
+            <a:r>
+              <a:rPr lang="it-IT" sz="1400" dirty="0"/>
+              <a:t> the time can be </a:t>
+            </a:r>
+            <a:r>
+              <a:rPr lang="it-IT" sz="1400" dirty="0" err="1"/>
+              <a:t>executed</a:t>
+            </a:r>
+            <a:r>
+              <a:rPr lang="it-IT" sz="1400" dirty="0"/>
+              <a:t> from a </a:t>
+            </a:r>
+            <a:r>
+              <a:rPr lang="it-IT" sz="1400" dirty="0" err="1"/>
+              <a:t>specific</a:t>
+            </a:r>
+            <a:r>
+              <a:rPr lang="it-IT" sz="1400" dirty="0"/>
+              <a:t> user.</a:t>
+            </a:r>
+          </a:p>
+          <a:p>
+            <a:pPr marL="800100" lvl="1" indent="-342900">
+              <a:lnSpc>
+                <a:spcPct val="150000"/>
+              </a:lnSpc>
+              <a:buFont typeface="Arial" panose="020B0604020202020204" pitchFamily="34" charset="0"/>
+              <a:buChar char="•"/>
+            </a:pPr>
+            <a:r>
+              <a:rPr lang="it-IT" sz="1400" dirty="0"/>
+              <a:t>No </a:t>
+            </a:r>
+            <a:r>
+              <a:rPr lang="it-IT" sz="1400" dirty="0" err="1"/>
+              <a:t>android</a:t>
+            </a:r>
+            <a:r>
+              <a:rPr lang="it-IT" sz="1400" dirty="0"/>
+              <a:t> app </a:t>
+            </a:r>
+            <a:r>
+              <a:rPr lang="it-IT" sz="1400" dirty="0" err="1"/>
+              <a:t>is</a:t>
+            </a:r>
+            <a:r>
+              <a:rPr lang="it-IT" sz="1400" dirty="0"/>
+              <a:t> </a:t>
+            </a:r>
+            <a:r>
+              <a:rPr lang="it-IT" sz="1400" dirty="0" err="1"/>
+              <a:t>allowed</a:t>
+            </a:r>
+            <a:r>
+              <a:rPr lang="it-IT" sz="1400" dirty="0"/>
+              <a:t> to </a:t>
+            </a:r>
+            <a:r>
+              <a:rPr lang="it-IT" sz="1400" dirty="0" err="1"/>
+              <a:t>run</a:t>
+            </a:r>
+            <a:r>
+              <a:rPr lang="it-IT" sz="1400" dirty="0"/>
+              <a:t> </a:t>
+            </a:r>
+            <a:r>
+              <a:rPr lang="it-IT" sz="1400" dirty="0" err="1"/>
+              <a:t>simulations</a:t>
+            </a:r>
+            <a:r>
+              <a:rPr lang="it-IT" sz="1400" dirty="0"/>
+              <a:t>, </a:t>
+            </a:r>
+            <a:r>
+              <a:rPr lang="it-IT" sz="1400" dirty="0" err="1"/>
+              <a:t>only</a:t>
+            </a:r>
+            <a:r>
+              <a:rPr lang="it-IT" sz="1400" dirty="0"/>
+              <a:t> </a:t>
+            </a:r>
+            <a:r>
+              <a:rPr lang="it-IT" sz="1400" dirty="0" err="1"/>
+              <a:t>viewer</a:t>
+            </a:r>
+            <a:r>
+              <a:rPr lang="it-IT" sz="1400" dirty="0"/>
+              <a:t> </a:t>
+            </a:r>
+            <a:r>
+              <a:rPr lang="it-IT" sz="1400" dirty="0" err="1"/>
+              <a:t>adn</a:t>
+            </a:r>
+            <a:r>
+              <a:rPr lang="it-IT" sz="1400" dirty="0"/>
+              <a:t> </a:t>
+            </a:r>
+            <a:r>
+              <a:rPr lang="it-IT" sz="1400" dirty="0" err="1"/>
+              <a:t>comments</a:t>
+            </a:r>
+            <a:r>
+              <a:rPr lang="it-IT" sz="1400" dirty="0"/>
+              <a:t>.</a:t>
+            </a:r>
+          </a:p>
+          <a:p>
+            <a:pPr marL="342900" indent="-342900">
+              <a:lnSpc>
+                <a:spcPct val="150000"/>
+              </a:lnSpc>
+              <a:buFont typeface="+mj-lt"/>
+              <a:buAutoNum type="arabicPeriod"/>
+            </a:pPr>
+            <a:r>
+              <a:rPr lang="it-IT" sz="1400" dirty="0"/>
+              <a:t>The SW in the desktop app </a:t>
+            </a:r>
+            <a:r>
+              <a:rPr lang="it-IT" sz="1400" dirty="0" err="1"/>
+              <a:t>will</a:t>
+            </a:r>
+            <a:r>
+              <a:rPr lang="it-IT" sz="1400" dirty="0"/>
+              <a:t> </a:t>
+            </a:r>
+            <a:r>
+              <a:rPr lang="it-IT" sz="1400" dirty="0" err="1"/>
+              <a:t>run</a:t>
+            </a:r>
+            <a:r>
+              <a:rPr lang="it-IT" sz="1400" dirty="0"/>
+              <a:t> </a:t>
+            </a:r>
+            <a:r>
+              <a:rPr lang="it-IT" sz="1400" dirty="0" err="1"/>
+              <a:t>all</a:t>
+            </a:r>
+            <a:r>
+              <a:rPr lang="it-IT" sz="1400" dirty="0"/>
+              <a:t> the </a:t>
+            </a:r>
+            <a:r>
+              <a:rPr lang="it-IT" sz="1400" dirty="0" err="1"/>
+              <a:t>simulations</a:t>
+            </a:r>
+            <a:r>
+              <a:rPr lang="it-IT" sz="1400" dirty="0"/>
+              <a:t> </a:t>
+            </a:r>
+            <a:r>
+              <a:rPr lang="it-IT" sz="1400" dirty="0" err="1"/>
+              <a:t>using</a:t>
+            </a:r>
+            <a:r>
+              <a:rPr lang="it-IT" sz="1400" dirty="0"/>
+              <a:t> Native Application (i.e. EXE app) and </a:t>
+            </a:r>
+            <a:r>
+              <a:rPr lang="it-IT" sz="1400" dirty="0" err="1"/>
+              <a:t>local</a:t>
+            </a:r>
+            <a:r>
+              <a:rPr lang="it-IT" sz="1400" dirty="0"/>
+              <a:t> GPU.</a:t>
+            </a:r>
+          </a:p>
+          <a:p>
+            <a:pPr marL="800100" lvl="1" indent="-342900">
+              <a:lnSpc>
+                <a:spcPct val="150000"/>
+              </a:lnSpc>
+              <a:buFont typeface="Arial" panose="020B0604020202020204" pitchFamily="34" charset="0"/>
+              <a:buChar char="•"/>
+            </a:pPr>
+            <a:r>
+              <a:rPr lang="it-IT" sz="1400" dirty="0"/>
+              <a:t>The desktop app </a:t>
+            </a:r>
+            <a:r>
+              <a:rPr lang="it-IT" sz="1400" dirty="0" err="1"/>
+              <a:t>will</a:t>
+            </a:r>
+            <a:r>
+              <a:rPr lang="it-IT" sz="1400" dirty="0"/>
+              <a:t> </a:t>
+            </a:r>
+            <a:r>
+              <a:rPr lang="it-IT" sz="1400" dirty="0" err="1"/>
+              <a:t>need</a:t>
+            </a:r>
+            <a:r>
+              <a:rPr lang="it-IT" sz="1400" dirty="0"/>
+              <a:t> </a:t>
+            </a:r>
+            <a:r>
+              <a:rPr lang="it-IT" sz="1400" dirty="0" err="1"/>
+              <a:t>anyway</a:t>
+            </a:r>
+            <a:r>
+              <a:rPr lang="it-IT" sz="1400" dirty="0"/>
+              <a:t> the </a:t>
+            </a:r>
+            <a:r>
+              <a:rPr lang="it-IT" sz="1400" dirty="0" err="1"/>
+              <a:t>backend</a:t>
+            </a:r>
+            <a:r>
+              <a:rPr lang="it-IT" sz="1400" dirty="0"/>
+              <a:t> connection for licensing, user account and models.</a:t>
+            </a:r>
+          </a:p>
+          <a:p>
+            <a:pPr marL="342900" indent="-342900">
+              <a:buFont typeface="+mj-lt"/>
+              <a:buAutoNum type="arabicPeriod"/>
+            </a:pPr>
+            <a:r>
+              <a:rPr lang="it-IT" sz="1400" dirty="0"/>
+              <a:t>Front-end side the dataset </a:t>
+            </a:r>
+            <a:r>
+              <a:rPr lang="it-IT" sz="1400" dirty="0" err="1"/>
+              <a:t>computed</a:t>
+            </a:r>
+            <a:r>
+              <a:rPr lang="it-IT" sz="1400" dirty="0"/>
+              <a:t> by the back-end must be </a:t>
+            </a:r>
+            <a:r>
+              <a:rPr lang="it-IT" sz="1400" dirty="0" err="1"/>
+              <a:t>stored</a:t>
+            </a:r>
+            <a:r>
+              <a:rPr lang="it-IT" sz="1400" dirty="0"/>
+              <a:t> on </a:t>
+            </a:r>
+            <a:r>
+              <a:rPr lang="it-IT" sz="1400" dirty="0" err="1"/>
+              <a:t>external</a:t>
+            </a:r>
+            <a:r>
+              <a:rPr lang="it-IT" sz="1400" dirty="0"/>
+              <a:t> storage and JS </a:t>
+            </a:r>
+            <a:r>
+              <a:rPr lang="it-IT" sz="1400" dirty="0" err="1"/>
+              <a:t>memory</a:t>
+            </a:r>
+            <a:r>
+              <a:rPr lang="it-IT" sz="1400" dirty="0"/>
+              <a:t> </a:t>
+            </a:r>
+            <a:r>
+              <a:rPr lang="it-IT" sz="1400" dirty="0" err="1"/>
+              <a:t>shall</a:t>
+            </a:r>
+            <a:r>
+              <a:rPr lang="it-IT" sz="1400" dirty="0"/>
+              <a:t> be </a:t>
+            </a:r>
+            <a:r>
+              <a:rPr lang="it-IT" sz="1400" dirty="0" err="1"/>
+              <a:t>freed</a:t>
+            </a:r>
+            <a:r>
+              <a:rPr lang="it-IT" sz="1400" dirty="0"/>
+              <a:t> </a:t>
+            </a:r>
+            <a:r>
+              <a:rPr lang="it-IT" sz="1400" dirty="0" err="1"/>
+              <a:t>as</a:t>
+            </a:r>
+            <a:r>
+              <a:rPr lang="it-IT" sz="1400" dirty="0"/>
+              <a:t> </a:t>
+            </a:r>
+            <a:r>
+              <a:rPr lang="it-IT" sz="1400" dirty="0" err="1"/>
+              <a:t>soon</a:t>
+            </a:r>
+            <a:r>
+              <a:rPr lang="it-IT" sz="1400" dirty="0"/>
+              <a:t> </a:t>
+            </a:r>
+            <a:r>
+              <a:rPr lang="it-IT" sz="1400" dirty="0" err="1"/>
+              <a:t>as</a:t>
+            </a:r>
+            <a:r>
+              <a:rPr lang="it-IT" sz="1400" dirty="0"/>
+              <a:t> </a:t>
+            </a:r>
+            <a:r>
+              <a:rPr lang="it-IT" sz="1400" dirty="0" err="1"/>
+              <a:t>possible</a:t>
+            </a:r>
+            <a:r>
+              <a:rPr lang="it-IT" sz="1400" dirty="0"/>
+              <a:t> to </a:t>
+            </a:r>
+            <a:r>
+              <a:rPr lang="it-IT" sz="1400" dirty="0" err="1"/>
+              <a:t>avoid</a:t>
+            </a:r>
+            <a:r>
+              <a:rPr lang="it-IT" sz="1400" dirty="0"/>
+              <a:t> browser </a:t>
+            </a:r>
+            <a:r>
+              <a:rPr lang="it-IT" sz="1400" dirty="0" err="1"/>
+              <a:t>crashing</a:t>
+            </a:r>
+            <a:r>
+              <a:rPr lang="it-IT" sz="1400" dirty="0"/>
+              <a:t>.</a:t>
+            </a:r>
+          </a:p>
+          <a:p>
+            <a:pPr marL="342900" indent="-342900">
+              <a:lnSpc>
+                <a:spcPct val="150000"/>
+              </a:lnSpc>
+              <a:buFont typeface="+mj-lt"/>
+              <a:buAutoNum type="arabicPeriod"/>
+            </a:pPr>
+            <a:r>
+              <a:rPr lang="it-IT" sz="1400" dirty="0"/>
+              <a:t>The projects can be </a:t>
+            </a:r>
+            <a:r>
+              <a:rPr lang="it-IT" sz="1400" dirty="0" err="1"/>
+              <a:t>stored</a:t>
+            </a:r>
+            <a:r>
+              <a:rPr lang="it-IT" sz="1400" dirty="0"/>
+              <a:t> by the user on </a:t>
+            </a:r>
+            <a:r>
+              <a:rPr lang="it-IT" sz="1400" dirty="0" err="1"/>
+              <a:t>local</a:t>
+            </a:r>
+            <a:r>
+              <a:rPr lang="it-IT" sz="1400" dirty="0"/>
+              <a:t> disk or workspace (He can decide </a:t>
+            </a:r>
+            <a:r>
+              <a:rPr lang="it-IT" sz="1400" dirty="0" err="1"/>
+              <a:t>selecting</a:t>
+            </a:r>
+            <a:r>
+              <a:rPr lang="it-IT" sz="1400" dirty="0"/>
+              <a:t> the project options).</a:t>
+            </a:r>
+          </a:p>
+          <a:p>
+            <a:pPr marL="342900" indent="-342900">
+              <a:lnSpc>
+                <a:spcPct val="150000"/>
+              </a:lnSpc>
+              <a:buFont typeface="+mj-lt"/>
+              <a:buAutoNum type="arabicPeriod"/>
+            </a:pPr>
+            <a:r>
+              <a:rPr lang="it-IT" sz="1400" dirty="0"/>
+              <a:t>At first loading the editor can </a:t>
+            </a:r>
+            <a:r>
+              <a:rPr lang="it-IT" sz="1400" dirty="0" err="1"/>
+              <a:t>have</a:t>
+            </a:r>
+            <a:r>
+              <a:rPr lang="it-IT" sz="1400" dirty="0"/>
+              <a:t> </a:t>
+            </a:r>
+            <a:r>
+              <a:rPr lang="it-IT" sz="1400" dirty="0" err="1"/>
+              <a:t>as</a:t>
+            </a:r>
+            <a:r>
+              <a:rPr lang="it-IT" sz="1400" dirty="0"/>
+              <a:t> input i) the project from the DB (workspace), ii) the project from </a:t>
+            </a:r>
+            <a:r>
+              <a:rPr lang="it-IT" sz="1400" dirty="0" err="1"/>
+              <a:t>local</a:t>
+            </a:r>
+            <a:r>
+              <a:rPr lang="it-IT" sz="1400" dirty="0"/>
+              <a:t> disk.</a:t>
+            </a:r>
+          </a:p>
+          <a:p>
+            <a:pPr marL="342900" indent="-342900">
+              <a:lnSpc>
+                <a:spcPct val="150000"/>
+              </a:lnSpc>
+              <a:buFont typeface="+mj-lt"/>
+              <a:buAutoNum type="arabicPeriod"/>
+            </a:pPr>
+            <a:r>
+              <a:rPr lang="it-IT" sz="1400" dirty="0" err="1"/>
+              <a:t>Anyway</a:t>
+            </a:r>
+            <a:r>
+              <a:rPr lang="it-IT" sz="1400" dirty="0"/>
+              <a:t>, </a:t>
+            </a:r>
+            <a:r>
+              <a:rPr lang="it-IT" sz="1400" dirty="0" err="1"/>
+              <a:t>since</a:t>
+            </a:r>
+            <a:r>
+              <a:rPr lang="it-IT" sz="1400" dirty="0"/>
+              <a:t> inside project can be </a:t>
+            </a:r>
+            <a:r>
+              <a:rPr lang="it-IT" sz="1400" dirty="0" err="1"/>
+              <a:t>located</a:t>
+            </a:r>
+            <a:r>
+              <a:rPr lang="it-IT" sz="1400" dirty="0"/>
+              <a:t> </a:t>
+            </a:r>
+            <a:r>
+              <a:rPr lang="it-IT" sz="1400" dirty="0" err="1"/>
+              <a:t>many</a:t>
+            </a:r>
+            <a:r>
+              <a:rPr lang="it-IT" sz="1400" dirty="0"/>
+              <a:t> Boards and Apps, </a:t>
+            </a:r>
+            <a:r>
+              <a:rPr lang="it-IT" sz="1400" dirty="0" err="1"/>
+              <a:t>ImportDatas</a:t>
+            </a:r>
+            <a:r>
+              <a:rPr lang="it-IT" sz="1400" dirty="0"/>
+              <a:t> and Datasets, the </a:t>
+            </a:r>
+            <a:r>
+              <a:rPr lang="it-IT" sz="1400" dirty="0" err="1"/>
+              <a:t>external</a:t>
+            </a:r>
+            <a:r>
+              <a:rPr lang="it-IT" sz="1400" dirty="0"/>
+              <a:t> storage must be </a:t>
+            </a:r>
+            <a:r>
+              <a:rPr lang="it-IT" sz="1400" dirty="0" err="1"/>
+              <a:t>always</a:t>
+            </a:r>
+            <a:r>
+              <a:rPr lang="it-IT" sz="1400" dirty="0"/>
+              <a:t> </a:t>
+            </a:r>
+            <a:r>
+              <a:rPr lang="it-IT" sz="1400" dirty="0" err="1"/>
+              <a:t>used</a:t>
+            </a:r>
+            <a:r>
+              <a:rPr lang="it-IT" sz="1400" dirty="0"/>
+              <a:t>.</a:t>
+            </a:r>
+          </a:p>
+          <a:p>
+            <a:pPr marL="342900" indent="-342900">
+              <a:lnSpc>
+                <a:spcPct val="150000"/>
+              </a:lnSpc>
+              <a:buFont typeface="+mj-lt"/>
+              <a:buAutoNum type="arabicPeriod"/>
+            </a:pPr>
+            <a:endParaRPr lang="it-IT" sz="1400" dirty="0">
+              <a:highlight>
+                <a:srgbClr val="FFFF00"/>
+              </a:highlight>
+            </a:endParaRPr>
+          </a:p>
+          <a:p>
+            <a:pPr marL="342900" indent="-342900">
+              <a:lnSpc>
+                <a:spcPct val="150000"/>
+              </a:lnSpc>
+              <a:buFont typeface="+mj-lt"/>
+              <a:buAutoNum type="arabicPeriod"/>
+            </a:pPr>
+            <a:endParaRPr lang="it-IT" sz="1400" dirty="0">
+              <a:highlight>
+                <a:srgbClr val="FFFF00"/>
+              </a:highlight>
+            </a:endParaRPr>
+          </a:p>
+        </p:txBody>
+      </p:sp>
+    </p:spTree>
+    <p:extLst>
+      <p:ext uri="{BB962C8B-B14F-4D97-AF65-F5344CB8AC3E}">
+        <p14:creationId xmlns:p14="http://schemas.microsoft.com/office/powerpoint/2010/main" val="2282532433"/>
+      </p:ext>
+    </p:extLst>
+  </p:cSld>
+  <p:clrMapOvr>
+    <a:masterClrMapping/>
+  </p:clrMapOvr>
+</p:sld>
+</file>
+
+<file path=ppt/slides/slide2.xml><?xml version="1.0" encoding="utf-8"?>
+<p:sld xmlns:a="http://schemas.openxmlformats.org/drawingml/2006/main" xmlns:r="http://schemas.openxmlformats.org/officeDocument/2006/relationships" xmlns:p="http://schemas.openxmlformats.org/presentationml/2006/main">
+  <p:cSld>
+    <p:spTree>
+      <p:nvGrpSpPr>
+        <p:cNvPr id="1" name="">
+          <a:extLst>
+            <a:ext uri="{FF2B5EF4-FFF2-40B4-BE49-F238E27FC236}">
+              <a16:creationId xmlns:a16="http://schemas.microsoft.com/office/drawing/2014/main" id="{17232DB6-9EC8-664C-2939-8064EC46BFF2}"/>
+            </a:ext>
+          </a:extLst>
+        </p:cNvPr>
+        <p:cNvGrpSpPr/>
+        <p:nvPr/>
+      </p:nvGrpSpPr>
+      <p:grpSpPr>
+        <a:xfrm>
+          <a:off x="0" y="0"/>
+          <a:ext cx="0" cy="0"/>
+          <a:chOff x="0" y="0"/>
+          <a:chExt cx="0" cy="0"/>
+        </a:xfrm>
+      </p:grpSpPr>
+      <p:sp>
+        <p:nvSpPr>
+          <p:cNvPr id="4" name="CasellaDiTesto 3">
+            <a:extLst>
+              <a:ext uri="{FF2B5EF4-FFF2-40B4-BE49-F238E27FC236}">
+                <a16:creationId xmlns:a16="http://schemas.microsoft.com/office/drawing/2014/main" id="{A1F9BA34-1105-A930-1362-9193040EFDAD}"/>
+              </a:ext>
+            </a:extLst>
+          </p:cNvPr>
+          <p:cNvSpPr txBox="1"/>
+          <p:nvPr/>
+        </p:nvSpPr>
+        <p:spPr>
+          <a:xfrm>
+            <a:off x="294968" y="99773"/>
+            <a:ext cx="2509020" cy="523220"/>
+          </a:xfrm>
+          <a:prstGeom prst="rect">
+            <a:avLst/>
+          </a:prstGeom>
+          <a:noFill/>
+        </p:spPr>
+        <p:txBody>
+          <a:bodyPr wrap="none" rtlCol="0">
+            <a:spAutoFit/>
+          </a:bodyPr>
+          <a:lstStyle/>
+          <a:p>
+            <a:r>
+              <a:rPr lang="it-IT" sz="2800" dirty="0" err="1"/>
+              <a:t>Overview</a:t>
+            </a:r>
+            <a:r>
+              <a:rPr lang="it-IT" sz="2800" dirty="0"/>
+              <a:t> (2/2):</a:t>
+            </a:r>
+          </a:p>
+        </p:txBody>
+      </p:sp>
+      <p:sp>
+        <p:nvSpPr>
+          <p:cNvPr id="2" name="CasellaDiTesto 1">
+            <a:extLst>
+              <a:ext uri="{FF2B5EF4-FFF2-40B4-BE49-F238E27FC236}">
+                <a16:creationId xmlns:a16="http://schemas.microsoft.com/office/drawing/2014/main" id="{791C4C5E-48C8-F310-36D9-F0831446F6A8}"/>
+              </a:ext>
+            </a:extLst>
+          </p:cNvPr>
+          <p:cNvSpPr txBox="1"/>
+          <p:nvPr/>
+        </p:nvSpPr>
+        <p:spPr>
+          <a:xfrm>
+            <a:off x="0" y="608430"/>
+            <a:ext cx="12192000" cy="3939284"/>
+          </a:xfrm>
+          <a:prstGeom prst="rect">
+            <a:avLst/>
+          </a:prstGeom>
+          <a:noFill/>
+        </p:spPr>
+        <p:txBody>
+          <a:bodyPr wrap="square" rtlCol="0">
+            <a:spAutoFit/>
+          </a:bodyPr>
+          <a:lstStyle/>
+          <a:p>
+            <a:pPr marL="342900" indent="-342900">
+              <a:lnSpc>
+                <a:spcPct val="150000"/>
+              </a:lnSpc>
+              <a:buFont typeface="+mj-lt"/>
+              <a:buAutoNum type="arabicPeriod"/>
+            </a:pPr>
+            <a:r>
+              <a:rPr lang="it-IT" sz="1400" dirty="0" err="1"/>
+              <a:t>Both</a:t>
+            </a:r>
+            <a:r>
+              <a:rPr lang="it-IT" sz="1400" dirty="0"/>
+              <a:t> web app and </a:t>
+            </a:r>
+            <a:r>
+              <a:rPr lang="it-IT" sz="1400" dirty="0" err="1"/>
+              <a:t>deskto</a:t>
+            </a:r>
+            <a:r>
+              <a:rPr lang="it-IT" sz="1400" dirty="0"/>
+              <a:t> app </a:t>
+            </a:r>
+            <a:r>
+              <a:rPr lang="it-IT" sz="1400" dirty="0" err="1"/>
+              <a:t>will</a:t>
+            </a:r>
+            <a:r>
+              <a:rPr lang="it-IT" sz="1400" dirty="0"/>
+              <a:t> support special features:</a:t>
+            </a:r>
+          </a:p>
+          <a:p>
+            <a:pPr marL="800100" lvl="1" indent="-342900">
+              <a:lnSpc>
+                <a:spcPct val="150000"/>
+              </a:lnSpc>
+              <a:buFont typeface="+mj-lt"/>
+              <a:buAutoNum type="arabicPeriod"/>
+            </a:pPr>
+            <a:r>
+              <a:rPr lang="it-IT" sz="1400" dirty="0"/>
+              <a:t>Component Library: TBD</a:t>
+            </a:r>
+          </a:p>
+          <a:p>
+            <a:pPr marL="800100" lvl="1" indent="-342900">
+              <a:lnSpc>
+                <a:spcPct val="150000"/>
+              </a:lnSpc>
+              <a:buFont typeface="+mj-lt"/>
+              <a:buAutoNum type="arabicPeriod"/>
+            </a:pPr>
+            <a:r>
+              <a:rPr lang="it-IT" sz="1400" dirty="0"/>
+              <a:t>Sharing: TBD</a:t>
+            </a:r>
+          </a:p>
+          <a:p>
+            <a:pPr marL="800100" lvl="1" indent="-342900">
+              <a:lnSpc>
+                <a:spcPct val="150000"/>
+              </a:lnSpc>
+              <a:buFont typeface="+mj-lt"/>
+              <a:buAutoNum type="arabicPeriod"/>
+            </a:pPr>
+            <a:r>
+              <a:rPr lang="it-IT" sz="1400" dirty="0" err="1"/>
+              <a:t>Suggestions</a:t>
+            </a:r>
+            <a:r>
+              <a:rPr lang="it-IT" sz="1400" dirty="0"/>
+              <a:t>: TBD</a:t>
+            </a:r>
+          </a:p>
+          <a:p>
+            <a:pPr marL="800100" lvl="1" indent="-342900">
+              <a:lnSpc>
+                <a:spcPct val="150000"/>
+              </a:lnSpc>
+              <a:buFont typeface="+mj-lt"/>
+              <a:buAutoNum type="arabicPeriod"/>
+            </a:pPr>
+            <a:r>
+              <a:rPr lang="it-IT" sz="1400" dirty="0"/>
+              <a:t>Design Template: TBD</a:t>
+            </a:r>
+          </a:p>
+          <a:p>
+            <a:pPr marL="800100" lvl="1" indent="-342900">
+              <a:lnSpc>
+                <a:spcPct val="150000"/>
+              </a:lnSpc>
+              <a:buFont typeface="+mj-lt"/>
+              <a:buAutoNum type="arabicPeriod"/>
+            </a:pPr>
+            <a:r>
+              <a:rPr lang="it-IT" sz="1400" dirty="0"/>
+              <a:t>Design </a:t>
+            </a:r>
+            <a:r>
+              <a:rPr lang="it-IT" sz="1400" dirty="0" err="1"/>
+              <a:t>Blocks</a:t>
+            </a:r>
+            <a:r>
+              <a:rPr lang="it-IT" sz="1400" dirty="0"/>
+              <a:t>: TBD</a:t>
+            </a:r>
+          </a:p>
+          <a:p>
+            <a:pPr marL="342900" indent="-342900">
+              <a:lnSpc>
+                <a:spcPct val="150000"/>
+              </a:lnSpc>
+              <a:buFont typeface="+mj-lt"/>
+              <a:buAutoNum type="arabicPeriod"/>
+            </a:pPr>
+            <a:endParaRPr lang="it-IT" sz="1400" dirty="0">
+              <a:highlight>
+                <a:srgbClr val="FFFF00"/>
+              </a:highlight>
+            </a:endParaRPr>
+          </a:p>
+          <a:p>
+            <a:pPr marL="342900" indent="-342900">
+              <a:lnSpc>
+                <a:spcPct val="150000"/>
+              </a:lnSpc>
+              <a:buFont typeface="+mj-lt"/>
+              <a:buAutoNum type="arabicPeriod"/>
+            </a:pPr>
+            <a:endParaRPr lang="it-IT" sz="1400" dirty="0">
+              <a:highlight>
+                <a:srgbClr val="FFFF00"/>
+              </a:highlight>
+            </a:endParaRPr>
+          </a:p>
+          <a:p>
+            <a:pPr marL="342900" indent="-342900">
+              <a:lnSpc>
+                <a:spcPct val="150000"/>
+              </a:lnSpc>
+              <a:buFont typeface="+mj-lt"/>
+              <a:buAutoNum type="arabicPeriod"/>
+            </a:pPr>
+            <a:endParaRPr lang="it-IT" sz="1400" dirty="0">
+              <a:highlight>
+                <a:srgbClr val="FFFF00"/>
+              </a:highlight>
+            </a:endParaRPr>
+          </a:p>
+          <a:p>
+            <a:pPr marL="342900" indent="-342900">
+              <a:lnSpc>
+                <a:spcPct val="150000"/>
+              </a:lnSpc>
+              <a:buFont typeface="+mj-lt"/>
+              <a:buAutoNum type="arabicPeriod"/>
+            </a:pPr>
+            <a:endParaRPr lang="it-IT" sz="1400" dirty="0">
+              <a:highlight>
+                <a:srgbClr val="FFFF00"/>
+              </a:highlight>
+            </a:endParaRPr>
+          </a:p>
+          <a:p>
+            <a:pPr marL="342900" indent="-342900">
+              <a:lnSpc>
+                <a:spcPct val="150000"/>
+              </a:lnSpc>
+              <a:buFont typeface="+mj-lt"/>
+              <a:buAutoNum type="arabicPeriod"/>
+            </a:pPr>
+            <a:endParaRPr lang="it-IT" sz="1400" dirty="0">
+              <a:highlight>
+                <a:srgbClr val="FFFF00"/>
+              </a:highlight>
+            </a:endParaRPr>
+          </a:p>
+          <a:p>
+            <a:pPr marL="342900" indent="-342900">
+              <a:lnSpc>
+                <a:spcPct val="150000"/>
+              </a:lnSpc>
+              <a:buFont typeface="+mj-lt"/>
+              <a:buAutoNum type="arabicPeriod"/>
+            </a:pPr>
+            <a:endParaRPr lang="it-IT" sz="1400" dirty="0">
+              <a:highlight>
+                <a:srgbClr val="FFFF00"/>
+              </a:highlight>
+            </a:endParaRPr>
+          </a:p>
+        </p:txBody>
+      </p:sp>
+    </p:spTree>
+    <p:extLst>
+      <p:ext uri="{BB962C8B-B14F-4D97-AF65-F5344CB8AC3E}">
+        <p14:creationId xmlns:p14="http://schemas.microsoft.com/office/powerpoint/2010/main" val="1060832095"/>
+      </p:ext>
+    </p:extLst>
+  </p:cSld>
+  <p:clrMapOvr>
+    <a:masterClrMapping/>
+  </p:clrMapOvr>
+</p:sld>
+</file>
+
+<file path=ppt/slides/slide3.xml><?xml version="1.0" encoding="utf-8"?>
+<p:sld xmlns:a="http://schemas.openxmlformats.org/drawingml/2006/main" xmlns:r="http://schemas.openxmlformats.org/officeDocument/2006/relationships" xmlns:p="http://schemas.openxmlformats.org/presentationml/2006/main">
+  <p:cSld>
+    <p:spTree>
+      <p:nvGrpSpPr>
+        <p:cNvPr id="1" name="">
+          <a:extLst>
+            <a:ext uri="{FF2B5EF4-FFF2-40B4-BE49-F238E27FC236}">
+              <a16:creationId xmlns:a16="http://schemas.microsoft.com/office/drawing/2014/main" id="{F4B69211-065F-8382-C371-5204F8AE1B13}"/>
+            </a:ext>
+          </a:extLst>
+        </p:cNvPr>
+        <p:cNvGrpSpPr/>
+        <p:nvPr/>
+      </p:nvGrpSpPr>
+      <p:grpSpPr>
+        <a:xfrm>
+          <a:off x="0" y="0"/>
+          <a:ext cx="0" cy="0"/>
+          <a:chOff x="0" y="0"/>
+          <a:chExt cx="0" cy="0"/>
+        </a:xfrm>
+      </p:grpSpPr>
+      <p:sp>
+        <p:nvSpPr>
+          <p:cNvPr id="4" name="CasellaDiTesto 3">
+            <a:extLst>
+              <a:ext uri="{FF2B5EF4-FFF2-40B4-BE49-F238E27FC236}">
+                <a16:creationId xmlns:a16="http://schemas.microsoft.com/office/drawing/2014/main" id="{323A26CB-DD12-948B-881E-A41285A1148E}"/>
+              </a:ext>
+            </a:extLst>
+          </p:cNvPr>
+          <p:cNvSpPr txBox="1"/>
+          <p:nvPr/>
+        </p:nvSpPr>
+        <p:spPr>
+          <a:xfrm>
             <a:off x="294968" y="255638"/>
             <a:ext cx="2858860" cy="523220"/>
           </a:xfrm>
@@ -3382,7 +4952,7 @@
           <p:cNvPr id="14" name="CasellaDiTesto 13">
             <a:extLst>
               <a:ext uri="{FF2B5EF4-FFF2-40B4-BE49-F238E27FC236}">
-                <a16:creationId xmlns:a16="http://schemas.microsoft.com/office/drawing/2014/main" id="{73CCA339-21CB-5013-192A-8ABA3EC5E090}"/>
+                <a16:creationId xmlns:a16="http://schemas.microsoft.com/office/drawing/2014/main" id="{5526FE66-3A58-1F97-C781-6C0A726D9A4E}"/>
               </a:ext>
             </a:extLst>
           </p:cNvPr>
@@ -3492,7 +5062,7 @@
           <p:cNvPr id="17" name="CasellaDiTesto 16">
             <a:extLst>
               <a:ext uri="{FF2B5EF4-FFF2-40B4-BE49-F238E27FC236}">
-                <a16:creationId xmlns:a16="http://schemas.microsoft.com/office/drawing/2014/main" id="{3C1E0CA5-2F15-535C-EF19-9CC536F7DC7C}"/>
+                <a16:creationId xmlns:a16="http://schemas.microsoft.com/office/drawing/2014/main" id="{A5A34683-6354-7FC0-8740-510AD0460D51}"/>
               </a:ext>
             </a:extLst>
           </p:cNvPr>
@@ -3815,7 +5385,7 @@
           <p:cNvPr id="36" name="Connettore 2 35">
             <a:extLst>
               <a:ext uri="{FF2B5EF4-FFF2-40B4-BE49-F238E27FC236}">
-                <a16:creationId xmlns:a16="http://schemas.microsoft.com/office/drawing/2014/main" id="{2EFB2B3D-955B-3811-BACB-EDFE092E4D7B}"/>
+                <a16:creationId xmlns:a16="http://schemas.microsoft.com/office/drawing/2014/main" id="{3E3BD0C9-498D-0D88-BAE0-102C2FFAC292}"/>
               </a:ext>
             </a:extLst>
           </p:cNvPr>
@@ -3862,7 +5432,7 @@
           <p:cNvPr id="58" name="CasellaDiTesto 57">
             <a:extLst>
               <a:ext uri="{FF2B5EF4-FFF2-40B4-BE49-F238E27FC236}">
-                <a16:creationId xmlns:a16="http://schemas.microsoft.com/office/drawing/2014/main" id="{0BFB5981-2A97-913D-6556-8D31EF3C8DD2}"/>
+                <a16:creationId xmlns:a16="http://schemas.microsoft.com/office/drawing/2014/main" id="{F8674DAF-481F-FF3C-BA28-9A86ADA15A67}"/>
               </a:ext>
             </a:extLst>
           </p:cNvPr>
@@ -3898,7 +5468,7 @@
           <p:cNvPr id="61" name="CasellaDiTesto 60">
             <a:extLst>
               <a:ext uri="{FF2B5EF4-FFF2-40B4-BE49-F238E27FC236}">
-                <a16:creationId xmlns:a16="http://schemas.microsoft.com/office/drawing/2014/main" id="{756C32C0-EFFE-3234-33D1-ACC2171788DD}"/>
+                <a16:creationId xmlns:a16="http://schemas.microsoft.com/office/drawing/2014/main" id="{A4EE1236-6D4C-99A8-F5CE-3682338926E7}"/>
               </a:ext>
             </a:extLst>
           </p:cNvPr>
@@ -4085,7 +5655,7 @@
           <p:cNvPr id="63" name="Connettore 2 62">
             <a:extLst>
               <a:ext uri="{FF2B5EF4-FFF2-40B4-BE49-F238E27FC236}">
-                <a16:creationId xmlns:a16="http://schemas.microsoft.com/office/drawing/2014/main" id="{8F686E94-D17F-5DA3-5430-D88328AADD7A}"/>
+                <a16:creationId xmlns:a16="http://schemas.microsoft.com/office/drawing/2014/main" id="{06199284-4CC9-5C2A-9751-EE6059F3D95B}"/>
               </a:ext>
             </a:extLst>
           </p:cNvPr>
@@ -4132,7 +5702,7 @@
           <p:cNvPr id="67" name="CasellaDiTesto 66">
             <a:extLst>
               <a:ext uri="{FF2B5EF4-FFF2-40B4-BE49-F238E27FC236}">
-                <a16:creationId xmlns:a16="http://schemas.microsoft.com/office/drawing/2014/main" id="{0523DFA3-AF1A-17A1-F99E-091041D82D1C}"/>
+                <a16:creationId xmlns:a16="http://schemas.microsoft.com/office/drawing/2014/main" id="{C8E167D1-366D-F298-3B53-E69BB49A10F1}"/>
               </a:ext>
             </a:extLst>
           </p:cNvPr>
@@ -4173,7 +5743,7 @@
           <p:cNvPr id="79" name="CasellaDiTesto 78">
             <a:extLst>
               <a:ext uri="{FF2B5EF4-FFF2-40B4-BE49-F238E27FC236}">
-                <a16:creationId xmlns:a16="http://schemas.microsoft.com/office/drawing/2014/main" id="{E431608C-4216-8AF2-F2CE-AA2C808BEC84}"/>
+                <a16:creationId xmlns:a16="http://schemas.microsoft.com/office/drawing/2014/main" id="{01411A67-B24B-10E4-B686-60AC642065FB}"/>
               </a:ext>
             </a:extLst>
           </p:cNvPr>
@@ -4224,7 +5794,7 @@
           <p:cNvPr id="80" name="CasellaDiTesto 79">
             <a:extLst>
               <a:ext uri="{FF2B5EF4-FFF2-40B4-BE49-F238E27FC236}">
-                <a16:creationId xmlns:a16="http://schemas.microsoft.com/office/drawing/2014/main" id="{A1FCE3A5-87A9-ADE8-0666-DFC2B5B69325}"/>
+                <a16:creationId xmlns:a16="http://schemas.microsoft.com/office/drawing/2014/main" id="{5848685B-499D-BC05-88FC-68FF83424C01}"/>
               </a:ext>
             </a:extLst>
           </p:cNvPr>
@@ -4286,7 +5856,7 @@
           <p:cNvPr id="82" name="Connettore a gomito 81">
             <a:extLst>
               <a:ext uri="{FF2B5EF4-FFF2-40B4-BE49-F238E27FC236}">
-                <a16:creationId xmlns:a16="http://schemas.microsoft.com/office/drawing/2014/main" id="{5655CD98-3F08-C79C-D70C-CD12A9FDD4D9}"/>
+                <a16:creationId xmlns:a16="http://schemas.microsoft.com/office/drawing/2014/main" id="{F04281E0-6AF7-3FC1-783A-908FCB2640CD}"/>
               </a:ext>
             </a:extLst>
           </p:cNvPr>
@@ -4329,7 +5899,7 @@
           <p:cNvPr id="83" name="Connettore a gomito 82">
             <a:extLst>
               <a:ext uri="{FF2B5EF4-FFF2-40B4-BE49-F238E27FC236}">
-                <a16:creationId xmlns:a16="http://schemas.microsoft.com/office/drawing/2014/main" id="{7E6144FC-1170-BECD-8F76-DDD2F3608E1F}"/>
+                <a16:creationId xmlns:a16="http://schemas.microsoft.com/office/drawing/2014/main" id="{C9E7EE93-3DCE-DB12-FBDA-8247EAE5A8BD}"/>
               </a:ext>
             </a:extLst>
           </p:cNvPr>
@@ -4371,7 +5941,7 @@
     </p:spTree>
     <p:extLst>
       <p:ext uri="{BB962C8B-B14F-4D97-AF65-F5344CB8AC3E}">
-        <p14:creationId xmlns:p14="http://schemas.microsoft.com/office/powerpoint/2010/main" val="2282532433"/>
+        <p14:creationId xmlns:p14="http://schemas.microsoft.com/office/powerpoint/2010/main" val="54190033"/>
       </p:ext>
     </p:extLst>
   </p:cSld>
@@ -4381,7 +5951,7 @@
 </p:sld>
 </file>
 
-<file path=ppt/slides/slide2.xml><?xml version="1.0" encoding="utf-8"?>
+<file path=ppt/slides/slide4.xml><?xml version="1.0" encoding="utf-8"?>
 <p:sld xmlns:a="http://schemas.openxmlformats.org/drawingml/2006/main" xmlns:r="http://schemas.openxmlformats.org/officeDocument/2006/relationships" xmlns:p="http://schemas.openxmlformats.org/presentationml/2006/main">
   <p:cSld>
     <p:spTree>
@@ -7433,7 +9003,7 @@
 </p:sld>
 </file>
 
-<file path=ppt/slides/slide3.xml><?xml version="1.0" encoding="utf-8"?>
+<file path=ppt/slides/slide5.xml><?xml version="1.0" encoding="utf-8"?>
 <p:sld xmlns:a="http://schemas.openxmlformats.org/drawingml/2006/main" xmlns:r="http://schemas.openxmlformats.org/officeDocument/2006/relationships" xmlns:p="http://schemas.openxmlformats.org/presentationml/2006/main">
   <p:cSld>
     <p:spTree>
@@ -7514,7 +9084,7 @@
         <p:spPr>
           <a:xfrm>
             <a:off x="211464" y="649994"/>
-            <a:ext cx="11631669" cy="830997"/>
+            <a:ext cx="11631669" cy="584775"/>
           </a:xfrm>
           <a:prstGeom prst="rect">
             <a:avLst/>
@@ -7532,154 +9102,60 @@
               <a:buAutoNum type="arabicPeriod"/>
             </a:pPr>
             <a:r>
-              <a:rPr lang="it-IT" sz="1600" dirty="0" err="1">
-                <a:highlight>
-                  <a:srgbClr val="FFFF00"/>
-                </a:highlight>
-              </a:rPr>
+              <a:rPr lang="it-IT" sz="1600" dirty="0" err="1"/>
               <a:t>Simulation</a:t>
             </a:r>
             <a:r>
-              <a:rPr lang="it-IT" sz="1600" dirty="0">
-                <a:highlight>
-                  <a:srgbClr val="FFFF00"/>
-                </a:highlight>
-              </a:rPr>
+              <a:rPr lang="it-IT" sz="1600" dirty="0"/>
               <a:t> </a:t>
             </a:r>
             <a:r>
-              <a:rPr lang="it-IT" sz="1600" dirty="0" err="1">
-                <a:highlight>
-                  <a:srgbClr val="FFFF00"/>
-                </a:highlight>
-              </a:rPr>
+              <a:rPr lang="it-IT" sz="1600" dirty="0" err="1"/>
               <a:t>Locker</a:t>
             </a:r>
             <a:r>
-              <a:rPr lang="it-IT" sz="1600" dirty="0">
-                <a:highlight>
-                  <a:srgbClr val="FFFF00"/>
-                </a:highlight>
-              </a:rPr>
+              <a:rPr lang="it-IT" sz="1600" dirty="0"/>
               <a:t> to </a:t>
             </a:r>
             <a:r>
-              <a:rPr lang="it-IT" sz="1600" dirty="0" err="1">
-                <a:highlight>
-                  <a:srgbClr val="FFFF00"/>
-                </a:highlight>
-              </a:rPr>
+              <a:rPr lang="it-IT" sz="1600" dirty="0" err="1"/>
               <a:t>avoid</a:t>
             </a:r>
             <a:r>
-              <a:rPr lang="it-IT" sz="1600" dirty="0">
-                <a:highlight>
-                  <a:srgbClr val="FFFF00"/>
-                </a:highlight>
-              </a:rPr>
-              <a:t> running the solver </a:t>
-            </a:r>
-            <a:r>
-              <a:rPr lang="it-IT" sz="1600" dirty="0" err="1">
-                <a:highlight>
-                  <a:srgbClr val="FFFF00"/>
-                </a:highlight>
-              </a:rPr>
-              <a:t>engine</a:t>
-            </a:r>
-            <a:r>
-              <a:rPr lang="it-IT" sz="1600" dirty="0">
-                <a:highlight>
-                  <a:srgbClr val="FFFF00"/>
-                </a:highlight>
-              </a:rPr>
+              <a:rPr lang="it-IT" sz="1600" dirty="0"/>
+              <a:t> the </a:t>
+            </a:r>
+            <a:r>
+              <a:rPr lang="it-IT" sz="1600" dirty="0" err="1"/>
+              <a:t>same</a:t>
+            </a:r>
+            <a:r>
+              <a:rPr lang="it-IT" sz="1600" dirty="0"/>
+              <a:t> user to </a:t>
+            </a:r>
+            <a:r>
+              <a:rPr lang="it-IT" sz="1600" dirty="0" err="1"/>
+              <a:t>run</a:t>
+            </a:r>
+            <a:r>
+              <a:rPr lang="it-IT" sz="1600" dirty="0"/>
               <a:t> more </a:t>
             </a:r>
             <a:r>
-              <a:rPr lang="it-IT" sz="1600" dirty="0" err="1">
-                <a:highlight>
-                  <a:srgbClr val="FFFF00"/>
-                </a:highlight>
-              </a:rPr>
+              <a:rPr lang="it-IT" sz="1600" dirty="0" err="1"/>
               <a:t>than</a:t>
             </a:r>
             <a:r>
-              <a:rPr lang="it-IT" sz="1600" dirty="0">
-                <a:highlight>
-                  <a:srgbClr val="FFFF00"/>
-                </a:highlight>
-              </a:rPr>
-              <a:t> one time</a:t>
-            </a:r>
-          </a:p>
-          <a:p>
-            <a:pPr marL="800100" lvl="1" indent="-342900">
-              <a:buFont typeface="+mj-lt"/>
-              <a:buAutoNum type="arabicPeriod"/>
-            </a:pPr>
-            <a:r>
-              <a:rPr lang="it-IT" sz="1600" dirty="0" err="1">
-                <a:highlight>
-                  <a:srgbClr val="FFFF00"/>
-                </a:highlight>
-              </a:rPr>
-              <a:t>Absolutely</a:t>
-            </a:r>
-            <a:r>
-              <a:rPr lang="it-IT" sz="1600" dirty="0">
-                <a:highlight>
-                  <a:srgbClr val="FFFF00"/>
-                </a:highlight>
-              </a:rPr>
+              <a:rPr lang="it-IT" sz="1600" dirty="0"/>
               <a:t> one </a:t>
             </a:r>
             <a:r>
-              <a:rPr lang="it-IT" sz="1600" dirty="0" err="1">
-                <a:highlight>
-                  <a:srgbClr val="FFFF00"/>
-                </a:highlight>
-              </a:rPr>
+              <a:rPr lang="it-IT" sz="1600" dirty="0" err="1"/>
               <a:t>simulation</a:t>
             </a:r>
             <a:r>
-              <a:rPr lang="it-IT" sz="1600" dirty="0">
-                <a:highlight>
-                  <a:srgbClr val="FFFF00"/>
-                </a:highlight>
-              </a:rPr>
-              <a:t> </a:t>
-            </a:r>
-            <a:r>
-              <a:rPr lang="it-IT" sz="1600" dirty="0" err="1">
-                <a:highlight>
-                  <a:srgbClr val="FFFF00"/>
-                </a:highlight>
-              </a:rPr>
-              <a:t>at</a:t>
-            </a:r>
-            <a:r>
-              <a:rPr lang="it-IT" sz="1600" dirty="0">
-                <a:highlight>
-                  <a:srgbClr val="FFFF00"/>
-                </a:highlight>
-              </a:rPr>
-              <a:t> the time on the </a:t>
-            </a:r>
-            <a:r>
-              <a:rPr lang="it-IT" sz="1600" dirty="0" err="1">
-                <a:highlight>
-                  <a:srgbClr val="FFFF00"/>
-                </a:highlight>
-              </a:rPr>
-              <a:t>same</a:t>
-            </a:r>
-            <a:r>
-              <a:rPr lang="it-IT" sz="1600" dirty="0">
-                <a:highlight>
-                  <a:srgbClr val="FFFF00"/>
-                </a:highlight>
-              </a:rPr>
-              <a:t> PC</a:t>
+              <a:rPr lang="it-IT" sz="1600" dirty="0"/>
+              <a:t>.</a:t>
             </a:r>
           </a:p>
           <a:p>
@@ -7688,27 +9164,15 @@
               <a:buAutoNum type="arabicPeriod"/>
             </a:pPr>
             <a:r>
-              <a:rPr lang="it-IT" sz="1600" dirty="0">
-                <a:highlight>
-                  <a:srgbClr val="FFFF00"/>
-                </a:highlight>
-              </a:rPr>
+              <a:rPr lang="it-IT" sz="1600" dirty="0"/>
               <a:t>No </a:t>
             </a:r>
             <a:r>
-              <a:rPr lang="it-IT" sz="1600" dirty="0" err="1">
-                <a:highlight>
-                  <a:srgbClr val="FFFF00"/>
-                </a:highlight>
-              </a:rPr>
+              <a:rPr lang="it-IT" sz="1600" dirty="0" err="1"/>
               <a:t>simulations</a:t>
             </a:r>
             <a:r>
-              <a:rPr lang="it-IT" sz="1600" dirty="0">
-                <a:highlight>
-                  <a:srgbClr val="FFFF00"/>
-                </a:highlight>
-              </a:rPr>
+              <a:rPr lang="it-IT" sz="1600" dirty="0"/>
               <a:t> on Android</a:t>
             </a:r>
           </a:p>
@@ -7727,7 +9191,7 @@
 </p:sld>
 </file>
 
-<file path=ppt/slides/slide4.xml><?xml version="1.0" encoding="utf-8"?>
+<file path=ppt/slides/slide6.xml><?xml version="1.0" encoding="utf-8"?>
 <p:sld xmlns:a="http://schemas.openxmlformats.org/drawingml/2006/main" xmlns:r="http://schemas.openxmlformats.org/officeDocument/2006/relationships" xmlns:p="http://schemas.openxmlformats.org/presentationml/2006/main">
   <p:cSld>
     <p:spTree>
@@ -7808,7 +9272,7 @@
         <p:spPr>
           <a:xfrm>
             <a:off x="211464" y="649994"/>
-            <a:ext cx="11631669" cy="2554545"/>
+            <a:ext cx="11631669" cy="4278094"/>
           </a:xfrm>
           <a:prstGeom prst="rect">
             <a:avLst/>
@@ -7826,425 +9290,441 @@
               <a:buAutoNum type="arabicPeriod"/>
             </a:pPr>
             <a:r>
+              <a:rPr lang="it-IT" sz="1600" dirty="0"/>
+              <a:t>GUI </a:t>
+            </a:r>
+            <a:r>
+              <a:rPr lang="it-IT" sz="1600" dirty="0" err="1"/>
+              <a:t>chatGPT</a:t>
+            </a:r>
+            <a:r>
+              <a:rPr lang="it-IT" sz="1600" dirty="0"/>
+              <a:t> like </a:t>
+            </a:r>
+            <a:r>
+              <a:rPr lang="it-IT" sz="1600" dirty="0" err="1"/>
+              <a:t>where</a:t>
+            </a:r>
+            <a:r>
+              <a:rPr lang="it-IT" sz="1600" dirty="0"/>
+              <a:t>:</a:t>
+            </a:r>
+          </a:p>
+          <a:p>
+            <a:pPr marL="800100" lvl="1" indent="-342900">
+              <a:buFont typeface="+mj-lt"/>
+              <a:buAutoNum type="arabicPeriod"/>
+            </a:pPr>
+            <a:r>
+              <a:rPr lang="it-IT" sz="1600" dirty="0"/>
+              <a:t>The chats are </a:t>
+            </a:r>
+            <a:r>
+              <a:rPr lang="it-IT" sz="1600" dirty="0" err="1"/>
+              <a:t>actually</a:t>
+            </a:r>
+            <a:r>
+              <a:rPr lang="it-IT" sz="1600" dirty="0"/>
+              <a:t> the Board</a:t>
+            </a:r>
+          </a:p>
+          <a:p>
+            <a:pPr marL="800100" lvl="1" indent="-342900">
+              <a:buFont typeface="+mj-lt"/>
+              <a:buAutoNum type="arabicPeriod"/>
+            </a:pPr>
+            <a:r>
+              <a:rPr lang="it-IT" sz="1600" dirty="0"/>
+              <a:t>The </a:t>
+            </a:r>
+            <a:r>
+              <a:rPr lang="it-IT" sz="1600" dirty="0" err="1"/>
+              <a:t>GPTs</a:t>
+            </a:r>
+            <a:r>
+              <a:rPr lang="it-IT" sz="1600" dirty="0"/>
+              <a:t> are </a:t>
+            </a:r>
+            <a:r>
+              <a:rPr lang="it-IT" sz="1600" dirty="0" err="1"/>
+              <a:t>actually</a:t>
+            </a:r>
+            <a:r>
+              <a:rPr lang="it-IT" sz="1600" dirty="0"/>
+              <a:t> the Apps</a:t>
+            </a:r>
+          </a:p>
+          <a:p>
+            <a:pPr marL="800100" lvl="1" indent="-342900">
+              <a:buFont typeface="+mj-lt"/>
+              <a:buAutoNum type="arabicPeriod"/>
+            </a:pPr>
+            <a:r>
+              <a:rPr lang="it-IT" sz="1600" dirty="0" err="1"/>
+              <a:t>Includes</a:t>
+            </a:r>
+            <a:r>
+              <a:rPr lang="it-IT" sz="1600" dirty="0"/>
+              <a:t> </a:t>
+            </a:r>
+            <a:r>
+              <a:rPr lang="it-IT" sz="1600" dirty="0" err="1"/>
+              <a:t>also</a:t>
+            </a:r>
+            <a:r>
+              <a:rPr lang="it-IT" sz="1600" dirty="0"/>
+              <a:t> Data items</a:t>
+            </a:r>
+          </a:p>
+          <a:p>
+            <a:pPr marL="800100" lvl="1" indent="-342900">
+              <a:buFont typeface="+mj-lt"/>
+              <a:buAutoNum type="arabicPeriod"/>
+            </a:pPr>
+            <a:r>
+              <a:rPr lang="it-IT" sz="1600" dirty="0" err="1"/>
+              <a:t>Includes</a:t>
+            </a:r>
+            <a:r>
+              <a:rPr lang="it-IT" sz="1600" dirty="0"/>
+              <a:t> </a:t>
+            </a:r>
+            <a:r>
+              <a:rPr lang="it-IT" sz="1600" dirty="0" err="1"/>
+              <a:t>also</a:t>
+            </a:r>
+            <a:r>
+              <a:rPr lang="it-IT" sz="1600" dirty="0"/>
+              <a:t> Dataset items</a:t>
+            </a:r>
+          </a:p>
+          <a:p>
+            <a:pPr marL="800100" lvl="1" indent="-342900">
+              <a:buFont typeface="+mj-lt"/>
+              <a:buAutoNum type="arabicPeriod"/>
+            </a:pPr>
+            <a:r>
+              <a:rPr lang="it-IT" sz="1600" dirty="0" err="1"/>
+              <a:t>Includes</a:t>
+            </a:r>
+            <a:r>
+              <a:rPr lang="it-IT" sz="1600" dirty="0"/>
+              <a:t> </a:t>
+            </a:r>
+            <a:r>
+              <a:rPr lang="it-IT" sz="1600" dirty="0" err="1"/>
+              <a:t>aslo</a:t>
+            </a:r>
+            <a:r>
+              <a:rPr lang="it-IT" sz="1600" dirty="0"/>
+              <a:t> Library items</a:t>
+            </a:r>
+          </a:p>
+          <a:p>
+            <a:pPr marL="800100" lvl="1" indent="-342900">
+              <a:buFont typeface="+mj-lt"/>
+              <a:buAutoNum type="arabicPeriod"/>
+            </a:pPr>
+            <a:r>
+              <a:rPr lang="it-IT" sz="1600" dirty="0" err="1"/>
+              <a:t>Includes</a:t>
+            </a:r>
+            <a:r>
+              <a:rPr lang="it-IT" sz="1600" dirty="0"/>
+              <a:t> </a:t>
+            </a:r>
+            <a:r>
+              <a:rPr lang="it-IT" sz="1600" dirty="0" err="1"/>
+              <a:t>also</a:t>
+            </a:r>
+            <a:r>
+              <a:rPr lang="it-IT" sz="1600" dirty="0"/>
+              <a:t> Template items</a:t>
+            </a:r>
+          </a:p>
+          <a:p>
+            <a:pPr marL="800100" lvl="1" indent="-342900">
+              <a:buFont typeface="+mj-lt"/>
+              <a:buAutoNum type="arabicPeriod"/>
+            </a:pPr>
+            <a:r>
+              <a:rPr lang="it-IT" sz="1600" dirty="0"/>
+              <a:t>Include </a:t>
+            </a:r>
+            <a:r>
+              <a:rPr lang="it-IT" sz="1600" dirty="0" err="1"/>
+              <a:t>also</a:t>
+            </a:r>
+            <a:r>
+              <a:rPr lang="it-IT" sz="1600" dirty="0"/>
+              <a:t> </a:t>
+            </a:r>
+            <a:r>
+              <a:rPr lang="it-IT" sz="1600" dirty="0" err="1"/>
+              <a:t>Whiteboard</a:t>
+            </a:r>
+            <a:r>
+              <a:rPr lang="it-IT" sz="1600" dirty="0"/>
+              <a:t> items</a:t>
+            </a:r>
+          </a:p>
+          <a:p>
+            <a:pPr marL="342900" indent="-342900">
+              <a:buFont typeface="+mj-lt"/>
+              <a:buAutoNum type="arabicPeriod"/>
+            </a:pPr>
+            <a:r>
+              <a:rPr lang="it-IT" sz="1600" dirty="0"/>
+              <a:t>Charts:</a:t>
+            </a:r>
+          </a:p>
+          <a:p>
+            <a:pPr marL="800100" lvl="1" indent="-342900">
+              <a:buFont typeface="+mj-lt"/>
+              <a:buAutoNum type="arabicPeriod"/>
+            </a:pPr>
+            <a:r>
+              <a:rPr lang="it-IT" sz="1600" dirty="0"/>
+              <a:t>Regular chart: </a:t>
+            </a:r>
+          </a:p>
+          <a:p>
+            <a:pPr marL="1257300" lvl="2" indent="-342900">
+              <a:buFont typeface="Arial" panose="020B0604020202020204" pitchFamily="34" charset="0"/>
+              <a:buChar char="•"/>
+            </a:pPr>
+            <a:r>
+              <a:rPr lang="it-IT" sz="1600" dirty="0" err="1"/>
+              <a:t>already</a:t>
+            </a:r>
+            <a:r>
+              <a:rPr lang="it-IT" sz="1600" dirty="0"/>
+              <a:t> </a:t>
+            </a:r>
+            <a:r>
+              <a:rPr lang="it-IT" sz="1600" dirty="0" err="1"/>
+              <a:t>integrated</a:t>
+            </a:r>
+            <a:r>
+              <a:rPr lang="it-IT" sz="1600" dirty="0"/>
+              <a:t> inside </a:t>
+            </a:r>
+            <a:r>
+              <a:rPr lang="it-IT" sz="1600" dirty="0" err="1"/>
+              <a:t>each</a:t>
+            </a:r>
+            <a:r>
+              <a:rPr lang="it-IT" sz="1600" dirty="0"/>
+              <a:t> single Board</a:t>
+            </a:r>
+          </a:p>
+          <a:p>
+            <a:pPr marL="800100" lvl="1" indent="-342900">
+              <a:buFont typeface="+mj-lt"/>
+              <a:buAutoNum type="arabicPeriod"/>
+            </a:pPr>
+            <a:r>
+              <a:rPr lang="it-IT" sz="1600" dirty="0" err="1"/>
+              <a:t>Whiteboard</a:t>
+            </a:r>
+            <a:r>
+              <a:rPr lang="it-IT" sz="1600" dirty="0"/>
+              <a:t>: </a:t>
+            </a:r>
+          </a:p>
+          <a:p>
+            <a:pPr marL="1257300" lvl="2" indent="-342900">
+              <a:buFont typeface="Arial" panose="020B0604020202020204" pitchFamily="34" charset="0"/>
+              <a:buChar char="•"/>
+            </a:pPr>
+            <a:r>
+              <a:rPr lang="it-IT" sz="1600" dirty="0"/>
+              <a:t>a </a:t>
+            </a:r>
+            <a:r>
+              <a:rPr lang="it-IT" sz="1600" dirty="0" err="1"/>
+              <a:t>dedicted</a:t>
+            </a:r>
+            <a:r>
+              <a:rPr lang="it-IT" sz="1600" dirty="0"/>
+              <a:t> item in editor and </a:t>
+            </a:r>
+            <a:r>
+              <a:rPr lang="it-IT" sz="1600" dirty="0" err="1"/>
+              <a:t>where</a:t>
+            </a:r>
+            <a:r>
+              <a:rPr lang="it-IT" sz="1600" dirty="0"/>
+              <a:t> the user can </a:t>
+            </a:r>
+            <a:r>
+              <a:rPr lang="it-IT" sz="1600" dirty="0" err="1"/>
+              <a:t>add</a:t>
+            </a:r>
+            <a:r>
+              <a:rPr lang="it-IT" sz="1600" dirty="0"/>
+              <a:t> dataset or </a:t>
+            </a:r>
+            <a:r>
+              <a:rPr lang="it-IT" sz="1600" dirty="0" err="1"/>
+              <a:t>visualize</a:t>
+            </a:r>
+            <a:r>
+              <a:rPr lang="it-IT" sz="1600" dirty="0"/>
+              <a:t> </a:t>
+            </a:r>
+            <a:r>
+              <a:rPr lang="it-IT" sz="1600" dirty="0" err="1"/>
+              <a:t>existing</a:t>
+            </a:r>
+            <a:r>
+              <a:rPr lang="it-IT" sz="1600" dirty="0"/>
+              <a:t> dataset.</a:t>
+            </a:r>
+          </a:p>
+          <a:p>
+            <a:pPr marL="342900" indent="-342900">
+              <a:buFont typeface="+mj-lt"/>
+              <a:buAutoNum type="arabicPeriod"/>
+            </a:pPr>
+            <a:r>
+              <a:rPr lang="it-IT" sz="1600" dirty="0"/>
+              <a:t>Memory </a:t>
+            </a:r>
+            <a:r>
+              <a:rPr lang="it-IT" sz="1600" dirty="0" err="1"/>
+              <a:t>optimization</a:t>
+            </a:r>
+            <a:r>
+              <a:rPr lang="it-IT" sz="1600" dirty="0"/>
+              <a:t>:</a:t>
+            </a:r>
+          </a:p>
+          <a:p>
+            <a:pPr marL="800100" lvl="1" indent="-342900">
+              <a:buFont typeface="+mj-lt"/>
+              <a:buAutoNum type="arabicPeriod"/>
+            </a:pPr>
+            <a:r>
+              <a:rPr lang="it-IT" sz="1600" dirty="0" err="1"/>
+              <a:t>saving</a:t>
+            </a:r>
+            <a:r>
+              <a:rPr lang="it-IT" sz="1600" dirty="0"/>
+              <a:t> </a:t>
+            </a:r>
+            <a:r>
+              <a:rPr lang="it-IT" sz="1600" dirty="0" err="1"/>
+              <a:t>netlists</a:t>
+            </a:r>
+            <a:r>
+              <a:rPr lang="it-IT" sz="1600" dirty="0"/>
+              <a:t> and </a:t>
+            </a:r>
+            <a:r>
+              <a:rPr lang="it-IT" sz="1600" dirty="0" err="1"/>
+              <a:t>results</a:t>
+            </a:r>
+            <a:r>
+              <a:rPr lang="it-IT" sz="1600" dirty="0"/>
+              <a:t> on </a:t>
+            </a:r>
+            <a:r>
+              <a:rPr lang="it-IT" sz="1600" dirty="0" err="1"/>
+              <a:t>indexedDB</a:t>
+            </a:r>
+            <a:endParaRPr lang="it-IT" sz="1600" dirty="0"/>
+          </a:p>
+          <a:p>
+            <a:pPr marL="800100" lvl="1" indent="-342900">
+              <a:buFont typeface="+mj-lt"/>
+              <a:buAutoNum type="arabicPeriod"/>
+            </a:pPr>
+            <a:r>
+              <a:rPr lang="it-IT" sz="1600" dirty="0"/>
+              <a:t>One </a:t>
+            </a:r>
+            <a:r>
+              <a:rPr lang="it-IT" sz="1600" dirty="0" err="1"/>
+              <a:t>circuit</a:t>
+            </a:r>
+            <a:r>
+              <a:rPr lang="it-IT" sz="1600" dirty="0"/>
+              <a:t> can be </a:t>
+            </a:r>
+            <a:r>
+              <a:rPr lang="it-IT" sz="1600" dirty="0" err="1"/>
+              <a:t>plotted</a:t>
+            </a:r>
+            <a:r>
+              <a:rPr lang="it-IT" sz="1600" dirty="0"/>
+              <a:t> </a:t>
+            </a:r>
+            <a:r>
+              <a:rPr lang="it-IT" sz="1600" dirty="0" err="1"/>
+              <a:t>at</a:t>
+            </a:r>
+            <a:r>
+              <a:rPr lang="it-IT" sz="1600" dirty="0"/>
+              <a:t> the time and </a:t>
+            </a:r>
+            <a:r>
+              <a:rPr lang="it-IT" sz="1600" dirty="0" err="1"/>
+              <a:t>any</a:t>
+            </a:r>
+            <a:r>
+              <a:rPr lang="it-IT" sz="1600" dirty="0"/>
+              <a:t> time </a:t>
+            </a:r>
+            <a:r>
+              <a:rPr lang="it-IT" sz="1600" dirty="0" err="1"/>
+              <a:t>it</a:t>
+            </a:r>
+            <a:r>
+              <a:rPr lang="it-IT" sz="1600" dirty="0"/>
+              <a:t> </a:t>
+            </a:r>
+            <a:r>
+              <a:rPr lang="it-IT" sz="1600" dirty="0" err="1"/>
+              <a:t>is</a:t>
+            </a:r>
+            <a:r>
+              <a:rPr lang="it-IT" sz="1600" dirty="0"/>
+              <a:t> </a:t>
+            </a:r>
+            <a:r>
+              <a:rPr lang="it-IT" sz="1600" dirty="0" err="1"/>
+              <a:t>reloaded</a:t>
+            </a:r>
+            <a:r>
+              <a:rPr lang="it-IT" sz="1600" dirty="0"/>
+              <a:t> from the storage</a:t>
+            </a:r>
+          </a:p>
+          <a:p>
+            <a:pPr marL="800100" lvl="1" indent="-342900">
+              <a:buFont typeface="+mj-lt"/>
+              <a:buAutoNum type="arabicPeriod"/>
+            </a:pPr>
+            <a:r>
+              <a:rPr lang="it-IT" sz="1600" dirty="0"/>
+              <a:t>One chart or </a:t>
+            </a:r>
+            <a:r>
+              <a:rPr lang="it-IT" sz="1600" dirty="0" err="1"/>
+              <a:t>whiteboard</a:t>
+            </a:r>
+            <a:r>
+              <a:rPr lang="it-IT" sz="1600" dirty="0"/>
+              <a:t> (global charts</a:t>
+            </a:r>
+            <a:r>
               <a:rPr lang="it-IT" sz="1600" dirty="0">
                 <a:highlight>
                   <a:srgbClr val="FFFF00"/>
                 </a:highlight>
               </a:rPr>
-              <a:t>GUI </a:t>
-            </a:r>
-            <a:r>
-              <a:rPr lang="it-IT" sz="1600" dirty="0" err="1">
-                <a:highlight>
-                  <a:srgbClr val="FFFF00"/>
-                </a:highlight>
-              </a:rPr>
-              <a:t>chatGPT</a:t>
-            </a:r>
-            <a:r>
-              <a:rPr lang="it-IT" sz="1600" dirty="0">
-                <a:highlight>
-                  <a:srgbClr val="FFFF00"/>
-                </a:highlight>
-              </a:rPr>
-              <a:t> like </a:t>
-            </a:r>
-            <a:r>
-              <a:rPr lang="it-IT" sz="1600" dirty="0" err="1">
-                <a:highlight>
-                  <a:srgbClr val="FFFF00"/>
-                </a:highlight>
-              </a:rPr>
-              <a:t>where</a:t>
-            </a:r>
-            <a:endParaRPr lang="it-IT" sz="1600" dirty="0">
-              <a:highlight>
-                <a:srgbClr val="FFFF00"/>
-              </a:highlight>
-            </a:endParaRPr>
-          </a:p>
-          <a:p>
-            <a:pPr marL="800100" lvl="1" indent="-342900">
-              <a:buFont typeface="+mj-lt"/>
-              <a:buAutoNum type="arabicPeriod"/>
-            </a:pPr>
-            <a:r>
-              <a:rPr lang="it-IT" sz="1600" dirty="0">
-                <a:highlight>
-                  <a:srgbClr val="FFFF00"/>
-                </a:highlight>
-              </a:rPr>
-              <a:t>The chats are </a:t>
-            </a:r>
-            <a:r>
-              <a:rPr lang="it-IT" sz="1600" dirty="0" err="1">
-                <a:highlight>
-                  <a:srgbClr val="FFFF00"/>
-                </a:highlight>
-              </a:rPr>
-              <a:t>actually</a:t>
-            </a:r>
-            <a:r>
-              <a:rPr lang="it-IT" sz="1600" dirty="0">
-                <a:highlight>
-                  <a:srgbClr val="FFFF00"/>
-                </a:highlight>
-              </a:rPr>
-              <a:t> the boards</a:t>
-            </a:r>
-          </a:p>
-          <a:p>
-            <a:pPr marL="800100" lvl="1" indent="-342900">
-              <a:buFont typeface="+mj-lt"/>
-              <a:buAutoNum type="arabicPeriod"/>
-            </a:pPr>
-            <a:r>
-              <a:rPr lang="it-IT" sz="1600" dirty="0">
-                <a:highlight>
-                  <a:srgbClr val="FFFF00"/>
-                </a:highlight>
-              </a:rPr>
-              <a:t>The apps are </a:t>
-            </a:r>
-            <a:r>
-              <a:rPr lang="it-IT" sz="1600" dirty="0" err="1">
-                <a:highlight>
-                  <a:srgbClr val="FFFF00"/>
-                </a:highlight>
-              </a:rPr>
-              <a:t>actually</a:t>
-            </a:r>
-            <a:r>
-              <a:rPr lang="it-IT" sz="1600" dirty="0">
-                <a:highlight>
-                  <a:srgbClr val="FFFF00"/>
-                </a:highlight>
-              </a:rPr>
-              <a:t> the </a:t>
-            </a:r>
-            <a:r>
-              <a:rPr lang="it-IT" sz="1600" dirty="0" err="1">
-                <a:highlight>
-                  <a:srgbClr val="FFFF00"/>
-                </a:highlight>
-              </a:rPr>
-              <a:t>GPTs</a:t>
-            </a:r>
-            <a:endParaRPr lang="it-IT" sz="1600" dirty="0">
-              <a:highlight>
-                <a:srgbClr val="FFFF00"/>
-              </a:highlight>
-            </a:endParaRPr>
-          </a:p>
-          <a:p>
-            <a:pPr marL="342900" indent="-342900">
-              <a:buFont typeface="+mj-lt"/>
-              <a:buAutoNum type="arabicPeriod"/>
-            </a:pPr>
-            <a:r>
-              <a:rPr lang="it-IT" sz="1600" dirty="0">
-                <a:highlight>
-                  <a:srgbClr val="FFFF00"/>
-                </a:highlight>
-              </a:rPr>
-              <a:t>Charts</a:t>
-            </a:r>
-          </a:p>
-          <a:p>
-            <a:pPr marL="800100" lvl="1" indent="-342900">
-              <a:buFont typeface="+mj-lt"/>
-              <a:buAutoNum type="arabicPeriod"/>
-            </a:pPr>
-            <a:r>
-              <a:rPr lang="it-IT" sz="1600" dirty="0">
-                <a:highlight>
-                  <a:srgbClr val="FFFF00"/>
-                </a:highlight>
-              </a:rPr>
-              <a:t>Regular chart: </a:t>
-            </a:r>
-            <a:r>
-              <a:rPr lang="it-IT" sz="1600" dirty="0" err="1">
-                <a:highlight>
-                  <a:srgbClr val="FFFF00"/>
-                </a:highlight>
-              </a:rPr>
-              <a:t>already</a:t>
-            </a:r>
-            <a:r>
-              <a:rPr lang="it-IT" sz="1600" dirty="0">
-                <a:highlight>
-                  <a:srgbClr val="FFFF00"/>
-                </a:highlight>
-              </a:rPr>
-              <a:t> </a:t>
-            </a:r>
-            <a:r>
-              <a:rPr lang="it-IT" sz="1600" dirty="0" err="1">
-                <a:highlight>
-                  <a:srgbClr val="FFFF00"/>
-                </a:highlight>
-              </a:rPr>
-              <a:t>integrated</a:t>
-            </a:r>
-            <a:r>
-              <a:rPr lang="it-IT" sz="1600" dirty="0">
-                <a:highlight>
-                  <a:srgbClr val="FFFF00"/>
-                </a:highlight>
-              </a:rPr>
-              <a:t> inside</a:t>
-            </a:r>
-          </a:p>
-          <a:p>
-            <a:pPr marL="800100" lvl="1" indent="-342900">
-              <a:buFont typeface="+mj-lt"/>
-              <a:buAutoNum type="arabicPeriod"/>
-            </a:pPr>
-            <a:r>
-              <a:rPr lang="it-IT" sz="1600" dirty="0">
-                <a:highlight>
-                  <a:srgbClr val="FFFF00"/>
-                </a:highlight>
-              </a:rPr>
-              <a:t>Global chart: a new item in the </a:t>
-            </a:r>
-          </a:p>
-          <a:p>
-            <a:pPr marL="342900" indent="-342900">
-              <a:buFont typeface="+mj-lt"/>
-              <a:buAutoNum type="arabicPeriod"/>
-            </a:pPr>
-            <a:r>
-              <a:rPr lang="it-IT" sz="1600" dirty="0">
-                <a:highlight>
-                  <a:srgbClr val="FFFF00"/>
-                </a:highlight>
-              </a:rPr>
-              <a:t>Memory </a:t>
-            </a:r>
-            <a:r>
-              <a:rPr lang="it-IT" sz="1600" dirty="0" err="1">
-                <a:highlight>
-                  <a:srgbClr val="FFFF00"/>
-                </a:highlight>
-              </a:rPr>
-              <a:t>optimization</a:t>
-            </a:r>
-            <a:r>
-              <a:rPr lang="it-IT" sz="1600" dirty="0">
-                <a:highlight>
-                  <a:srgbClr val="FFFF00"/>
-                </a:highlight>
-              </a:rPr>
-              <a:t> </a:t>
-            </a:r>
-          </a:p>
-          <a:p>
-            <a:pPr marL="800100" lvl="1" indent="-342900">
-              <a:buFont typeface="+mj-lt"/>
-              <a:buAutoNum type="arabicPeriod"/>
-            </a:pPr>
-            <a:r>
-              <a:rPr lang="it-IT" sz="1600" dirty="0" err="1">
-                <a:highlight>
-                  <a:srgbClr val="FFFF00"/>
-                </a:highlight>
-              </a:rPr>
-              <a:t>saving</a:t>
-            </a:r>
-            <a:r>
-              <a:rPr lang="it-IT" sz="1600" dirty="0">
-                <a:highlight>
-                  <a:srgbClr val="FFFF00"/>
-                </a:highlight>
-              </a:rPr>
-              <a:t> </a:t>
-            </a:r>
-            <a:r>
-              <a:rPr lang="it-IT" sz="1600" dirty="0" err="1">
-                <a:highlight>
-                  <a:srgbClr val="FFFF00"/>
-                </a:highlight>
-              </a:rPr>
-              <a:t>netlists</a:t>
-            </a:r>
-            <a:r>
-              <a:rPr lang="it-IT" sz="1600" dirty="0">
-                <a:highlight>
-                  <a:srgbClr val="FFFF00"/>
-                </a:highlight>
-              </a:rPr>
-              <a:t> and </a:t>
-            </a:r>
-            <a:r>
-              <a:rPr lang="it-IT" sz="1600" dirty="0" err="1">
-                <a:highlight>
-                  <a:srgbClr val="FFFF00"/>
-                </a:highlight>
-              </a:rPr>
-              <a:t>results</a:t>
-            </a:r>
-            <a:r>
-              <a:rPr lang="it-IT" sz="1600" dirty="0">
-                <a:highlight>
-                  <a:srgbClr val="FFFF00"/>
-                </a:highlight>
-              </a:rPr>
-              <a:t> on </a:t>
-            </a:r>
-            <a:r>
-              <a:rPr lang="it-IT" sz="1600" dirty="0" err="1">
-                <a:highlight>
-                  <a:srgbClr val="FFFF00"/>
-                </a:highlight>
-              </a:rPr>
-              <a:t>indexedDB</a:t>
-            </a:r>
-            <a:endParaRPr lang="it-IT" sz="1600" dirty="0">
-              <a:highlight>
-                <a:srgbClr val="FFFF00"/>
-              </a:highlight>
-            </a:endParaRPr>
-          </a:p>
-          <a:p>
-            <a:pPr marL="800100" lvl="1" indent="-342900">
-              <a:buFont typeface="+mj-lt"/>
-              <a:buAutoNum type="arabicPeriod"/>
-            </a:pPr>
-            <a:r>
-              <a:rPr lang="it-IT" sz="1600" dirty="0">
-                <a:highlight>
-                  <a:srgbClr val="FFFF00"/>
-                </a:highlight>
-              </a:rPr>
-              <a:t>One </a:t>
-            </a:r>
-            <a:r>
-              <a:rPr lang="it-IT" sz="1600" dirty="0" err="1">
-                <a:highlight>
-                  <a:srgbClr val="FFFF00"/>
-                </a:highlight>
-              </a:rPr>
-              <a:t>circuit</a:t>
-            </a:r>
-            <a:r>
-              <a:rPr lang="it-IT" sz="1600" dirty="0">
-                <a:highlight>
-                  <a:srgbClr val="FFFF00"/>
-                </a:highlight>
-              </a:rPr>
-              <a:t> can be </a:t>
-            </a:r>
-            <a:r>
-              <a:rPr lang="it-IT" sz="1600" dirty="0" err="1">
-                <a:highlight>
-                  <a:srgbClr val="FFFF00"/>
-                </a:highlight>
-              </a:rPr>
-              <a:t>plotted</a:t>
-            </a:r>
-            <a:r>
-              <a:rPr lang="it-IT" sz="1600" dirty="0">
-                <a:highlight>
-                  <a:srgbClr val="FFFF00"/>
-                </a:highlight>
-              </a:rPr>
-              <a:t> </a:t>
-            </a:r>
-            <a:r>
-              <a:rPr lang="it-IT" sz="1600" dirty="0" err="1">
-                <a:highlight>
-                  <a:srgbClr val="FFFF00"/>
-                </a:highlight>
-              </a:rPr>
-              <a:t>at</a:t>
-            </a:r>
-            <a:r>
-              <a:rPr lang="it-IT" sz="1600" dirty="0">
-                <a:highlight>
-                  <a:srgbClr val="FFFF00"/>
-                </a:highlight>
-              </a:rPr>
-              <a:t> the time and </a:t>
-            </a:r>
-            <a:r>
-              <a:rPr lang="it-IT" sz="1600" dirty="0" err="1">
-                <a:highlight>
-                  <a:srgbClr val="FFFF00"/>
-                </a:highlight>
-              </a:rPr>
-              <a:t>any</a:t>
-            </a:r>
-            <a:r>
-              <a:rPr lang="it-IT" sz="1600" dirty="0">
-                <a:highlight>
-                  <a:srgbClr val="FFFF00"/>
-                </a:highlight>
-              </a:rPr>
-              <a:t> time </a:t>
-            </a:r>
-            <a:r>
-              <a:rPr lang="it-IT" sz="1600" dirty="0" err="1">
-                <a:highlight>
-                  <a:srgbClr val="FFFF00"/>
-                </a:highlight>
-              </a:rPr>
-              <a:t>it</a:t>
-            </a:r>
-            <a:r>
-              <a:rPr lang="it-IT" sz="1600" dirty="0">
-                <a:highlight>
-                  <a:srgbClr val="FFFF00"/>
-                </a:highlight>
-              </a:rPr>
-              <a:t> </a:t>
-            </a:r>
-            <a:r>
-              <a:rPr lang="it-IT" sz="1600" dirty="0" err="1">
-                <a:highlight>
-                  <a:srgbClr val="FFFF00"/>
-                </a:highlight>
-              </a:rPr>
-              <a:t>is</a:t>
-            </a:r>
-            <a:r>
-              <a:rPr lang="it-IT" sz="1600" dirty="0">
-                <a:highlight>
-                  <a:srgbClr val="FFFF00"/>
-                </a:highlight>
-              </a:rPr>
-              <a:t> </a:t>
-            </a:r>
-            <a:r>
-              <a:rPr lang="it-IT" sz="1600" dirty="0" err="1">
-                <a:highlight>
-                  <a:srgbClr val="FFFF00"/>
-                </a:highlight>
-              </a:rPr>
-              <a:t>reloaded</a:t>
-            </a:r>
-            <a:r>
-              <a:rPr lang="it-IT" sz="1600" dirty="0">
-                <a:highlight>
-                  <a:srgbClr val="FFFF00"/>
-                </a:highlight>
-              </a:rPr>
-              <a:t> from the storage</a:t>
-            </a:r>
-          </a:p>
-          <a:p>
-            <a:pPr marL="800100" lvl="1" indent="-342900">
-              <a:buFont typeface="+mj-lt"/>
-              <a:buAutoNum type="arabicPeriod"/>
-            </a:pPr>
-            <a:r>
-              <a:rPr lang="it-IT" sz="1600" dirty="0">
-                <a:highlight>
-                  <a:srgbClr val="FFFF00"/>
-                </a:highlight>
-              </a:rPr>
-              <a:t>One chart or group of charts (global charts)</a:t>
+              <a:t>)</a:t>
             </a:r>
           </a:p>
         </p:txBody>
@@ -8262,7 +9742,7 @@
 </p:sld>
 </file>
 
-<file path=ppt/slides/slide5.xml><?xml version="1.0" encoding="utf-8"?>
+<file path=ppt/slides/slide7.xml><?xml version="1.0" encoding="utf-8"?>
 <p:sld xmlns:a="http://schemas.openxmlformats.org/drawingml/2006/main" xmlns:r="http://schemas.openxmlformats.org/officeDocument/2006/relationships" xmlns:p="http://schemas.openxmlformats.org/presentationml/2006/main">
   <p:cSld>
     <p:spTree>
@@ -8343,7 +9823,7 @@
         <p:spPr>
           <a:xfrm>
             <a:off x="211464" y="649994"/>
-            <a:ext cx="11631669" cy="3293209"/>
+            <a:ext cx="11631669" cy="6740307"/>
           </a:xfrm>
           <a:prstGeom prst="rect">
             <a:avLst/>
@@ -8361,115 +9841,14 @@
               <a:buAutoNum type="arabicPeriod"/>
             </a:pPr>
             <a:r>
-              <a:rPr lang="it-IT" sz="1600" dirty="0">
-                <a:highlight>
-                  <a:srgbClr val="FFFF00"/>
-                </a:highlight>
-              </a:rPr>
-              <a:t>GUI </a:t>
-            </a:r>
-            <a:r>
-              <a:rPr lang="it-IT" sz="1600" dirty="0" err="1">
-                <a:highlight>
-                  <a:srgbClr val="FFFF00"/>
-                </a:highlight>
-              </a:rPr>
-              <a:t>chatGPT</a:t>
-            </a:r>
-            <a:r>
-              <a:rPr lang="it-IT" sz="1600" dirty="0">
-                <a:highlight>
-                  <a:srgbClr val="FFFF00"/>
-                </a:highlight>
-              </a:rPr>
-              <a:t> like </a:t>
-            </a:r>
-            <a:r>
-              <a:rPr lang="it-IT" sz="1600" dirty="0" err="1">
-                <a:highlight>
-                  <a:srgbClr val="FFFF00"/>
-                </a:highlight>
-              </a:rPr>
-              <a:t>where</a:t>
-            </a:r>
-            <a:endParaRPr lang="it-IT" sz="1600" dirty="0">
-              <a:highlight>
-                <a:srgbClr val="FFFF00"/>
-              </a:highlight>
-            </a:endParaRPr>
-          </a:p>
-          <a:p>
-            <a:pPr marL="800100" lvl="1" indent="-342900">
-              <a:buFont typeface="+mj-lt"/>
-              <a:buAutoNum type="arabicPeriod"/>
-            </a:pPr>
-            <a:r>
-              <a:rPr lang="it-IT" sz="1600" dirty="0">
-                <a:highlight>
-                  <a:srgbClr val="FFFF00"/>
-                </a:highlight>
-              </a:rPr>
-              <a:t>The chats are </a:t>
-            </a:r>
-            <a:r>
-              <a:rPr lang="it-IT" sz="1600" dirty="0" err="1">
-                <a:highlight>
-                  <a:srgbClr val="FFFF00"/>
-                </a:highlight>
-              </a:rPr>
-              <a:t>actually</a:t>
-            </a:r>
-            <a:r>
-              <a:rPr lang="it-IT" sz="1600" dirty="0">
-                <a:highlight>
-                  <a:srgbClr val="FFFF00"/>
-                </a:highlight>
-              </a:rPr>
-              <a:t> the boards</a:t>
-            </a:r>
-          </a:p>
-          <a:p>
-            <a:pPr marL="800100" lvl="1" indent="-342900">
-              <a:buFont typeface="+mj-lt"/>
-              <a:buAutoNum type="arabicPeriod"/>
-            </a:pPr>
-            <a:r>
-              <a:rPr lang="it-IT" sz="1600" dirty="0">
-                <a:highlight>
-                  <a:srgbClr val="FFFF00"/>
-                </a:highlight>
-              </a:rPr>
-              <a:t>The apps are </a:t>
-            </a:r>
-            <a:r>
-              <a:rPr lang="it-IT" sz="1600" dirty="0" err="1">
-                <a:highlight>
-                  <a:srgbClr val="FFFF00"/>
-                </a:highlight>
-              </a:rPr>
-              <a:t>actually</a:t>
-            </a:r>
-            <a:r>
-              <a:rPr lang="it-IT" sz="1600" dirty="0">
-                <a:highlight>
-                  <a:srgbClr val="FFFF00"/>
-                </a:highlight>
-              </a:rPr>
-              <a:t> the </a:t>
-            </a:r>
-            <a:r>
-              <a:rPr lang="it-IT" sz="1600" dirty="0" err="1">
-                <a:highlight>
-                  <a:srgbClr val="FFFF00"/>
-                </a:highlight>
-              </a:rPr>
-              <a:t>GPTs</a:t>
-            </a:r>
-            <a:endParaRPr lang="it-IT" sz="1600" dirty="0">
-              <a:highlight>
-                <a:srgbClr val="FFFF00"/>
-              </a:highlight>
-            </a:endParaRPr>
+              <a:rPr lang="it-IT" sz="1600" dirty="0"/>
+              <a:t>WASM </a:t>
+            </a:r>
+            <a:r>
+              <a:rPr lang="it-IT" sz="1600" dirty="0" err="1"/>
+              <a:t>based</a:t>
+            </a:r>
+            <a:endParaRPr lang="it-IT" sz="1600" dirty="0"/>
           </a:p>
           <a:p>
             <a:pPr marL="342900" indent="-342900">
@@ -8477,155 +9856,26 @@
               <a:buAutoNum type="arabicPeriod"/>
             </a:pPr>
             <a:r>
-              <a:rPr lang="it-IT" sz="1600" dirty="0" err="1">
-                <a:highlight>
-                  <a:srgbClr val="FFFF00"/>
-                </a:highlight>
-              </a:rPr>
-              <a:t>Simulation</a:t>
-            </a:r>
-            <a:r>
-              <a:rPr lang="it-IT" sz="1600" dirty="0">
-                <a:highlight>
-                  <a:srgbClr val="FFFF00"/>
-                </a:highlight>
-              </a:rPr>
+              <a:rPr lang="it-IT" sz="1600" dirty="0" err="1"/>
+              <a:t>GPUs</a:t>
+            </a:r>
+            <a:r>
+              <a:rPr lang="it-IT" sz="1600" dirty="0"/>
               <a:t> </a:t>
             </a:r>
             <a:r>
-              <a:rPr lang="it-IT" sz="1600" dirty="0" err="1">
-                <a:highlight>
-                  <a:srgbClr val="FFFF00"/>
-                </a:highlight>
-              </a:rPr>
-              <a:t>Locker</a:t>
-            </a:r>
-            <a:r>
-              <a:rPr lang="it-IT" sz="1600" dirty="0">
-                <a:highlight>
-                  <a:srgbClr val="FFFF00"/>
-                </a:highlight>
-              </a:rPr>
-              <a:t> to </a:t>
-            </a:r>
-            <a:r>
-              <a:rPr lang="it-IT" sz="1600" dirty="0" err="1">
-                <a:highlight>
-                  <a:srgbClr val="FFFF00"/>
-                </a:highlight>
-              </a:rPr>
-              <a:t>avoid</a:t>
-            </a:r>
-            <a:r>
-              <a:rPr lang="it-IT" sz="1600" dirty="0">
-                <a:highlight>
-                  <a:srgbClr val="FFFF00"/>
-                </a:highlight>
-              </a:rPr>
-              <a:t> running the solver </a:t>
-            </a:r>
-            <a:r>
-              <a:rPr lang="it-IT" sz="1600" dirty="0" err="1">
-                <a:highlight>
-                  <a:srgbClr val="FFFF00"/>
-                </a:highlight>
-              </a:rPr>
-              <a:t>engine</a:t>
-            </a:r>
-            <a:r>
-              <a:rPr lang="it-IT" sz="1600" dirty="0">
-                <a:highlight>
-                  <a:srgbClr val="FFFF00"/>
-                </a:highlight>
-              </a:rPr>
-              <a:t> more </a:t>
-            </a:r>
-            <a:r>
-              <a:rPr lang="it-IT" sz="1600" dirty="0" err="1">
-                <a:highlight>
-                  <a:srgbClr val="FFFF00"/>
-                </a:highlight>
-              </a:rPr>
-              <a:t>than</a:t>
-            </a:r>
-            <a:r>
-              <a:rPr lang="it-IT" sz="1600" dirty="0">
-                <a:highlight>
-                  <a:srgbClr val="FFFF00"/>
-                </a:highlight>
-              </a:rPr>
-              <a:t> one time</a:t>
-            </a:r>
-          </a:p>
-          <a:p>
-            <a:pPr marL="800100" lvl="1" indent="-342900">
-              <a:buFont typeface="+mj-lt"/>
-              <a:buAutoNum type="arabicPeriod"/>
-            </a:pPr>
-            <a:r>
-              <a:rPr lang="it-IT" sz="1600" dirty="0" err="1">
-                <a:highlight>
-                  <a:srgbClr val="FFFF00"/>
-                </a:highlight>
-              </a:rPr>
-              <a:t>Absolutely</a:t>
-            </a:r>
-            <a:r>
-              <a:rPr lang="it-IT" sz="1600" dirty="0">
-                <a:highlight>
-                  <a:srgbClr val="FFFF00"/>
-                </a:highlight>
-              </a:rPr>
-              <a:t> one </a:t>
-            </a:r>
-            <a:r>
-              <a:rPr lang="it-IT" sz="1600" dirty="0" err="1">
-                <a:highlight>
-                  <a:srgbClr val="FFFF00"/>
-                </a:highlight>
-              </a:rPr>
-              <a:t>simulation</a:t>
-            </a:r>
-            <a:r>
-              <a:rPr lang="it-IT" sz="1600" dirty="0">
-                <a:highlight>
-                  <a:srgbClr val="FFFF00"/>
-                </a:highlight>
-              </a:rPr>
-              <a:t> </a:t>
-            </a:r>
-            <a:r>
-              <a:rPr lang="it-IT" sz="1600" dirty="0" err="1">
-                <a:highlight>
-                  <a:srgbClr val="FFFF00"/>
-                </a:highlight>
-              </a:rPr>
-              <a:t>at</a:t>
-            </a:r>
-            <a:r>
-              <a:rPr lang="it-IT" sz="1600" dirty="0">
-                <a:highlight>
-                  <a:srgbClr val="FFFF00"/>
-                </a:highlight>
-              </a:rPr>
-              <a:t> the time on the </a:t>
-            </a:r>
-            <a:r>
-              <a:rPr lang="it-IT" sz="1600" dirty="0" err="1">
-                <a:highlight>
-                  <a:srgbClr val="FFFF00"/>
-                </a:highlight>
-              </a:rPr>
-              <a:t>same</a:t>
-            </a:r>
-            <a:r>
-              <a:rPr lang="it-IT" sz="1600" dirty="0">
-                <a:highlight>
-                  <a:srgbClr val="FFFF00"/>
-                </a:highlight>
-              </a:rPr>
-              <a:t> PC</a:t>
-            </a:r>
+              <a:rPr lang="it-IT" sz="1600" dirty="0" err="1"/>
+              <a:t>based</a:t>
+            </a:r>
+            <a:r>
+              <a:rPr lang="it-IT" sz="1600" dirty="0"/>
+              <a:t> for heavy </a:t>
+            </a:r>
+            <a:r>
+              <a:rPr lang="it-IT" sz="1600" dirty="0" err="1"/>
+              <a:t>algorithms</a:t>
+            </a:r>
+            <a:endParaRPr lang="it-IT" sz="1600" dirty="0"/>
           </a:p>
           <a:p>
             <a:pPr marL="342900" indent="-342900">
@@ -8633,340 +9883,277 @@
               <a:buAutoNum type="arabicPeriod"/>
             </a:pPr>
             <a:r>
-              <a:rPr lang="it-IT" sz="1600" dirty="0">
-                <a:highlight>
-                  <a:srgbClr val="FFFF00"/>
-                </a:highlight>
-              </a:rPr>
-              <a:t>No </a:t>
-            </a:r>
-            <a:r>
-              <a:rPr lang="it-IT" sz="1600" dirty="0" err="1">
-                <a:highlight>
-                  <a:srgbClr val="FFFF00"/>
-                </a:highlight>
-              </a:rPr>
-              <a:t>simulations</a:t>
-            </a:r>
-            <a:r>
-              <a:rPr lang="it-IT" sz="1600" dirty="0">
-                <a:highlight>
-                  <a:srgbClr val="FFFF00"/>
-                </a:highlight>
-              </a:rPr>
-              <a:t> on Android</a:t>
-            </a:r>
+              <a:rPr lang="it-IT" sz="1600" dirty="0"/>
+              <a:t>Goal:</a:t>
+            </a:r>
+          </a:p>
+          <a:p>
+            <a:pPr marL="800100" lvl="1" indent="-342900">
+              <a:buFont typeface="Arial" panose="020B0604020202020204" pitchFamily="34" charset="0"/>
+              <a:buChar char="•"/>
+            </a:pPr>
+            <a:r>
+              <a:rPr lang="it-IT" sz="1600" dirty="0" err="1"/>
+              <a:t>designed</a:t>
+            </a:r>
+            <a:r>
+              <a:rPr lang="it-IT" sz="1600" dirty="0"/>
+              <a:t> to </a:t>
+            </a:r>
+            <a:r>
+              <a:rPr lang="it-IT" sz="1600" dirty="0" err="1"/>
+              <a:t>minimize</a:t>
+            </a:r>
+            <a:r>
+              <a:rPr lang="it-IT" sz="1600" dirty="0"/>
+              <a:t> the WASM </a:t>
+            </a:r>
+            <a:r>
+              <a:rPr lang="it-IT" sz="1600" dirty="0" err="1"/>
+              <a:t>memory</a:t>
+            </a:r>
+            <a:endParaRPr lang="it-IT" sz="1600" dirty="0"/>
+          </a:p>
+          <a:p>
+            <a:pPr marL="800100" lvl="1" indent="-342900">
+              <a:buFont typeface="Arial" panose="020B0604020202020204" pitchFamily="34" charset="0"/>
+              <a:buChar char="•"/>
+            </a:pPr>
+            <a:r>
+              <a:rPr lang="it-IT" sz="1600" dirty="0" err="1"/>
+              <a:t>Chuncking</a:t>
+            </a:r>
+            <a:r>
+              <a:rPr lang="it-IT" sz="1600" dirty="0"/>
+              <a:t> the data in a smart way to </a:t>
+            </a:r>
+            <a:r>
+              <a:rPr lang="it-IT" sz="1600" dirty="0" err="1"/>
+              <a:t>minimize</a:t>
+            </a:r>
+            <a:r>
+              <a:rPr lang="it-IT" sz="1600" dirty="0"/>
+              <a:t> </a:t>
+            </a:r>
+            <a:r>
+              <a:rPr lang="it-IT" sz="1600" dirty="0" err="1"/>
+              <a:t>both</a:t>
+            </a:r>
+            <a:r>
+              <a:rPr lang="it-IT" sz="1600" dirty="0"/>
+              <a:t> WASM and GPU </a:t>
+            </a:r>
+            <a:r>
+              <a:rPr lang="it-IT" sz="1600" dirty="0" err="1"/>
+              <a:t>memory</a:t>
+            </a:r>
+            <a:endParaRPr lang="it-IT" sz="1600" dirty="0"/>
+          </a:p>
+          <a:p>
+            <a:pPr marL="800100" lvl="1" indent="-342900">
+              <a:buFont typeface="Arial" panose="020B0604020202020204" pitchFamily="34" charset="0"/>
+              <a:buChar char="•"/>
+            </a:pPr>
+            <a:r>
+              <a:rPr lang="it-IT" sz="1600" dirty="0" err="1"/>
+              <a:t>Chunckng</a:t>
+            </a:r>
+            <a:r>
+              <a:rPr lang="it-IT" sz="1600" dirty="0"/>
+              <a:t> </a:t>
+            </a:r>
+            <a:r>
+              <a:rPr lang="it-IT" sz="1600" dirty="0" err="1"/>
+              <a:t>based</a:t>
+            </a:r>
+            <a:r>
+              <a:rPr lang="it-IT" sz="1600" dirty="0"/>
+              <a:t> on </a:t>
+            </a:r>
+            <a:r>
+              <a:rPr lang="it-IT" sz="1600" dirty="0" err="1"/>
+              <a:t>available</a:t>
+            </a:r>
+            <a:r>
+              <a:rPr lang="it-IT" sz="1600" dirty="0"/>
+              <a:t> </a:t>
+            </a:r>
+            <a:r>
+              <a:rPr lang="it-IT" sz="1600" dirty="0" err="1"/>
+              <a:t>memory</a:t>
+            </a:r>
+            <a:r>
+              <a:rPr lang="it-IT" sz="1600" dirty="0"/>
+              <a:t> and </a:t>
+            </a:r>
+            <a:r>
+              <a:rPr lang="it-IT" sz="1600" dirty="0" err="1"/>
+              <a:t>total</a:t>
+            </a:r>
+            <a:r>
+              <a:rPr lang="it-IT" sz="1600" dirty="0"/>
+              <a:t> </a:t>
+            </a:r>
+            <a:r>
+              <a:rPr lang="it-IT" sz="1600" dirty="0" err="1"/>
+              <a:t>memory</a:t>
+            </a:r>
+            <a:r>
+              <a:rPr lang="it-IT" sz="1600" dirty="0"/>
+              <a:t> on </a:t>
+            </a:r>
+            <a:r>
+              <a:rPr lang="it-IT" sz="1600" dirty="0" err="1"/>
+              <a:t>broser</a:t>
+            </a:r>
+            <a:endParaRPr lang="it-IT" sz="1600" dirty="0"/>
           </a:p>
           <a:p>
             <a:pPr marL="342900" indent="-342900">
               <a:buFont typeface="+mj-lt"/>
               <a:buAutoNum type="arabicPeriod"/>
             </a:pPr>
-            <a:r>
-              <a:rPr lang="it-IT" sz="1600" dirty="0">
-                <a:highlight>
-                  <a:srgbClr val="FFFF00"/>
-                </a:highlight>
-              </a:rPr>
-              <a:t>Charts</a:t>
-            </a:r>
-          </a:p>
-          <a:p>
-            <a:pPr marL="800100" lvl="1" indent="-342900">
-              <a:buFont typeface="+mj-lt"/>
-              <a:buAutoNum type="arabicPeriod"/>
-            </a:pPr>
-            <a:r>
-              <a:rPr lang="it-IT" sz="1600" dirty="0">
-                <a:highlight>
-                  <a:srgbClr val="FFFF00"/>
-                </a:highlight>
-              </a:rPr>
-              <a:t>Regular chart: </a:t>
-            </a:r>
-            <a:r>
-              <a:rPr lang="it-IT" sz="1600" dirty="0" err="1">
-                <a:highlight>
-                  <a:srgbClr val="FFFF00"/>
-                </a:highlight>
-              </a:rPr>
-              <a:t>already</a:t>
-            </a:r>
-            <a:r>
-              <a:rPr lang="it-IT" sz="1600" dirty="0">
-                <a:highlight>
-                  <a:srgbClr val="FFFF00"/>
-                </a:highlight>
-              </a:rPr>
-              <a:t> </a:t>
-            </a:r>
-            <a:r>
-              <a:rPr lang="it-IT" sz="1600" dirty="0" err="1">
-                <a:highlight>
-                  <a:srgbClr val="FFFF00"/>
-                </a:highlight>
-              </a:rPr>
-              <a:t>integrated</a:t>
-            </a:r>
-            <a:r>
-              <a:rPr lang="it-IT" sz="1600" dirty="0">
-                <a:highlight>
-                  <a:srgbClr val="FFFF00"/>
-                </a:highlight>
-              </a:rPr>
-              <a:t> inside</a:t>
-            </a:r>
-          </a:p>
-          <a:p>
-            <a:pPr marL="800100" lvl="1" indent="-342900">
-              <a:buFont typeface="+mj-lt"/>
-              <a:buAutoNum type="arabicPeriod"/>
-            </a:pPr>
-            <a:r>
-              <a:rPr lang="it-IT" sz="1600" dirty="0">
-                <a:highlight>
-                  <a:srgbClr val="FFFF00"/>
-                </a:highlight>
-              </a:rPr>
-              <a:t>Global chart: a new item in the </a:t>
-            </a:r>
+            <a:endParaRPr lang="it-IT" sz="1600" dirty="0"/>
           </a:p>
           <a:p>
             <a:pPr marL="342900" indent="-342900">
               <a:buFont typeface="+mj-lt"/>
               <a:buAutoNum type="arabicPeriod"/>
             </a:pPr>
-            <a:r>
-              <a:rPr lang="it-IT" sz="1600" dirty="0">
-                <a:highlight>
-                  <a:srgbClr val="FFFF00"/>
-                </a:highlight>
-              </a:rPr>
-              <a:t>Memory </a:t>
-            </a:r>
-            <a:r>
-              <a:rPr lang="it-IT" sz="1600" dirty="0" err="1">
-                <a:highlight>
-                  <a:srgbClr val="FFFF00"/>
-                </a:highlight>
-              </a:rPr>
-              <a:t>optimization</a:t>
-            </a:r>
-            <a:r>
-              <a:rPr lang="it-IT" sz="1600" dirty="0">
-                <a:highlight>
-                  <a:srgbClr val="FFFF00"/>
-                </a:highlight>
-              </a:rPr>
-              <a:t> </a:t>
-            </a:r>
-          </a:p>
-          <a:p>
-            <a:pPr marL="800100" lvl="1" indent="-342900">
+            <a:endParaRPr lang="it-IT" sz="1600" dirty="0"/>
+          </a:p>
+          <a:p>
+            <a:pPr marL="342900" indent="-342900">
               <a:buFont typeface="+mj-lt"/>
               <a:buAutoNum type="arabicPeriod"/>
             </a:pPr>
-            <a:r>
-              <a:rPr lang="it-IT" sz="1600" dirty="0" err="1">
-                <a:highlight>
-                  <a:srgbClr val="FFFF00"/>
-                </a:highlight>
-              </a:rPr>
-              <a:t>saving</a:t>
-            </a:r>
-            <a:r>
-              <a:rPr lang="it-IT" sz="1600" dirty="0">
-                <a:highlight>
-                  <a:srgbClr val="FFFF00"/>
-                </a:highlight>
-              </a:rPr>
-              <a:t> </a:t>
-            </a:r>
-            <a:r>
-              <a:rPr lang="it-IT" sz="1600" dirty="0" err="1">
-                <a:highlight>
-                  <a:srgbClr val="FFFF00"/>
-                </a:highlight>
-              </a:rPr>
-              <a:t>netlists</a:t>
-            </a:r>
-            <a:r>
-              <a:rPr lang="it-IT" sz="1600" dirty="0">
-                <a:highlight>
-                  <a:srgbClr val="FFFF00"/>
-                </a:highlight>
-              </a:rPr>
-              <a:t> and </a:t>
-            </a:r>
-            <a:r>
-              <a:rPr lang="it-IT" sz="1600" dirty="0" err="1">
-                <a:highlight>
-                  <a:srgbClr val="FFFF00"/>
-                </a:highlight>
-              </a:rPr>
-              <a:t>results</a:t>
-            </a:r>
-            <a:r>
-              <a:rPr lang="it-IT" sz="1600" dirty="0">
-                <a:highlight>
-                  <a:srgbClr val="FFFF00"/>
-                </a:highlight>
-              </a:rPr>
-              <a:t> on </a:t>
-            </a:r>
-            <a:r>
-              <a:rPr lang="it-IT" sz="1600" dirty="0" err="1">
-                <a:highlight>
-                  <a:srgbClr val="FFFF00"/>
-                </a:highlight>
-              </a:rPr>
-              <a:t>indexedDB</a:t>
-            </a:r>
-            <a:endParaRPr lang="it-IT" sz="1600" dirty="0">
-              <a:highlight>
-                <a:srgbClr val="FFFF00"/>
-              </a:highlight>
-            </a:endParaRPr>
-          </a:p>
-          <a:p>
-            <a:pPr marL="800100" lvl="1" indent="-342900">
+            <a:endParaRPr lang="it-IT" sz="1600" dirty="0"/>
+          </a:p>
+          <a:p>
+            <a:pPr marL="342900" indent="-342900">
               <a:buFont typeface="+mj-lt"/>
               <a:buAutoNum type="arabicPeriod"/>
             </a:pPr>
-            <a:r>
-              <a:rPr lang="it-IT" sz="1600" dirty="0">
-                <a:highlight>
-                  <a:srgbClr val="FFFF00"/>
-                </a:highlight>
-              </a:rPr>
-              <a:t>One </a:t>
-            </a:r>
-            <a:r>
-              <a:rPr lang="it-IT" sz="1600" dirty="0" err="1">
-                <a:highlight>
-                  <a:srgbClr val="FFFF00"/>
-                </a:highlight>
-              </a:rPr>
-              <a:t>circuit</a:t>
-            </a:r>
-            <a:r>
-              <a:rPr lang="it-IT" sz="1600" dirty="0">
-                <a:highlight>
-                  <a:srgbClr val="FFFF00"/>
-                </a:highlight>
-              </a:rPr>
-              <a:t> can be </a:t>
-            </a:r>
-            <a:r>
-              <a:rPr lang="it-IT" sz="1600" dirty="0" err="1">
-                <a:highlight>
-                  <a:srgbClr val="FFFF00"/>
-                </a:highlight>
-              </a:rPr>
-              <a:t>plotted</a:t>
-            </a:r>
-            <a:r>
-              <a:rPr lang="it-IT" sz="1600" dirty="0">
-                <a:highlight>
-                  <a:srgbClr val="FFFF00"/>
-                </a:highlight>
-              </a:rPr>
-              <a:t> </a:t>
-            </a:r>
-            <a:r>
-              <a:rPr lang="it-IT" sz="1600" dirty="0" err="1">
-                <a:highlight>
-                  <a:srgbClr val="FFFF00"/>
-                </a:highlight>
-              </a:rPr>
-              <a:t>at</a:t>
-            </a:r>
-            <a:r>
-              <a:rPr lang="it-IT" sz="1600" dirty="0">
-                <a:highlight>
-                  <a:srgbClr val="FFFF00"/>
-                </a:highlight>
-              </a:rPr>
-              <a:t> the time and </a:t>
-            </a:r>
-            <a:r>
-              <a:rPr lang="it-IT" sz="1600" dirty="0" err="1">
-                <a:highlight>
-                  <a:srgbClr val="FFFF00"/>
-                </a:highlight>
-              </a:rPr>
-              <a:t>any</a:t>
-            </a:r>
-            <a:r>
-              <a:rPr lang="it-IT" sz="1600" dirty="0">
-                <a:highlight>
-                  <a:srgbClr val="FFFF00"/>
-                </a:highlight>
-              </a:rPr>
-              <a:t> time </a:t>
-            </a:r>
-            <a:r>
-              <a:rPr lang="it-IT" sz="1600" dirty="0" err="1">
-                <a:highlight>
-                  <a:srgbClr val="FFFF00"/>
-                </a:highlight>
-              </a:rPr>
-              <a:t>it</a:t>
-            </a:r>
-            <a:r>
-              <a:rPr lang="it-IT" sz="1600" dirty="0">
-                <a:highlight>
-                  <a:srgbClr val="FFFF00"/>
-                </a:highlight>
-              </a:rPr>
-              <a:t> </a:t>
-            </a:r>
-            <a:r>
-              <a:rPr lang="it-IT" sz="1600" dirty="0" err="1">
-                <a:highlight>
-                  <a:srgbClr val="FFFF00"/>
-                </a:highlight>
-              </a:rPr>
-              <a:t>is</a:t>
-            </a:r>
-            <a:r>
-              <a:rPr lang="it-IT" sz="1600" dirty="0">
-                <a:highlight>
-                  <a:srgbClr val="FFFF00"/>
-                </a:highlight>
-              </a:rPr>
-              <a:t> </a:t>
-            </a:r>
-            <a:r>
-              <a:rPr lang="it-IT" sz="1600" dirty="0" err="1">
-                <a:highlight>
-                  <a:srgbClr val="FFFF00"/>
-                </a:highlight>
-              </a:rPr>
-              <a:t>reloaded</a:t>
-            </a:r>
-            <a:r>
-              <a:rPr lang="it-IT" sz="1600" dirty="0">
-                <a:highlight>
-                  <a:srgbClr val="FFFF00"/>
-                </a:highlight>
-              </a:rPr>
-              <a:t> from the storage</a:t>
-            </a:r>
-          </a:p>
-          <a:p>
-            <a:pPr marL="800100" lvl="1" indent="-342900">
+            <a:endParaRPr lang="it-IT" sz="1600" dirty="0"/>
+          </a:p>
+          <a:p>
+            <a:pPr marL="342900" indent="-342900">
               <a:buFont typeface="+mj-lt"/>
               <a:buAutoNum type="arabicPeriod"/>
             </a:pPr>
-            <a:r>
-              <a:rPr lang="it-IT" sz="1600" dirty="0">
-                <a:highlight>
-                  <a:srgbClr val="FFFF00"/>
-                </a:highlight>
-              </a:rPr>
-              <a:t>One chart or group of charts (global charts)</a:t>
-            </a:r>
+            <a:endParaRPr lang="it-IT" sz="1600" dirty="0"/>
+          </a:p>
+          <a:p>
+            <a:pPr marL="342900" indent="-342900">
+              <a:buFont typeface="+mj-lt"/>
+              <a:buAutoNum type="arabicPeriod"/>
+            </a:pPr>
+            <a:endParaRPr lang="it-IT" sz="1600" dirty="0"/>
+          </a:p>
+          <a:p>
+            <a:pPr marL="342900" indent="-342900">
+              <a:buFont typeface="+mj-lt"/>
+              <a:buAutoNum type="arabicPeriod"/>
+            </a:pPr>
+            <a:endParaRPr lang="it-IT" sz="1600" dirty="0"/>
+          </a:p>
+          <a:p>
+            <a:pPr marL="342900" indent="-342900">
+              <a:buFont typeface="+mj-lt"/>
+              <a:buAutoNum type="arabicPeriod"/>
+            </a:pPr>
+            <a:endParaRPr lang="it-IT" sz="1600" dirty="0"/>
+          </a:p>
+          <a:p>
+            <a:pPr marL="342900" indent="-342900">
+              <a:buFont typeface="+mj-lt"/>
+              <a:buAutoNum type="arabicPeriod"/>
+            </a:pPr>
+            <a:endParaRPr lang="it-IT" sz="1600" dirty="0"/>
+          </a:p>
+          <a:p>
+            <a:pPr marL="342900" indent="-342900">
+              <a:buFont typeface="+mj-lt"/>
+              <a:buAutoNum type="arabicPeriod"/>
+            </a:pPr>
+            <a:endParaRPr lang="it-IT" sz="1600" dirty="0"/>
+          </a:p>
+          <a:p>
+            <a:pPr marL="342900" indent="-342900">
+              <a:buFont typeface="+mj-lt"/>
+              <a:buAutoNum type="arabicPeriod"/>
+            </a:pPr>
+            <a:endParaRPr lang="it-IT" sz="1600" dirty="0"/>
+          </a:p>
+          <a:p>
+            <a:pPr marL="342900" indent="-342900">
+              <a:buFont typeface="+mj-lt"/>
+              <a:buAutoNum type="arabicPeriod"/>
+            </a:pPr>
+            <a:endParaRPr lang="it-IT" sz="1600" dirty="0"/>
+          </a:p>
+          <a:p>
+            <a:pPr marL="342900" indent="-342900">
+              <a:buFont typeface="+mj-lt"/>
+              <a:buAutoNum type="arabicPeriod"/>
+            </a:pPr>
+            <a:endParaRPr lang="it-IT" sz="1600" dirty="0"/>
+          </a:p>
+          <a:p>
+            <a:pPr marL="342900" indent="-342900">
+              <a:buFont typeface="+mj-lt"/>
+              <a:buAutoNum type="arabicPeriod"/>
+            </a:pPr>
+            <a:endParaRPr lang="it-IT" sz="1600" dirty="0"/>
+          </a:p>
+          <a:p>
+            <a:pPr marL="342900" indent="-342900">
+              <a:buFont typeface="+mj-lt"/>
+              <a:buAutoNum type="arabicPeriod"/>
+            </a:pPr>
+            <a:endParaRPr lang="it-IT" sz="1600" dirty="0"/>
+          </a:p>
+          <a:p>
+            <a:pPr marL="342900" indent="-342900">
+              <a:buFont typeface="+mj-lt"/>
+              <a:buAutoNum type="arabicPeriod"/>
+            </a:pPr>
+            <a:endParaRPr lang="it-IT" sz="1600" dirty="0"/>
+          </a:p>
+          <a:p>
+            <a:pPr marL="342900" indent="-342900">
+              <a:buFont typeface="+mj-lt"/>
+              <a:buAutoNum type="arabicPeriod"/>
+            </a:pPr>
+            <a:endParaRPr lang="it-IT" sz="1600" dirty="0"/>
+          </a:p>
+          <a:p>
+            <a:pPr marL="342900" indent="-342900">
+              <a:buFont typeface="+mj-lt"/>
+              <a:buAutoNum type="arabicPeriod"/>
+            </a:pPr>
+            <a:endParaRPr lang="it-IT" sz="1600" dirty="0"/>
+          </a:p>
+          <a:p>
+            <a:pPr marL="342900" indent="-342900">
+              <a:buFont typeface="+mj-lt"/>
+              <a:buAutoNum type="arabicPeriod"/>
+            </a:pPr>
+            <a:endParaRPr lang="it-IT" sz="1600" dirty="0"/>
+          </a:p>
+          <a:p>
+            <a:pPr marL="342900" indent="-342900">
+              <a:buFont typeface="+mj-lt"/>
+              <a:buAutoNum type="arabicPeriod"/>
+            </a:pPr>
+            <a:endParaRPr lang="it-IT" sz="1600" dirty="0"/>
+          </a:p>
+          <a:p>
+            <a:pPr marL="342900" indent="-342900">
+              <a:buFont typeface="+mj-lt"/>
+              <a:buAutoNum type="arabicPeriod"/>
+            </a:pPr>
+            <a:endParaRPr lang="it-IT" sz="1600" dirty="0"/>
           </a:p>
         </p:txBody>
       </p:sp>
@@ -8983,2170 +10170,7 @@
 </p:sld>
 </file>
 
-<file path=ppt/slides/slide6.xml><?xml version="1.0" encoding="utf-8"?>
-<p:sld xmlns:a="http://schemas.openxmlformats.org/drawingml/2006/main" xmlns:r="http://schemas.openxmlformats.org/officeDocument/2006/relationships" xmlns:p="http://schemas.openxmlformats.org/presentationml/2006/main">
-  <p:cSld>
-    <p:spTree>
-      <p:nvGrpSpPr>
-        <p:cNvPr id="1" name="">
-          <a:extLst>
-            <a:ext uri="{FF2B5EF4-FFF2-40B4-BE49-F238E27FC236}">
-              <a16:creationId xmlns:a16="http://schemas.microsoft.com/office/drawing/2014/main" id="{84E4208E-E11F-FC9D-362D-B50B7FAE1F92}"/>
-            </a:ext>
-          </a:extLst>
-        </p:cNvPr>
-        <p:cNvGrpSpPr/>
-        <p:nvPr/>
-      </p:nvGrpSpPr>
-      <p:grpSpPr>
-        <a:xfrm>
-          <a:off x="0" y="0"/>
-          <a:ext cx="0" cy="0"/>
-          <a:chOff x="0" y="0"/>
-          <a:chExt cx="0" cy="0"/>
-        </a:xfrm>
-      </p:grpSpPr>
-      <p:sp>
-        <p:nvSpPr>
-          <p:cNvPr id="35" name="CasellaDiTesto 34">
-            <a:extLst>
-              <a:ext uri="{FF2B5EF4-FFF2-40B4-BE49-F238E27FC236}">
-                <a16:creationId xmlns:a16="http://schemas.microsoft.com/office/drawing/2014/main" id="{FB60FF94-DFC1-8A3C-1A3D-6FE7E629B5C8}"/>
-              </a:ext>
-            </a:extLst>
-          </p:cNvPr>
-          <p:cNvSpPr txBox="1"/>
-          <p:nvPr/>
-        </p:nvSpPr>
-        <p:spPr>
-          <a:xfrm>
-            <a:off x="211464" y="92800"/>
-            <a:ext cx="4022320" cy="523220"/>
-          </a:xfrm>
-          <a:prstGeom prst="rect">
-            <a:avLst/>
-          </a:prstGeom>
-          <a:noFill/>
-        </p:spPr>
-        <p:txBody>
-          <a:bodyPr wrap="none" rtlCol="0">
-            <a:spAutoFit/>
-          </a:bodyPr>
-          <a:lstStyle/>
-          <a:p>
-            <a:r>
-              <a:rPr lang="it-IT" sz="2800" dirty="0"/>
-              <a:t>Back-end </a:t>
-            </a:r>
-            <a:r>
-              <a:rPr lang="it-IT" sz="2800" dirty="0" err="1"/>
-              <a:t>Requirements</a:t>
-            </a:r>
-            <a:r>
-              <a:rPr lang="it-IT" sz="2800" dirty="0"/>
-              <a:t>:</a:t>
-            </a:r>
-          </a:p>
-        </p:txBody>
-      </p:sp>
-      <p:sp>
-        <p:nvSpPr>
-          <p:cNvPr id="4" name="CasellaDiTesto 3">
-            <a:extLst>
-              <a:ext uri="{FF2B5EF4-FFF2-40B4-BE49-F238E27FC236}">
-                <a16:creationId xmlns:a16="http://schemas.microsoft.com/office/drawing/2014/main" id="{A843A20D-7822-4D58-5A06-3CB18DC60D9B}"/>
-              </a:ext>
-            </a:extLst>
-          </p:cNvPr>
-          <p:cNvSpPr txBox="1"/>
-          <p:nvPr/>
-        </p:nvSpPr>
-        <p:spPr>
-          <a:xfrm>
-            <a:off x="211464" y="649994"/>
-            <a:ext cx="11631669" cy="3293209"/>
-          </a:xfrm>
-          <a:prstGeom prst="rect">
-            <a:avLst/>
-          </a:prstGeom>
-          <a:noFill/>
-        </p:spPr>
-        <p:txBody>
-          <a:bodyPr wrap="square" rtlCol="0">
-            <a:spAutoFit/>
-          </a:bodyPr>
-          <a:lstStyle/>
-          <a:p>
-            <a:pPr marL="342900" indent="-342900">
-              <a:buFont typeface="+mj-lt"/>
-              <a:buAutoNum type="arabicPeriod"/>
-            </a:pPr>
-            <a:r>
-              <a:rPr lang="it-IT" sz="1600" dirty="0">
-                <a:highlight>
-                  <a:srgbClr val="FFFF00"/>
-                </a:highlight>
-              </a:rPr>
-              <a:t>GUI </a:t>
-            </a:r>
-            <a:r>
-              <a:rPr lang="it-IT" sz="1600" dirty="0" err="1">
-                <a:highlight>
-                  <a:srgbClr val="FFFF00"/>
-                </a:highlight>
-              </a:rPr>
-              <a:t>chatGPT</a:t>
-            </a:r>
-            <a:r>
-              <a:rPr lang="it-IT" sz="1600" dirty="0">
-                <a:highlight>
-                  <a:srgbClr val="FFFF00"/>
-                </a:highlight>
-              </a:rPr>
-              <a:t> like </a:t>
-            </a:r>
-            <a:r>
-              <a:rPr lang="it-IT" sz="1600" dirty="0" err="1">
-                <a:highlight>
-                  <a:srgbClr val="FFFF00"/>
-                </a:highlight>
-              </a:rPr>
-              <a:t>where</a:t>
-            </a:r>
-            <a:endParaRPr lang="it-IT" sz="1600" dirty="0">
-              <a:highlight>
-                <a:srgbClr val="FFFF00"/>
-              </a:highlight>
-            </a:endParaRPr>
-          </a:p>
-          <a:p>
-            <a:pPr marL="800100" lvl="1" indent="-342900">
-              <a:buFont typeface="+mj-lt"/>
-              <a:buAutoNum type="arabicPeriod"/>
-            </a:pPr>
-            <a:r>
-              <a:rPr lang="it-IT" sz="1600" dirty="0">
-                <a:highlight>
-                  <a:srgbClr val="FFFF00"/>
-                </a:highlight>
-              </a:rPr>
-              <a:t>The chats are </a:t>
-            </a:r>
-            <a:r>
-              <a:rPr lang="it-IT" sz="1600" dirty="0" err="1">
-                <a:highlight>
-                  <a:srgbClr val="FFFF00"/>
-                </a:highlight>
-              </a:rPr>
-              <a:t>actually</a:t>
-            </a:r>
-            <a:r>
-              <a:rPr lang="it-IT" sz="1600" dirty="0">
-                <a:highlight>
-                  <a:srgbClr val="FFFF00"/>
-                </a:highlight>
-              </a:rPr>
-              <a:t> the boards</a:t>
-            </a:r>
-          </a:p>
-          <a:p>
-            <a:pPr marL="800100" lvl="1" indent="-342900">
-              <a:buFont typeface="+mj-lt"/>
-              <a:buAutoNum type="arabicPeriod"/>
-            </a:pPr>
-            <a:r>
-              <a:rPr lang="it-IT" sz="1600" dirty="0">
-                <a:highlight>
-                  <a:srgbClr val="FFFF00"/>
-                </a:highlight>
-              </a:rPr>
-              <a:t>The apps are </a:t>
-            </a:r>
-            <a:r>
-              <a:rPr lang="it-IT" sz="1600" dirty="0" err="1">
-                <a:highlight>
-                  <a:srgbClr val="FFFF00"/>
-                </a:highlight>
-              </a:rPr>
-              <a:t>actually</a:t>
-            </a:r>
-            <a:r>
-              <a:rPr lang="it-IT" sz="1600" dirty="0">
-                <a:highlight>
-                  <a:srgbClr val="FFFF00"/>
-                </a:highlight>
-              </a:rPr>
-              <a:t> the </a:t>
-            </a:r>
-            <a:r>
-              <a:rPr lang="it-IT" sz="1600" dirty="0" err="1">
-                <a:highlight>
-                  <a:srgbClr val="FFFF00"/>
-                </a:highlight>
-              </a:rPr>
-              <a:t>GPTs</a:t>
-            </a:r>
-            <a:endParaRPr lang="it-IT" sz="1600" dirty="0">
-              <a:highlight>
-                <a:srgbClr val="FFFF00"/>
-              </a:highlight>
-            </a:endParaRPr>
-          </a:p>
-          <a:p>
-            <a:pPr marL="342900" indent="-342900">
-              <a:buFont typeface="+mj-lt"/>
-              <a:buAutoNum type="arabicPeriod"/>
-            </a:pPr>
-            <a:r>
-              <a:rPr lang="it-IT" sz="1600" dirty="0" err="1">
-                <a:highlight>
-                  <a:srgbClr val="FFFF00"/>
-                </a:highlight>
-              </a:rPr>
-              <a:t>Simulation</a:t>
-            </a:r>
-            <a:r>
-              <a:rPr lang="it-IT" sz="1600" dirty="0">
-                <a:highlight>
-                  <a:srgbClr val="FFFF00"/>
-                </a:highlight>
-              </a:rPr>
-              <a:t> </a:t>
-            </a:r>
-            <a:r>
-              <a:rPr lang="it-IT" sz="1600" dirty="0" err="1">
-                <a:highlight>
-                  <a:srgbClr val="FFFF00"/>
-                </a:highlight>
-              </a:rPr>
-              <a:t>Locker</a:t>
-            </a:r>
-            <a:r>
-              <a:rPr lang="it-IT" sz="1600" dirty="0">
-                <a:highlight>
-                  <a:srgbClr val="FFFF00"/>
-                </a:highlight>
-              </a:rPr>
-              <a:t> to </a:t>
-            </a:r>
-            <a:r>
-              <a:rPr lang="it-IT" sz="1600" dirty="0" err="1">
-                <a:highlight>
-                  <a:srgbClr val="FFFF00"/>
-                </a:highlight>
-              </a:rPr>
-              <a:t>avoid</a:t>
-            </a:r>
-            <a:r>
-              <a:rPr lang="it-IT" sz="1600" dirty="0">
-                <a:highlight>
-                  <a:srgbClr val="FFFF00"/>
-                </a:highlight>
-              </a:rPr>
-              <a:t> running the solver </a:t>
-            </a:r>
-            <a:r>
-              <a:rPr lang="it-IT" sz="1600" dirty="0" err="1">
-                <a:highlight>
-                  <a:srgbClr val="FFFF00"/>
-                </a:highlight>
-              </a:rPr>
-              <a:t>engine</a:t>
-            </a:r>
-            <a:r>
-              <a:rPr lang="it-IT" sz="1600" dirty="0">
-                <a:highlight>
-                  <a:srgbClr val="FFFF00"/>
-                </a:highlight>
-              </a:rPr>
-              <a:t> more </a:t>
-            </a:r>
-            <a:r>
-              <a:rPr lang="it-IT" sz="1600" dirty="0" err="1">
-                <a:highlight>
-                  <a:srgbClr val="FFFF00"/>
-                </a:highlight>
-              </a:rPr>
-              <a:t>than</a:t>
-            </a:r>
-            <a:r>
-              <a:rPr lang="it-IT" sz="1600" dirty="0">
-                <a:highlight>
-                  <a:srgbClr val="FFFF00"/>
-                </a:highlight>
-              </a:rPr>
-              <a:t> one time</a:t>
-            </a:r>
-          </a:p>
-          <a:p>
-            <a:pPr marL="800100" lvl="1" indent="-342900">
-              <a:buFont typeface="+mj-lt"/>
-              <a:buAutoNum type="arabicPeriod"/>
-            </a:pPr>
-            <a:r>
-              <a:rPr lang="it-IT" sz="1600" dirty="0" err="1">
-                <a:highlight>
-                  <a:srgbClr val="FFFF00"/>
-                </a:highlight>
-              </a:rPr>
-              <a:t>Absolutely</a:t>
-            </a:r>
-            <a:r>
-              <a:rPr lang="it-IT" sz="1600" dirty="0">
-                <a:highlight>
-                  <a:srgbClr val="FFFF00"/>
-                </a:highlight>
-              </a:rPr>
-              <a:t> one </a:t>
-            </a:r>
-            <a:r>
-              <a:rPr lang="it-IT" sz="1600" dirty="0" err="1">
-                <a:highlight>
-                  <a:srgbClr val="FFFF00"/>
-                </a:highlight>
-              </a:rPr>
-              <a:t>simulation</a:t>
-            </a:r>
-            <a:r>
-              <a:rPr lang="it-IT" sz="1600" dirty="0">
-                <a:highlight>
-                  <a:srgbClr val="FFFF00"/>
-                </a:highlight>
-              </a:rPr>
-              <a:t> </a:t>
-            </a:r>
-            <a:r>
-              <a:rPr lang="it-IT" sz="1600" dirty="0" err="1">
-                <a:highlight>
-                  <a:srgbClr val="FFFF00"/>
-                </a:highlight>
-              </a:rPr>
-              <a:t>at</a:t>
-            </a:r>
-            <a:r>
-              <a:rPr lang="it-IT" sz="1600" dirty="0">
-                <a:highlight>
-                  <a:srgbClr val="FFFF00"/>
-                </a:highlight>
-              </a:rPr>
-              <a:t> the time on the </a:t>
-            </a:r>
-            <a:r>
-              <a:rPr lang="it-IT" sz="1600" dirty="0" err="1">
-                <a:highlight>
-                  <a:srgbClr val="FFFF00"/>
-                </a:highlight>
-              </a:rPr>
-              <a:t>same</a:t>
-            </a:r>
-            <a:r>
-              <a:rPr lang="it-IT" sz="1600" dirty="0">
-                <a:highlight>
-                  <a:srgbClr val="FFFF00"/>
-                </a:highlight>
-              </a:rPr>
-              <a:t> PC</a:t>
-            </a:r>
-          </a:p>
-          <a:p>
-            <a:pPr marL="342900" indent="-342900">
-              <a:buFont typeface="+mj-lt"/>
-              <a:buAutoNum type="arabicPeriod"/>
-            </a:pPr>
-            <a:r>
-              <a:rPr lang="it-IT" sz="1600" dirty="0">
-                <a:highlight>
-                  <a:srgbClr val="FFFF00"/>
-                </a:highlight>
-              </a:rPr>
-              <a:t>No </a:t>
-            </a:r>
-            <a:r>
-              <a:rPr lang="it-IT" sz="1600" dirty="0" err="1">
-                <a:highlight>
-                  <a:srgbClr val="FFFF00"/>
-                </a:highlight>
-              </a:rPr>
-              <a:t>simulations</a:t>
-            </a:r>
-            <a:r>
-              <a:rPr lang="it-IT" sz="1600" dirty="0">
-                <a:highlight>
-                  <a:srgbClr val="FFFF00"/>
-                </a:highlight>
-              </a:rPr>
-              <a:t> on Android</a:t>
-            </a:r>
-          </a:p>
-          <a:p>
-            <a:pPr marL="342900" indent="-342900">
-              <a:buFont typeface="+mj-lt"/>
-              <a:buAutoNum type="arabicPeriod"/>
-            </a:pPr>
-            <a:r>
-              <a:rPr lang="it-IT" sz="1600" dirty="0">
-                <a:highlight>
-                  <a:srgbClr val="FFFF00"/>
-                </a:highlight>
-              </a:rPr>
-              <a:t>Charts</a:t>
-            </a:r>
-          </a:p>
-          <a:p>
-            <a:pPr marL="800100" lvl="1" indent="-342900">
-              <a:buFont typeface="+mj-lt"/>
-              <a:buAutoNum type="arabicPeriod"/>
-            </a:pPr>
-            <a:r>
-              <a:rPr lang="it-IT" sz="1600" dirty="0">
-                <a:highlight>
-                  <a:srgbClr val="FFFF00"/>
-                </a:highlight>
-              </a:rPr>
-              <a:t>Regular chart: </a:t>
-            </a:r>
-            <a:r>
-              <a:rPr lang="it-IT" sz="1600" dirty="0" err="1">
-                <a:highlight>
-                  <a:srgbClr val="FFFF00"/>
-                </a:highlight>
-              </a:rPr>
-              <a:t>already</a:t>
-            </a:r>
-            <a:r>
-              <a:rPr lang="it-IT" sz="1600" dirty="0">
-                <a:highlight>
-                  <a:srgbClr val="FFFF00"/>
-                </a:highlight>
-              </a:rPr>
-              <a:t> </a:t>
-            </a:r>
-            <a:r>
-              <a:rPr lang="it-IT" sz="1600" dirty="0" err="1">
-                <a:highlight>
-                  <a:srgbClr val="FFFF00"/>
-                </a:highlight>
-              </a:rPr>
-              <a:t>integrated</a:t>
-            </a:r>
-            <a:r>
-              <a:rPr lang="it-IT" sz="1600" dirty="0">
-                <a:highlight>
-                  <a:srgbClr val="FFFF00"/>
-                </a:highlight>
-              </a:rPr>
-              <a:t> inside</a:t>
-            </a:r>
-          </a:p>
-          <a:p>
-            <a:pPr marL="800100" lvl="1" indent="-342900">
-              <a:buFont typeface="+mj-lt"/>
-              <a:buAutoNum type="arabicPeriod"/>
-            </a:pPr>
-            <a:r>
-              <a:rPr lang="it-IT" sz="1600" dirty="0">
-                <a:highlight>
-                  <a:srgbClr val="FFFF00"/>
-                </a:highlight>
-              </a:rPr>
-              <a:t>Global chart: a new item in the </a:t>
-            </a:r>
-          </a:p>
-          <a:p>
-            <a:pPr marL="342900" indent="-342900">
-              <a:buFont typeface="+mj-lt"/>
-              <a:buAutoNum type="arabicPeriod"/>
-            </a:pPr>
-            <a:r>
-              <a:rPr lang="it-IT" sz="1600" dirty="0">
-                <a:highlight>
-                  <a:srgbClr val="FFFF00"/>
-                </a:highlight>
-              </a:rPr>
-              <a:t>Memory </a:t>
-            </a:r>
-            <a:r>
-              <a:rPr lang="it-IT" sz="1600" dirty="0" err="1">
-                <a:highlight>
-                  <a:srgbClr val="FFFF00"/>
-                </a:highlight>
-              </a:rPr>
-              <a:t>optimization</a:t>
-            </a:r>
-            <a:r>
-              <a:rPr lang="it-IT" sz="1600" dirty="0">
-                <a:highlight>
-                  <a:srgbClr val="FFFF00"/>
-                </a:highlight>
-              </a:rPr>
-              <a:t> </a:t>
-            </a:r>
-          </a:p>
-          <a:p>
-            <a:pPr marL="800100" lvl="1" indent="-342900">
-              <a:buFont typeface="+mj-lt"/>
-              <a:buAutoNum type="arabicPeriod"/>
-            </a:pPr>
-            <a:r>
-              <a:rPr lang="it-IT" sz="1600" dirty="0" err="1">
-                <a:highlight>
-                  <a:srgbClr val="FFFF00"/>
-                </a:highlight>
-              </a:rPr>
-              <a:t>saving</a:t>
-            </a:r>
-            <a:r>
-              <a:rPr lang="it-IT" sz="1600" dirty="0">
-                <a:highlight>
-                  <a:srgbClr val="FFFF00"/>
-                </a:highlight>
-              </a:rPr>
-              <a:t> </a:t>
-            </a:r>
-            <a:r>
-              <a:rPr lang="it-IT" sz="1600" dirty="0" err="1">
-                <a:highlight>
-                  <a:srgbClr val="FFFF00"/>
-                </a:highlight>
-              </a:rPr>
-              <a:t>netlists</a:t>
-            </a:r>
-            <a:r>
-              <a:rPr lang="it-IT" sz="1600" dirty="0">
-                <a:highlight>
-                  <a:srgbClr val="FFFF00"/>
-                </a:highlight>
-              </a:rPr>
-              <a:t> and </a:t>
-            </a:r>
-            <a:r>
-              <a:rPr lang="it-IT" sz="1600" dirty="0" err="1">
-                <a:highlight>
-                  <a:srgbClr val="FFFF00"/>
-                </a:highlight>
-              </a:rPr>
-              <a:t>results</a:t>
-            </a:r>
-            <a:r>
-              <a:rPr lang="it-IT" sz="1600" dirty="0">
-                <a:highlight>
-                  <a:srgbClr val="FFFF00"/>
-                </a:highlight>
-              </a:rPr>
-              <a:t> on </a:t>
-            </a:r>
-            <a:r>
-              <a:rPr lang="it-IT" sz="1600" dirty="0" err="1">
-                <a:highlight>
-                  <a:srgbClr val="FFFF00"/>
-                </a:highlight>
-              </a:rPr>
-              <a:t>indexedDB</a:t>
-            </a:r>
-            <a:endParaRPr lang="it-IT" sz="1600" dirty="0">
-              <a:highlight>
-                <a:srgbClr val="FFFF00"/>
-              </a:highlight>
-            </a:endParaRPr>
-          </a:p>
-          <a:p>
-            <a:pPr marL="800100" lvl="1" indent="-342900">
-              <a:buFont typeface="+mj-lt"/>
-              <a:buAutoNum type="arabicPeriod"/>
-            </a:pPr>
-            <a:r>
-              <a:rPr lang="it-IT" sz="1600" dirty="0">
-                <a:highlight>
-                  <a:srgbClr val="FFFF00"/>
-                </a:highlight>
-              </a:rPr>
-              <a:t>One </a:t>
-            </a:r>
-            <a:r>
-              <a:rPr lang="it-IT" sz="1600" dirty="0" err="1">
-                <a:highlight>
-                  <a:srgbClr val="FFFF00"/>
-                </a:highlight>
-              </a:rPr>
-              <a:t>circuit</a:t>
-            </a:r>
-            <a:r>
-              <a:rPr lang="it-IT" sz="1600" dirty="0">
-                <a:highlight>
-                  <a:srgbClr val="FFFF00"/>
-                </a:highlight>
-              </a:rPr>
-              <a:t> can be </a:t>
-            </a:r>
-            <a:r>
-              <a:rPr lang="it-IT" sz="1600" dirty="0" err="1">
-                <a:highlight>
-                  <a:srgbClr val="FFFF00"/>
-                </a:highlight>
-              </a:rPr>
-              <a:t>plotted</a:t>
-            </a:r>
-            <a:r>
-              <a:rPr lang="it-IT" sz="1600" dirty="0">
-                <a:highlight>
-                  <a:srgbClr val="FFFF00"/>
-                </a:highlight>
-              </a:rPr>
-              <a:t> </a:t>
-            </a:r>
-            <a:r>
-              <a:rPr lang="it-IT" sz="1600" dirty="0" err="1">
-                <a:highlight>
-                  <a:srgbClr val="FFFF00"/>
-                </a:highlight>
-              </a:rPr>
-              <a:t>at</a:t>
-            </a:r>
-            <a:r>
-              <a:rPr lang="it-IT" sz="1600" dirty="0">
-                <a:highlight>
-                  <a:srgbClr val="FFFF00"/>
-                </a:highlight>
-              </a:rPr>
-              <a:t> the time and </a:t>
-            </a:r>
-            <a:r>
-              <a:rPr lang="it-IT" sz="1600" dirty="0" err="1">
-                <a:highlight>
-                  <a:srgbClr val="FFFF00"/>
-                </a:highlight>
-              </a:rPr>
-              <a:t>any</a:t>
-            </a:r>
-            <a:r>
-              <a:rPr lang="it-IT" sz="1600" dirty="0">
-                <a:highlight>
-                  <a:srgbClr val="FFFF00"/>
-                </a:highlight>
-              </a:rPr>
-              <a:t> time </a:t>
-            </a:r>
-            <a:r>
-              <a:rPr lang="it-IT" sz="1600" dirty="0" err="1">
-                <a:highlight>
-                  <a:srgbClr val="FFFF00"/>
-                </a:highlight>
-              </a:rPr>
-              <a:t>it</a:t>
-            </a:r>
-            <a:r>
-              <a:rPr lang="it-IT" sz="1600" dirty="0">
-                <a:highlight>
-                  <a:srgbClr val="FFFF00"/>
-                </a:highlight>
-              </a:rPr>
-              <a:t> </a:t>
-            </a:r>
-            <a:r>
-              <a:rPr lang="it-IT" sz="1600" dirty="0" err="1">
-                <a:highlight>
-                  <a:srgbClr val="FFFF00"/>
-                </a:highlight>
-              </a:rPr>
-              <a:t>is</a:t>
-            </a:r>
-            <a:r>
-              <a:rPr lang="it-IT" sz="1600" dirty="0">
-                <a:highlight>
-                  <a:srgbClr val="FFFF00"/>
-                </a:highlight>
-              </a:rPr>
-              <a:t> </a:t>
-            </a:r>
-            <a:r>
-              <a:rPr lang="it-IT" sz="1600" dirty="0" err="1">
-                <a:highlight>
-                  <a:srgbClr val="FFFF00"/>
-                </a:highlight>
-              </a:rPr>
-              <a:t>reloaded</a:t>
-            </a:r>
-            <a:r>
-              <a:rPr lang="it-IT" sz="1600" dirty="0">
-                <a:highlight>
-                  <a:srgbClr val="FFFF00"/>
-                </a:highlight>
-              </a:rPr>
-              <a:t> from the storage</a:t>
-            </a:r>
-          </a:p>
-          <a:p>
-            <a:pPr marL="800100" lvl="1" indent="-342900">
-              <a:buFont typeface="+mj-lt"/>
-              <a:buAutoNum type="arabicPeriod"/>
-            </a:pPr>
-            <a:r>
-              <a:rPr lang="it-IT" sz="1600" dirty="0">
-                <a:highlight>
-                  <a:srgbClr val="FFFF00"/>
-                </a:highlight>
-              </a:rPr>
-              <a:t>One chart or group of charts (global charts)</a:t>
-            </a:r>
-          </a:p>
-        </p:txBody>
-      </p:sp>
-    </p:spTree>
-    <p:extLst>
-      <p:ext uri="{BB962C8B-B14F-4D97-AF65-F5344CB8AC3E}">
-        <p14:creationId xmlns:p14="http://schemas.microsoft.com/office/powerpoint/2010/main" val="3009243582"/>
-      </p:ext>
-    </p:extLst>
-  </p:cSld>
-  <p:clrMapOvr>
-    <a:masterClrMapping/>
-  </p:clrMapOvr>
-</p:sld>
-</file>
-
-<file path=ppt/slides/slide7.xml><?xml version="1.0" encoding="utf-8"?>
-<p:sld xmlns:a="http://schemas.openxmlformats.org/drawingml/2006/main" xmlns:r="http://schemas.openxmlformats.org/officeDocument/2006/relationships" xmlns:p="http://schemas.openxmlformats.org/presentationml/2006/main">
-  <p:cSld>
-    <p:spTree>
-      <p:nvGrpSpPr>
-        <p:cNvPr id="1" name="">
-          <a:extLst>
-            <a:ext uri="{FF2B5EF4-FFF2-40B4-BE49-F238E27FC236}">
-              <a16:creationId xmlns:a16="http://schemas.microsoft.com/office/drawing/2014/main" id="{20841C5E-0457-0F68-0982-8982924A2F97}"/>
-            </a:ext>
-          </a:extLst>
-        </p:cNvPr>
-        <p:cNvGrpSpPr/>
-        <p:nvPr/>
-      </p:nvGrpSpPr>
-      <p:grpSpPr>
-        <a:xfrm>
-          <a:off x="0" y="0"/>
-          <a:ext cx="0" cy="0"/>
-          <a:chOff x="0" y="0"/>
-          <a:chExt cx="0" cy="0"/>
-        </a:xfrm>
-      </p:grpSpPr>
-      <p:sp>
-        <p:nvSpPr>
-          <p:cNvPr id="35" name="CasellaDiTesto 34">
-            <a:extLst>
-              <a:ext uri="{FF2B5EF4-FFF2-40B4-BE49-F238E27FC236}">
-                <a16:creationId xmlns:a16="http://schemas.microsoft.com/office/drawing/2014/main" id="{857862DA-0955-18AF-AADF-B65B8E95F554}"/>
-              </a:ext>
-            </a:extLst>
-          </p:cNvPr>
-          <p:cNvSpPr txBox="1"/>
-          <p:nvPr/>
-        </p:nvSpPr>
-        <p:spPr>
-          <a:xfrm>
-            <a:off x="211464" y="92800"/>
-            <a:ext cx="8170506" cy="523220"/>
-          </a:xfrm>
-          <a:prstGeom prst="rect">
-            <a:avLst/>
-          </a:prstGeom>
-          <a:noFill/>
-        </p:spPr>
-        <p:txBody>
-          <a:bodyPr wrap="none" rtlCol="0">
-            <a:spAutoFit/>
-          </a:bodyPr>
-          <a:lstStyle/>
-          <a:p>
-            <a:r>
-              <a:rPr lang="it-IT" sz="2800" dirty="0"/>
-              <a:t>Front-end to Solver Communications </a:t>
-            </a:r>
-            <a:r>
-              <a:rPr lang="it-IT" sz="2800" dirty="0" err="1"/>
-              <a:t>Requirements</a:t>
-            </a:r>
-            <a:r>
-              <a:rPr lang="it-IT" sz="2800" dirty="0"/>
-              <a:t>:</a:t>
-            </a:r>
-          </a:p>
-        </p:txBody>
-      </p:sp>
-      <p:sp>
-        <p:nvSpPr>
-          <p:cNvPr id="4" name="CasellaDiTesto 3">
-            <a:extLst>
-              <a:ext uri="{FF2B5EF4-FFF2-40B4-BE49-F238E27FC236}">
-                <a16:creationId xmlns:a16="http://schemas.microsoft.com/office/drawing/2014/main" id="{A881F491-6F99-BEF2-94B5-8076900A30FC}"/>
-              </a:ext>
-            </a:extLst>
-          </p:cNvPr>
-          <p:cNvSpPr txBox="1"/>
-          <p:nvPr/>
-        </p:nvSpPr>
-        <p:spPr>
-          <a:xfrm>
-            <a:off x="211464" y="649994"/>
-            <a:ext cx="11631669" cy="3293209"/>
-          </a:xfrm>
-          <a:prstGeom prst="rect">
-            <a:avLst/>
-          </a:prstGeom>
-          <a:noFill/>
-        </p:spPr>
-        <p:txBody>
-          <a:bodyPr wrap="square" rtlCol="0">
-            <a:spAutoFit/>
-          </a:bodyPr>
-          <a:lstStyle/>
-          <a:p>
-            <a:pPr marL="342900" indent="-342900">
-              <a:buFont typeface="+mj-lt"/>
-              <a:buAutoNum type="arabicPeriod"/>
-            </a:pPr>
-            <a:r>
-              <a:rPr lang="it-IT" sz="1600" dirty="0">
-                <a:highlight>
-                  <a:srgbClr val="FFFF00"/>
-                </a:highlight>
-              </a:rPr>
-              <a:t>GUI </a:t>
-            </a:r>
-            <a:r>
-              <a:rPr lang="it-IT" sz="1600" dirty="0" err="1">
-                <a:highlight>
-                  <a:srgbClr val="FFFF00"/>
-                </a:highlight>
-              </a:rPr>
-              <a:t>chatGPT</a:t>
-            </a:r>
-            <a:r>
-              <a:rPr lang="it-IT" sz="1600" dirty="0">
-                <a:highlight>
-                  <a:srgbClr val="FFFF00"/>
-                </a:highlight>
-              </a:rPr>
-              <a:t> like </a:t>
-            </a:r>
-            <a:r>
-              <a:rPr lang="it-IT" sz="1600" dirty="0" err="1">
-                <a:highlight>
-                  <a:srgbClr val="FFFF00"/>
-                </a:highlight>
-              </a:rPr>
-              <a:t>where</a:t>
-            </a:r>
-            <a:endParaRPr lang="it-IT" sz="1600" dirty="0">
-              <a:highlight>
-                <a:srgbClr val="FFFF00"/>
-              </a:highlight>
-            </a:endParaRPr>
-          </a:p>
-          <a:p>
-            <a:pPr marL="800100" lvl="1" indent="-342900">
-              <a:buFont typeface="+mj-lt"/>
-              <a:buAutoNum type="arabicPeriod"/>
-            </a:pPr>
-            <a:r>
-              <a:rPr lang="it-IT" sz="1600" dirty="0">
-                <a:highlight>
-                  <a:srgbClr val="FFFF00"/>
-                </a:highlight>
-              </a:rPr>
-              <a:t>The chats are </a:t>
-            </a:r>
-            <a:r>
-              <a:rPr lang="it-IT" sz="1600" dirty="0" err="1">
-                <a:highlight>
-                  <a:srgbClr val="FFFF00"/>
-                </a:highlight>
-              </a:rPr>
-              <a:t>actually</a:t>
-            </a:r>
-            <a:r>
-              <a:rPr lang="it-IT" sz="1600" dirty="0">
-                <a:highlight>
-                  <a:srgbClr val="FFFF00"/>
-                </a:highlight>
-              </a:rPr>
-              <a:t> the boards</a:t>
-            </a:r>
-          </a:p>
-          <a:p>
-            <a:pPr marL="800100" lvl="1" indent="-342900">
-              <a:buFont typeface="+mj-lt"/>
-              <a:buAutoNum type="arabicPeriod"/>
-            </a:pPr>
-            <a:r>
-              <a:rPr lang="it-IT" sz="1600" dirty="0">
-                <a:highlight>
-                  <a:srgbClr val="FFFF00"/>
-                </a:highlight>
-              </a:rPr>
-              <a:t>The apps are </a:t>
-            </a:r>
-            <a:r>
-              <a:rPr lang="it-IT" sz="1600" dirty="0" err="1">
-                <a:highlight>
-                  <a:srgbClr val="FFFF00"/>
-                </a:highlight>
-              </a:rPr>
-              <a:t>actually</a:t>
-            </a:r>
-            <a:r>
-              <a:rPr lang="it-IT" sz="1600" dirty="0">
-                <a:highlight>
-                  <a:srgbClr val="FFFF00"/>
-                </a:highlight>
-              </a:rPr>
-              <a:t> the </a:t>
-            </a:r>
-            <a:r>
-              <a:rPr lang="it-IT" sz="1600" dirty="0" err="1">
-                <a:highlight>
-                  <a:srgbClr val="FFFF00"/>
-                </a:highlight>
-              </a:rPr>
-              <a:t>GPTs</a:t>
-            </a:r>
-            <a:endParaRPr lang="it-IT" sz="1600" dirty="0">
-              <a:highlight>
-                <a:srgbClr val="FFFF00"/>
-              </a:highlight>
-            </a:endParaRPr>
-          </a:p>
-          <a:p>
-            <a:pPr marL="342900" indent="-342900">
-              <a:buFont typeface="+mj-lt"/>
-              <a:buAutoNum type="arabicPeriod"/>
-            </a:pPr>
-            <a:r>
-              <a:rPr lang="it-IT" sz="1600" dirty="0" err="1">
-                <a:highlight>
-                  <a:srgbClr val="FFFF00"/>
-                </a:highlight>
-              </a:rPr>
-              <a:t>Simulation</a:t>
-            </a:r>
-            <a:r>
-              <a:rPr lang="it-IT" sz="1600" dirty="0">
-                <a:highlight>
-                  <a:srgbClr val="FFFF00"/>
-                </a:highlight>
-              </a:rPr>
-              <a:t> </a:t>
-            </a:r>
-            <a:r>
-              <a:rPr lang="it-IT" sz="1600" dirty="0" err="1">
-                <a:highlight>
-                  <a:srgbClr val="FFFF00"/>
-                </a:highlight>
-              </a:rPr>
-              <a:t>Locker</a:t>
-            </a:r>
-            <a:r>
-              <a:rPr lang="it-IT" sz="1600" dirty="0">
-                <a:highlight>
-                  <a:srgbClr val="FFFF00"/>
-                </a:highlight>
-              </a:rPr>
-              <a:t> to </a:t>
-            </a:r>
-            <a:r>
-              <a:rPr lang="it-IT" sz="1600" dirty="0" err="1">
-                <a:highlight>
-                  <a:srgbClr val="FFFF00"/>
-                </a:highlight>
-              </a:rPr>
-              <a:t>avoid</a:t>
-            </a:r>
-            <a:r>
-              <a:rPr lang="it-IT" sz="1600" dirty="0">
-                <a:highlight>
-                  <a:srgbClr val="FFFF00"/>
-                </a:highlight>
-              </a:rPr>
-              <a:t> running the solver </a:t>
-            </a:r>
-            <a:r>
-              <a:rPr lang="it-IT" sz="1600" dirty="0" err="1">
-                <a:highlight>
-                  <a:srgbClr val="FFFF00"/>
-                </a:highlight>
-              </a:rPr>
-              <a:t>engine</a:t>
-            </a:r>
-            <a:r>
-              <a:rPr lang="it-IT" sz="1600" dirty="0">
-                <a:highlight>
-                  <a:srgbClr val="FFFF00"/>
-                </a:highlight>
-              </a:rPr>
-              <a:t> more </a:t>
-            </a:r>
-            <a:r>
-              <a:rPr lang="it-IT" sz="1600" dirty="0" err="1">
-                <a:highlight>
-                  <a:srgbClr val="FFFF00"/>
-                </a:highlight>
-              </a:rPr>
-              <a:t>than</a:t>
-            </a:r>
-            <a:r>
-              <a:rPr lang="it-IT" sz="1600" dirty="0">
-                <a:highlight>
-                  <a:srgbClr val="FFFF00"/>
-                </a:highlight>
-              </a:rPr>
-              <a:t> one time</a:t>
-            </a:r>
-          </a:p>
-          <a:p>
-            <a:pPr marL="800100" lvl="1" indent="-342900">
-              <a:buFont typeface="+mj-lt"/>
-              <a:buAutoNum type="arabicPeriod"/>
-            </a:pPr>
-            <a:r>
-              <a:rPr lang="it-IT" sz="1600" dirty="0" err="1">
-                <a:highlight>
-                  <a:srgbClr val="FFFF00"/>
-                </a:highlight>
-              </a:rPr>
-              <a:t>Absolutely</a:t>
-            </a:r>
-            <a:r>
-              <a:rPr lang="it-IT" sz="1600" dirty="0">
-                <a:highlight>
-                  <a:srgbClr val="FFFF00"/>
-                </a:highlight>
-              </a:rPr>
-              <a:t> one </a:t>
-            </a:r>
-            <a:r>
-              <a:rPr lang="it-IT" sz="1600" dirty="0" err="1">
-                <a:highlight>
-                  <a:srgbClr val="FFFF00"/>
-                </a:highlight>
-              </a:rPr>
-              <a:t>simulation</a:t>
-            </a:r>
-            <a:r>
-              <a:rPr lang="it-IT" sz="1600" dirty="0">
-                <a:highlight>
-                  <a:srgbClr val="FFFF00"/>
-                </a:highlight>
-              </a:rPr>
-              <a:t> </a:t>
-            </a:r>
-            <a:r>
-              <a:rPr lang="it-IT" sz="1600" dirty="0" err="1">
-                <a:highlight>
-                  <a:srgbClr val="FFFF00"/>
-                </a:highlight>
-              </a:rPr>
-              <a:t>at</a:t>
-            </a:r>
-            <a:r>
-              <a:rPr lang="it-IT" sz="1600" dirty="0">
-                <a:highlight>
-                  <a:srgbClr val="FFFF00"/>
-                </a:highlight>
-              </a:rPr>
-              <a:t> the time on the </a:t>
-            </a:r>
-            <a:r>
-              <a:rPr lang="it-IT" sz="1600" dirty="0" err="1">
-                <a:highlight>
-                  <a:srgbClr val="FFFF00"/>
-                </a:highlight>
-              </a:rPr>
-              <a:t>same</a:t>
-            </a:r>
-            <a:r>
-              <a:rPr lang="it-IT" sz="1600" dirty="0">
-                <a:highlight>
-                  <a:srgbClr val="FFFF00"/>
-                </a:highlight>
-              </a:rPr>
-              <a:t> PC</a:t>
-            </a:r>
-          </a:p>
-          <a:p>
-            <a:pPr marL="342900" indent="-342900">
-              <a:buFont typeface="+mj-lt"/>
-              <a:buAutoNum type="arabicPeriod"/>
-            </a:pPr>
-            <a:r>
-              <a:rPr lang="it-IT" sz="1600" dirty="0">
-                <a:highlight>
-                  <a:srgbClr val="FFFF00"/>
-                </a:highlight>
-              </a:rPr>
-              <a:t>No </a:t>
-            </a:r>
-            <a:r>
-              <a:rPr lang="it-IT" sz="1600" dirty="0" err="1">
-                <a:highlight>
-                  <a:srgbClr val="FFFF00"/>
-                </a:highlight>
-              </a:rPr>
-              <a:t>simulations</a:t>
-            </a:r>
-            <a:r>
-              <a:rPr lang="it-IT" sz="1600" dirty="0">
-                <a:highlight>
-                  <a:srgbClr val="FFFF00"/>
-                </a:highlight>
-              </a:rPr>
-              <a:t> on Android</a:t>
-            </a:r>
-          </a:p>
-          <a:p>
-            <a:pPr marL="342900" indent="-342900">
-              <a:buFont typeface="+mj-lt"/>
-              <a:buAutoNum type="arabicPeriod"/>
-            </a:pPr>
-            <a:r>
-              <a:rPr lang="it-IT" sz="1600" dirty="0">
-                <a:highlight>
-                  <a:srgbClr val="FFFF00"/>
-                </a:highlight>
-              </a:rPr>
-              <a:t>Charts</a:t>
-            </a:r>
-          </a:p>
-          <a:p>
-            <a:pPr marL="800100" lvl="1" indent="-342900">
-              <a:buFont typeface="+mj-lt"/>
-              <a:buAutoNum type="arabicPeriod"/>
-            </a:pPr>
-            <a:r>
-              <a:rPr lang="it-IT" sz="1600" dirty="0">
-                <a:highlight>
-                  <a:srgbClr val="FFFF00"/>
-                </a:highlight>
-              </a:rPr>
-              <a:t>Regular chart: </a:t>
-            </a:r>
-            <a:r>
-              <a:rPr lang="it-IT" sz="1600" dirty="0" err="1">
-                <a:highlight>
-                  <a:srgbClr val="FFFF00"/>
-                </a:highlight>
-              </a:rPr>
-              <a:t>already</a:t>
-            </a:r>
-            <a:r>
-              <a:rPr lang="it-IT" sz="1600" dirty="0">
-                <a:highlight>
-                  <a:srgbClr val="FFFF00"/>
-                </a:highlight>
-              </a:rPr>
-              <a:t> </a:t>
-            </a:r>
-            <a:r>
-              <a:rPr lang="it-IT" sz="1600" dirty="0" err="1">
-                <a:highlight>
-                  <a:srgbClr val="FFFF00"/>
-                </a:highlight>
-              </a:rPr>
-              <a:t>integrated</a:t>
-            </a:r>
-            <a:r>
-              <a:rPr lang="it-IT" sz="1600" dirty="0">
-                <a:highlight>
-                  <a:srgbClr val="FFFF00"/>
-                </a:highlight>
-              </a:rPr>
-              <a:t> inside</a:t>
-            </a:r>
-          </a:p>
-          <a:p>
-            <a:pPr marL="800100" lvl="1" indent="-342900">
-              <a:buFont typeface="+mj-lt"/>
-              <a:buAutoNum type="arabicPeriod"/>
-            </a:pPr>
-            <a:r>
-              <a:rPr lang="it-IT" sz="1600" dirty="0">
-                <a:highlight>
-                  <a:srgbClr val="FFFF00"/>
-                </a:highlight>
-              </a:rPr>
-              <a:t>Global chart: a new item in the </a:t>
-            </a:r>
-          </a:p>
-          <a:p>
-            <a:pPr marL="342900" indent="-342900">
-              <a:buFont typeface="+mj-lt"/>
-              <a:buAutoNum type="arabicPeriod"/>
-            </a:pPr>
-            <a:r>
-              <a:rPr lang="it-IT" sz="1600" dirty="0">
-                <a:highlight>
-                  <a:srgbClr val="FFFF00"/>
-                </a:highlight>
-              </a:rPr>
-              <a:t>Memory </a:t>
-            </a:r>
-            <a:r>
-              <a:rPr lang="it-IT" sz="1600" dirty="0" err="1">
-                <a:highlight>
-                  <a:srgbClr val="FFFF00"/>
-                </a:highlight>
-              </a:rPr>
-              <a:t>optimization</a:t>
-            </a:r>
-            <a:r>
-              <a:rPr lang="it-IT" sz="1600" dirty="0">
-                <a:highlight>
-                  <a:srgbClr val="FFFF00"/>
-                </a:highlight>
-              </a:rPr>
-              <a:t> </a:t>
-            </a:r>
-          </a:p>
-          <a:p>
-            <a:pPr marL="800100" lvl="1" indent="-342900">
-              <a:buFont typeface="+mj-lt"/>
-              <a:buAutoNum type="arabicPeriod"/>
-            </a:pPr>
-            <a:r>
-              <a:rPr lang="it-IT" sz="1600" dirty="0" err="1">
-                <a:highlight>
-                  <a:srgbClr val="FFFF00"/>
-                </a:highlight>
-              </a:rPr>
-              <a:t>saving</a:t>
-            </a:r>
-            <a:r>
-              <a:rPr lang="it-IT" sz="1600" dirty="0">
-                <a:highlight>
-                  <a:srgbClr val="FFFF00"/>
-                </a:highlight>
-              </a:rPr>
-              <a:t> </a:t>
-            </a:r>
-            <a:r>
-              <a:rPr lang="it-IT" sz="1600" dirty="0" err="1">
-                <a:highlight>
-                  <a:srgbClr val="FFFF00"/>
-                </a:highlight>
-              </a:rPr>
-              <a:t>netlists</a:t>
-            </a:r>
-            <a:r>
-              <a:rPr lang="it-IT" sz="1600" dirty="0">
-                <a:highlight>
-                  <a:srgbClr val="FFFF00"/>
-                </a:highlight>
-              </a:rPr>
-              <a:t> and </a:t>
-            </a:r>
-            <a:r>
-              <a:rPr lang="it-IT" sz="1600" dirty="0" err="1">
-                <a:highlight>
-                  <a:srgbClr val="FFFF00"/>
-                </a:highlight>
-              </a:rPr>
-              <a:t>results</a:t>
-            </a:r>
-            <a:r>
-              <a:rPr lang="it-IT" sz="1600" dirty="0">
-                <a:highlight>
-                  <a:srgbClr val="FFFF00"/>
-                </a:highlight>
-              </a:rPr>
-              <a:t> on </a:t>
-            </a:r>
-            <a:r>
-              <a:rPr lang="it-IT" sz="1600" dirty="0" err="1">
-                <a:highlight>
-                  <a:srgbClr val="FFFF00"/>
-                </a:highlight>
-              </a:rPr>
-              <a:t>indexedDB</a:t>
-            </a:r>
-            <a:endParaRPr lang="it-IT" sz="1600" dirty="0">
-              <a:highlight>
-                <a:srgbClr val="FFFF00"/>
-              </a:highlight>
-            </a:endParaRPr>
-          </a:p>
-          <a:p>
-            <a:pPr marL="800100" lvl="1" indent="-342900">
-              <a:buFont typeface="+mj-lt"/>
-              <a:buAutoNum type="arabicPeriod"/>
-            </a:pPr>
-            <a:r>
-              <a:rPr lang="it-IT" sz="1600" dirty="0">
-                <a:highlight>
-                  <a:srgbClr val="FFFF00"/>
-                </a:highlight>
-              </a:rPr>
-              <a:t>One </a:t>
-            </a:r>
-            <a:r>
-              <a:rPr lang="it-IT" sz="1600" dirty="0" err="1">
-                <a:highlight>
-                  <a:srgbClr val="FFFF00"/>
-                </a:highlight>
-              </a:rPr>
-              <a:t>circuit</a:t>
-            </a:r>
-            <a:r>
-              <a:rPr lang="it-IT" sz="1600" dirty="0">
-                <a:highlight>
-                  <a:srgbClr val="FFFF00"/>
-                </a:highlight>
-              </a:rPr>
-              <a:t> can be </a:t>
-            </a:r>
-            <a:r>
-              <a:rPr lang="it-IT" sz="1600" dirty="0" err="1">
-                <a:highlight>
-                  <a:srgbClr val="FFFF00"/>
-                </a:highlight>
-              </a:rPr>
-              <a:t>plotted</a:t>
-            </a:r>
-            <a:r>
-              <a:rPr lang="it-IT" sz="1600" dirty="0">
-                <a:highlight>
-                  <a:srgbClr val="FFFF00"/>
-                </a:highlight>
-              </a:rPr>
-              <a:t> </a:t>
-            </a:r>
-            <a:r>
-              <a:rPr lang="it-IT" sz="1600" dirty="0" err="1">
-                <a:highlight>
-                  <a:srgbClr val="FFFF00"/>
-                </a:highlight>
-              </a:rPr>
-              <a:t>at</a:t>
-            </a:r>
-            <a:r>
-              <a:rPr lang="it-IT" sz="1600" dirty="0">
-                <a:highlight>
-                  <a:srgbClr val="FFFF00"/>
-                </a:highlight>
-              </a:rPr>
-              <a:t> the time and </a:t>
-            </a:r>
-            <a:r>
-              <a:rPr lang="it-IT" sz="1600" dirty="0" err="1">
-                <a:highlight>
-                  <a:srgbClr val="FFFF00"/>
-                </a:highlight>
-              </a:rPr>
-              <a:t>any</a:t>
-            </a:r>
-            <a:r>
-              <a:rPr lang="it-IT" sz="1600" dirty="0">
-                <a:highlight>
-                  <a:srgbClr val="FFFF00"/>
-                </a:highlight>
-              </a:rPr>
-              <a:t> time </a:t>
-            </a:r>
-            <a:r>
-              <a:rPr lang="it-IT" sz="1600" dirty="0" err="1">
-                <a:highlight>
-                  <a:srgbClr val="FFFF00"/>
-                </a:highlight>
-              </a:rPr>
-              <a:t>it</a:t>
-            </a:r>
-            <a:r>
-              <a:rPr lang="it-IT" sz="1600" dirty="0">
-                <a:highlight>
-                  <a:srgbClr val="FFFF00"/>
-                </a:highlight>
-              </a:rPr>
-              <a:t> </a:t>
-            </a:r>
-            <a:r>
-              <a:rPr lang="it-IT" sz="1600" dirty="0" err="1">
-                <a:highlight>
-                  <a:srgbClr val="FFFF00"/>
-                </a:highlight>
-              </a:rPr>
-              <a:t>is</a:t>
-            </a:r>
-            <a:r>
-              <a:rPr lang="it-IT" sz="1600" dirty="0">
-                <a:highlight>
-                  <a:srgbClr val="FFFF00"/>
-                </a:highlight>
-              </a:rPr>
-              <a:t> </a:t>
-            </a:r>
-            <a:r>
-              <a:rPr lang="it-IT" sz="1600" dirty="0" err="1">
-                <a:highlight>
-                  <a:srgbClr val="FFFF00"/>
-                </a:highlight>
-              </a:rPr>
-              <a:t>reloaded</a:t>
-            </a:r>
-            <a:r>
-              <a:rPr lang="it-IT" sz="1600" dirty="0">
-                <a:highlight>
-                  <a:srgbClr val="FFFF00"/>
-                </a:highlight>
-              </a:rPr>
-              <a:t> from the storage</a:t>
-            </a:r>
-          </a:p>
-          <a:p>
-            <a:pPr marL="800100" lvl="1" indent="-342900">
-              <a:buFont typeface="+mj-lt"/>
-              <a:buAutoNum type="arabicPeriod"/>
-            </a:pPr>
-            <a:r>
-              <a:rPr lang="it-IT" sz="1600" dirty="0">
-                <a:highlight>
-                  <a:srgbClr val="FFFF00"/>
-                </a:highlight>
-              </a:rPr>
-              <a:t>One chart or group of charts (global charts)</a:t>
-            </a:r>
-          </a:p>
-        </p:txBody>
-      </p:sp>
-    </p:spTree>
-    <p:extLst>
-      <p:ext uri="{BB962C8B-B14F-4D97-AF65-F5344CB8AC3E}">
-        <p14:creationId xmlns:p14="http://schemas.microsoft.com/office/powerpoint/2010/main" val="3599782154"/>
-      </p:ext>
-    </p:extLst>
-  </p:cSld>
-  <p:clrMapOvr>
-    <a:masterClrMapping/>
-  </p:clrMapOvr>
-</p:sld>
-</file>
-
 <file path=ppt/slides/slide8.xml><?xml version="1.0" encoding="utf-8"?>
-<p:sld xmlns:a="http://schemas.openxmlformats.org/drawingml/2006/main" xmlns:r="http://schemas.openxmlformats.org/officeDocument/2006/relationships" xmlns:p="http://schemas.openxmlformats.org/presentationml/2006/main">
-  <p:cSld>
-    <p:spTree>
-      <p:nvGrpSpPr>
-        <p:cNvPr id="1" name="">
-          <a:extLst>
-            <a:ext uri="{FF2B5EF4-FFF2-40B4-BE49-F238E27FC236}">
-              <a16:creationId xmlns:a16="http://schemas.microsoft.com/office/drawing/2014/main" id="{2E211BB8-9370-B787-2285-1FE841F5D5FF}"/>
-            </a:ext>
-          </a:extLst>
-        </p:cNvPr>
-        <p:cNvGrpSpPr/>
-        <p:nvPr/>
-      </p:nvGrpSpPr>
-      <p:grpSpPr>
-        <a:xfrm>
-          <a:off x="0" y="0"/>
-          <a:ext cx="0" cy="0"/>
-          <a:chOff x="0" y="0"/>
-          <a:chExt cx="0" cy="0"/>
-        </a:xfrm>
-      </p:grpSpPr>
-      <p:sp>
-        <p:nvSpPr>
-          <p:cNvPr id="35" name="CasellaDiTesto 34">
-            <a:extLst>
-              <a:ext uri="{FF2B5EF4-FFF2-40B4-BE49-F238E27FC236}">
-                <a16:creationId xmlns:a16="http://schemas.microsoft.com/office/drawing/2014/main" id="{636CC7B6-9CF1-475E-8B13-BDAFDCAC3077}"/>
-              </a:ext>
-            </a:extLst>
-          </p:cNvPr>
-          <p:cNvSpPr txBox="1"/>
-          <p:nvPr/>
-        </p:nvSpPr>
-        <p:spPr>
-          <a:xfrm>
-            <a:off x="211464" y="92800"/>
-            <a:ext cx="8244245" cy="523220"/>
-          </a:xfrm>
-          <a:prstGeom prst="rect">
-            <a:avLst/>
-          </a:prstGeom>
-          <a:noFill/>
-        </p:spPr>
-        <p:txBody>
-          <a:bodyPr wrap="none" rtlCol="0">
-            <a:spAutoFit/>
-          </a:bodyPr>
-          <a:lstStyle/>
-          <a:p>
-            <a:r>
-              <a:rPr lang="it-IT" sz="2800" dirty="0"/>
-              <a:t>Solver to Front-end Communications </a:t>
-            </a:r>
-            <a:r>
-              <a:rPr lang="it-IT" sz="2800" dirty="0" err="1"/>
-              <a:t>Requirements</a:t>
-            </a:r>
-            <a:r>
-              <a:rPr lang="it-IT" sz="2800" dirty="0"/>
-              <a:t>:</a:t>
-            </a:r>
-          </a:p>
-        </p:txBody>
-      </p:sp>
-      <p:sp>
-        <p:nvSpPr>
-          <p:cNvPr id="4" name="CasellaDiTesto 3">
-            <a:extLst>
-              <a:ext uri="{FF2B5EF4-FFF2-40B4-BE49-F238E27FC236}">
-                <a16:creationId xmlns:a16="http://schemas.microsoft.com/office/drawing/2014/main" id="{AA281081-0F7F-DADF-87C0-342DBA4B4B4E}"/>
-              </a:ext>
-            </a:extLst>
-          </p:cNvPr>
-          <p:cNvSpPr txBox="1"/>
-          <p:nvPr/>
-        </p:nvSpPr>
-        <p:spPr>
-          <a:xfrm>
-            <a:off x="211464" y="649994"/>
-            <a:ext cx="11631669" cy="3293209"/>
-          </a:xfrm>
-          <a:prstGeom prst="rect">
-            <a:avLst/>
-          </a:prstGeom>
-          <a:noFill/>
-        </p:spPr>
-        <p:txBody>
-          <a:bodyPr wrap="square" rtlCol="0">
-            <a:spAutoFit/>
-          </a:bodyPr>
-          <a:lstStyle/>
-          <a:p>
-            <a:pPr marL="342900" indent="-342900">
-              <a:buFont typeface="+mj-lt"/>
-              <a:buAutoNum type="arabicPeriod"/>
-            </a:pPr>
-            <a:r>
-              <a:rPr lang="it-IT" sz="1600" dirty="0">
-                <a:highlight>
-                  <a:srgbClr val="FFFF00"/>
-                </a:highlight>
-              </a:rPr>
-              <a:t>GUI </a:t>
-            </a:r>
-            <a:r>
-              <a:rPr lang="it-IT" sz="1600" dirty="0" err="1">
-                <a:highlight>
-                  <a:srgbClr val="FFFF00"/>
-                </a:highlight>
-              </a:rPr>
-              <a:t>chatGPT</a:t>
-            </a:r>
-            <a:r>
-              <a:rPr lang="it-IT" sz="1600" dirty="0">
-                <a:highlight>
-                  <a:srgbClr val="FFFF00"/>
-                </a:highlight>
-              </a:rPr>
-              <a:t> like </a:t>
-            </a:r>
-            <a:r>
-              <a:rPr lang="it-IT" sz="1600" dirty="0" err="1">
-                <a:highlight>
-                  <a:srgbClr val="FFFF00"/>
-                </a:highlight>
-              </a:rPr>
-              <a:t>where</a:t>
-            </a:r>
-            <a:endParaRPr lang="it-IT" sz="1600" dirty="0">
-              <a:highlight>
-                <a:srgbClr val="FFFF00"/>
-              </a:highlight>
-            </a:endParaRPr>
-          </a:p>
-          <a:p>
-            <a:pPr marL="800100" lvl="1" indent="-342900">
-              <a:buFont typeface="+mj-lt"/>
-              <a:buAutoNum type="arabicPeriod"/>
-            </a:pPr>
-            <a:r>
-              <a:rPr lang="it-IT" sz="1600" dirty="0">
-                <a:highlight>
-                  <a:srgbClr val="FFFF00"/>
-                </a:highlight>
-              </a:rPr>
-              <a:t>The chats are </a:t>
-            </a:r>
-            <a:r>
-              <a:rPr lang="it-IT" sz="1600" dirty="0" err="1">
-                <a:highlight>
-                  <a:srgbClr val="FFFF00"/>
-                </a:highlight>
-              </a:rPr>
-              <a:t>actually</a:t>
-            </a:r>
-            <a:r>
-              <a:rPr lang="it-IT" sz="1600" dirty="0">
-                <a:highlight>
-                  <a:srgbClr val="FFFF00"/>
-                </a:highlight>
-              </a:rPr>
-              <a:t> the boards</a:t>
-            </a:r>
-          </a:p>
-          <a:p>
-            <a:pPr marL="800100" lvl="1" indent="-342900">
-              <a:buFont typeface="+mj-lt"/>
-              <a:buAutoNum type="arabicPeriod"/>
-            </a:pPr>
-            <a:r>
-              <a:rPr lang="it-IT" sz="1600" dirty="0">
-                <a:highlight>
-                  <a:srgbClr val="FFFF00"/>
-                </a:highlight>
-              </a:rPr>
-              <a:t>The apps are </a:t>
-            </a:r>
-            <a:r>
-              <a:rPr lang="it-IT" sz="1600" dirty="0" err="1">
-                <a:highlight>
-                  <a:srgbClr val="FFFF00"/>
-                </a:highlight>
-              </a:rPr>
-              <a:t>actually</a:t>
-            </a:r>
-            <a:r>
-              <a:rPr lang="it-IT" sz="1600" dirty="0">
-                <a:highlight>
-                  <a:srgbClr val="FFFF00"/>
-                </a:highlight>
-              </a:rPr>
-              <a:t> the </a:t>
-            </a:r>
-            <a:r>
-              <a:rPr lang="it-IT" sz="1600" dirty="0" err="1">
-                <a:highlight>
-                  <a:srgbClr val="FFFF00"/>
-                </a:highlight>
-              </a:rPr>
-              <a:t>GPTs</a:t>
-            </a:r>
-            <a:endParaRPr lang="it-IT" sz="1600" dirty="0">
-              <a:highlight>
-                <a:srgbClr val="FFFF00"/>
-              </a:highlight>
-            </a:endParaRPr>
-          </a:p>
-          <a:p>
-            <a:pPr marL="342900" indent="-342900">
-              <a:buFont typeface="+mj-lt"/>
-              <a:buAutoNum type="arabicPeriod"/>
-            </a:pPr>
-            <a:r>
-              <a:rPr lang="it-IT" sz="1600" dirty="0" err="1">
-                <a:highlight>
-                  <a:srgbClr val="FFFF00"/>
-                </a:highlight>
-              </a:rPr>
-              <a:t>Simulation</a:t>
-            </a:r>
-            <a:r>
-              <a:rPr lang="it-IT" sz="1600" dirty="0">
-                <a:highlight>
-                  <a:srgbClr val="FFFF00"/>
-                </a:highlight>
-              </a:rPr>
-              <a:t> </a:t>
-            </a:r>
-            <a:r>
-              <a:rPr lang="it-IT" sz="1600" dirty="0" err="1">
-                <a:highlight>
-                  <a:srgbClr val="FFFF00"/>
-                </a:highlight>
-              </a:rPr>
-              <a:t>Locker</a:t>
-            </a:r>
-            <a:r>
-              <a:rPr lang="it-IT" sz="1600" dirty="0">
-                <a:highlight>
-                  <a:srgbClr val="FFFF00"/>
-                </a:highlight>
-              </a:rPr>
-              <a:t> to </a:t>
-            </a:r>
-            <a:r>
-              <a:rPr lang="it-IT" sz="1600" dirty="0" err="1">
-                <a:highlight>
-                  <a:srgbClr val="FFFF00"/>
-                </a:highlight>
-              </a:rPr>
-              <a:t>avoid</a:t>
-            </a:r>
-            <a:r>
-              <a:rPr lang="it-IT" sz="1600" dirty="0">
-                <a:highlight>
-                  <a:srgbClr val="FFFF00"/>
-                </a:highlight>
-              </a:rPr>
-              <a:t> running the solver </a:t>
-            </a:r>
-            <a:r>
-              <a:rPr lang="it-IT" sz="1600" dirty="0" err="1">
-                <a:highlight>
-                  <a:srgbClr val="FFFF00"/>
-                </a:highlight>
-              </a:rPr>
-              <a:t>engine</a:t>
-            </a:r>
-            <a:r>
-              <a:rPr lang="it-IT" sz="1600" dirty="0">
-                <a:highlight>
-                  <a:srgbClr val="FFFF00"/>
-                </a:highlight>
-              </a:rPr>
-              <a:t> more </a:t>
-            </a:r>
-            <a:r>
-              <a:rPr lang="it-IT" sz="1600" dirty="0" err="1">
-                <a:highlight>
-                  <a:srgbClr val="FFFF00"/>
-                </a:highlight>
-              </a:rPr>
-              <a:t>than</a:t>
-            </a:r>
-            <a:r>
-              <a:rPr lang="it-IT" sz="1600" dirty="0">
-                <a:highlight>
-                  <a:srgbClr val="FFFF00"/>
-                </a:highlight>
-              </a:rPr>
-              <a:t> one time</a:t>
-            </a:r>
-          </a:p>
-          <a:p>
-            <a:pPr marL="800100" lvl="1" indent="-342900">
-              <a:buFont typeface="+mj-lt"/>
-              <a:buAutoNum type="arabicPeriod"/>
-            </a:pPr>
-            <a:r>
-              <a:rPr lang="it-IT" sz="1600" dirty="0" err="1">
-                <a:highlight>
-                  <a:srgbClr val="FFFF00"/>
-                </a:highlight>
-              </a:rPr>
-              <a:t>Absolutely</a:t>
-            </a:r>
-            <a:r>
-              <a:rPr lang="it-IT" sz="1600" dirty="0">
-                <a:highlight>
-                  <a:srgbClr val="FFFF00"/>
-                </a:highlight>
-              </a:rPr>
-              <a:t> one </a:t>
-            </a:r>
-            <a:r>
-              <a:rPr lang="it-IT" sz="1600" dirty="0" err="1">
-                <a:highlight>
-                  <a:srgbClr val="FFFF00"/>
-                </a:highlight>
-              </a:rPr>
-              <a:t>simulation</a:t>
-            </a:r>
-            <a:r>
-              <a:rPr lang="it-IT" sz="1600" dirty="0">
-                <a:highlight>
-                  <a:srgbClr val="FFFF00"/>
-                </a:highlight>
-              </a:rPr>
-              <a:t> </a:t>
-            </a:r>
-            <a:r>
-              <a:rPr lang="it-IT" sz="1600" dirty="0" err="1">
-                <a:highlight>
-                  <a:srgbClr val="FFFF00"/>
-                </a:highlight>
-              </a:rPr>
-              <a:t>at</a:t>
-            </a:r>
-            <a:r>
-              <a:rPr lang="it-IT" sz="1600" dirty="0">
-                <a:highlight>
-                  <a:srgbClr val="FFFF00"/>
-                </a:highlight>
-              </a:rPr>
-              <a:t> the time on the </a:t>
-            </a:r>
-            <a:r>
-              <a:rPr lang="it-IT" sz="1600" dirty="0" err="1">
-                <a:highlight>
-                  <a:srgbClr val="FFFF00"/>
-                </a:highlight>
-              </a:rPr>
-              <a:t>same</a:t>
-            </a:r>
-            <a:r>
-              <a:rPr lang="it-IT" sz="1600" dirty="0">
-                <a:highlight>
-                  <a:srgbClr val="FFFF00"/>
-                </a:highlight>
-              </a:rPr>
-              <a:t> PC</a:t>
-            </a:r>
-          </a:p>
-          <a:p>
-            <a:pPr marL="342900" indent="-342900">
-              <a:buFont typeface="+mj-lt"/>
-              <a:buAutoNum type="arabicPeriod"/>
-            </a:pPr>
-            <a:r>
-              <a:rPr lang="it-IT" sz="1600" dirty="0">
-                <a:highlight>
-                  <a:srgbClr val="FFFF00"/>
-                </a:highlight>
-              </a:rPr>
-              <a:t>No </a:t>
-            </a:r>
-            <a:r>
-              <a:rPr lang="it-IT" sz="1600" dirty="0" err="1">
-                <a:highlight>
-                  <a:srgbClr val="FFFF00"/>
-                </a:highlight>
-              </a:rPr>
-              <a:t>simulations</a:t>
-            </a:r>
-            <a:r>
-              <a:rPr lang="it-IT" sz="1600" dirty="0">
-                <a:highlight>
-                  <a:srgbClr val="FFFF00"/>
-                </a:highlight>
-              </a:rPr>
-              <a:t> on Android</a:t>
-            </a:r>
-          </a:p>
-          <a:p>
-            <a:pPr marL="342900" indent="-342900">
-              <a:buFont typeface="+mj-lt"/>
-              <a:buAutoNum type="arabicPeriod"/>
-            </a:pPr>
-            <a:r>
-              <a:rPr lang="it-IT" sz="1600" dirty="0">
-                <a:highlight>
-                  <a:srgbClr val="FFFF00"/>
-                </a:highlight>
-              </a:rPr>
-              <a:t>Charts</a:t>
-            </a:r>
-          </a:p>
-          <a:p>
-            <a:pPr marL="800100" lvl="1" indent="-342900">
-              <a:buFont typeface="+mj-lt"/>
-              <a:buAutoNum type="arabicPeriod"/>
-            </a:pPr>
-            <a:r>
-              <a:rPr lang="it-IT" sz="1600" dirty="0">
-                <a:highlight>
-                  <a:srgbClr val="FFFF00"/>
-                </a:highlight>
-              </a:rPr>
-              <a:t>Regular chart: </a:t>
-            </a:r>
-            <a:r>
-              <a:rPr lang="it-IT" sz="1600" dirty="0" err="1">
-                <a:highlight>
-                  <a:srgbClr val="FFFF00"/>
-                </a:highlight>
-              </a:rPr>
-              <a:t>already</a:t>
-            </a:r>
-            <a:r>
-              <a:rPr lang="it-IT" sz="1600" dirty="0">
-                <a:highlight>
-                  <a:srgbClr val="FFFF00"/>
-                </a:highlight>
-              </a:rPr>
-              <a:t> </a:t>
-            </a:r>
-            <a:r>
-              <a:rPr lang="it-IT" sz="1600" dirty="0" err="1">
-                <a:highlight>
-                  <a:srgbClr val="FFFF00"/>
-                </a:highlight>
-              </a:rPr>
-              <a:t>integrated</a:t>
-            </a:r>
-            <a:r>
-              <a:rPr lang="it-IT" sz="1600" dirty="0">
-                <a:highlight>
-                  <a:srgbClr val="FFFF00"/>
-                </a:highlight>
-              </a:rPr>
-              <a:t> inside</a:t>
-            </a:r>
-          </a:p>
-          <a:p>
-            <a:pPr marL="800100" lvl="1" indent="-342900">
-              <a:buFont typeface="+mj-lt"/>
-              <a:buAutoNum type="arabicPeriod"/>
-            </a:pPr>
-            <a:r>
-              <a:rPr lang="it-IT" sz="1600" dirty="0">
-                <a:highlight>
-                  <a:srgbClr val="FFFF00"/>
-                </a:highlight>
-              </a:rPr>
-              <a:t>Global chart: a new item in the </a:t>
-            </a:r>
-          </a:p>
-          <a:p>
-            <a:pPr marL="342900" indent="-342900">
-              <a:buFont typeface="+mj-lt"/>
-              <a:buAutoNum type="arabicPeriod"/>
-            </a:pPr>
-            <a:r>
-              <a:rPr lang="it-IT" sz="1600" dirty="0">
-                <a:highlight>
-                  <a:srgbClr val="FFFF00"/>
-                </a:highlight>
-              </a:rPr>
-              <a:t>Memory </a:t>
-            </a:r>
-            <a:r>
-              <a:rPr lang="it-IT" sz="1600" dirty="0" err="1">
-                <a:highlight>
-                  <a:srgbClr val="FFFF00"/>
-                </a:highlight>
-              </a:rPr>
-              <a:t>optimization</a:t>
-            </a:r>
-            <a:r>
-              <a:rPr lang="it-IT" sz="1600" dirty="0">
-                <a:highlight>
-                  <a:srgbClr val="FFFF00"/>
-                </a:highlight>
-              </a:rPr>
-              <a:t> </a:t>
-            </a:r>
-          </a:p>
-          <a:p>
-            <a:pPr marL="800100" lvl="1" indent="-342900">
-              <a:buFont typeface="+mj-lt"/>
-              <a:buAutoNum type="arabicPeriod"/>
-            </a:pPr>
-            <a:r>
-              <a:rPr lang="it-IT" sz="1600" dirty="0" err="1">
-                <a:highlight>
-                  <a:srgbClr val="FFFF00"/>
-                </a:highlight>
-              </a:rPr>
-              <a:t>saving</a:t>
-            </a:r>
-            <a:r>
-              <a:rPr lang="it-IT" sz="1600" dirty="0">
-                <a:highlight>
-                  <a:srgbClr val="FFFF00"/>
-                </a:highlight>
-              </a:rPr>
-              <a:t> </a:t>
-            </a:r>
-            <a:r>
-              <a:rPr lang="it-IT" sz="1600" dirty="0" err="1">
-                <a:highlight>
-                  <a:srgbClr val="FFFF00"/>
-                </a:highlight>
-              </a:rPr>
-              <a:t>netlists</a:t>
-            </a:r>
-            <a:r>
-              <a:rPr lang="it-IT" sz="1600" dirty="0">
-                <a:highlight>
-                  <a:srgbClr val="FFFF00"/>
-                </a:highlight>
-              </a:rPr>
-              <a:t> and </a:t>
-            </a:r>
-            <a:r>
-              <a:rPr lang="it-IT" sz="1600" dirty="0" err="1">
-                <a:highlight>
-                  <a:srgbClr val="FFFF00"/>
-                </a:highlight>
-              </a:rPr>
-              <a:t>results</a:t>
-            </a:r>
-            <a:r>
-              <a:rPr lang="it-IT" sz="1600" dirty="0">
-                <a:highlight>
-                  <a:srgbClr val="FFFF00"/>
-                </a:highlight>
-              </a:rPr>
-              <a:t> on </a:t>
-            </a:r>
-            <a:r>
-              <a:rPr lang="it-IT" sz="1600" dirty="0" err="1">
-                <a:highlight>
-                  <a:srgbClr val="FFFF00"/>
-                </a:highlight>
-              </a:rPr>
-              <a:t>indexedDB</a:t>
-            </a:r>
-            <a:endParaRPr lang="it-IT" sz="1600" dirty="0">
-              <a:highlight>
-                <a:srgbClr val="FFFF00"/>
-              </a:highlight>
-            </a:endParaRPr>
-          </a:p>
-          <a:p>
-            <a:pPr marL="800100" lvl="1" indent="-342900">
-              <a:buFont typeface="+mj-lt"/>
-              <a:buAutoNum type="arabicPeriod"/>
-            </a:pPr>
-            <a:r>
-              <a:rPr lang="it-IT" sz="1600" dirty="0">
-                <a:highlight>
-                  <a:srgbClr val="FFFF00"/>
-                </a:highlight>
-              </a:rPr>
-              <a:t>One </a:t>
-            </a:r>
-            <a:r>
-              <a:rPr lang="it-IT" sz="1600" dirty="0" err="1">
-                <a:highlight>
-                  <a:srgbClr val="FFFF00"/>
-                </a:highlight>
-              </a:rPr>
-              <a:t>circuit</a:t>
-            </a:r>
-            <a:r>
-              <a:rPr lang="it-IT" sz="1600" dirty="0">
-                <a:highlight>
-                  <a:srgbClr val="FFFF00"/>
-                </a:highlight>
-              </a:rPr>
-              <a:t> can be </a:t>
-            </a:r>
-            <a:r>
-              <a:rPr lang="it-IT" sz="1600" dirty="0" err="1">
-                <a:highlight>
-                  <a:srgbClr val="FFFF00"/>
-                </a:highlight>
-              </a:rPr>
-              <a:t>plotted</a:t>
-            </a:r>
-            <a:r>
-              <a:rPr lang="it-IT" sz="1600" dirty="0">
-                <a:highlight>
-                  <a:srgbClr val="FFFF00"/>
-                </a:highlight>
-              </a:rPr>
-              <a:t> </a:t>
-            </a:r>
-            <a:r>
-              <a:rPr lang="it-IT" sz="1600" dirty="0" err="1">
-                <a:highlight>
-                  <a:srgbClr val="FFFF00"/>
-                </a:highlight>
-              </a:rPr>
-              <a:t>at</a:t>
-            </a:r>
-            <a:r>
-              <a:rPr lang="it-IT" sz="1600" dirty="0">
-                <a:highlight>
-                  <a:srgbClr val="FFFF00"/>
-                </a:highlight>
-              </a:rPr>
-              <a:t> the time and </a:t>
-            </a:r>
-            <a:r>
-              <a:rPr lang="it-IT" sz="1600" dirty="0" err="1">
-                <a:highlight>
-                  <a:srgbClr val="FFFF00"/>
-                </a:highlight>
-              </a:rPr>
-              <a:t>any</a:t>
-            </a:r>
-            <a:r>
-              <a:rPr lang="it-IT" sz="1600" dirty="0">
-                <a:highlight>
-                  <a:srgbClr val="FFFF00"/>
-                </a:highlight>
-              </a:rPr>
-              <a:t> time </a:t>
-            </a:r>
-            <a:r>
-              <a:rPr lang="it-IT" sz="1600" dirty="0" err="1">
-                <a:highlight>
-                  <a:srgbClr val="FFFF00"/>
-                </a:highlight>
-              </a:rPr>
-              <a:t>it</a:t>
-            </a:r>
-            <a:r>
-              <a:rPr lang="it-IT" sz="1600" dirty="0">
-                <a:highlight>
-                  <a:srgbClr val="FFFF00"/>
-                </a:highlight>
-              </a:rPr>
-              <a:t> </a:t>
-            </a:r>
-            <a:r>
-              <a:rPr lang="it-IT" sz="1600" dirty="0" err="1">
-                <a:highlight>
-                  <a:srgbClr val="FFFF00"/>
-                </a:highlight>
-              </a:rPr>
-              <a:t>is</a:t>
-            </a:r>
-            <a:r>
-              <a:rPr lang="it-IT" sz="1600" dirty="0">
-                <a:highlight>
-                  <a:srgbClr val="FFFF00"/>
-                </a:highlight>
-              </a:rPr>
-              <a:t> </a:t>
-            </a:r>
-            <a:r>
-              <a:rPr lang="it-IT" sz="1600" dirty="0" err="1">
-                <a:highlight>
-                  <a:srgbClr val="FFFF00"/>
-                </a:highlight>
-              </a:rPr>
-              <a:t>reloaded</a:t>
-            </a:r>
-            <a:r>
-              <a:rPr lang="it-IT" sz="1600" dirty="0">
-                <a:highlight>
-                  <a:srgbClr val="FFFF00"/>
-                </a:highlight>
-              </a:rPr>
-              <a:t> from the storage</a:t>
-            </a:r>
-          </a:p>
-          <a:p>
-            <a:pPr marL="800100" lvl="1" indent="-342900">
-              <a:buFont typeface="+mj-lt"/>
-              <a:buAutoNum type="arabicPeriod"/>
-            </a:pPr>
-            <a:r>
-              <a:rPr lang="it-IT" sz="1600" dirty="0">
-                <a:highlight>
-                  <a:srgbClr val="FFFF00"/>
-                </a:highlight>
-              </a:rPr>
-              <a:t>One chart or group of charts (global charts)</a:t>
-            </a:r>
-          </a:p>
-        </p:txBody>
-      </p:sp>
-    </p:spTree>
-    <p:extLst>
-      <p:ext uri="{BB962C8B-B14F-4D97-AF65-F5344CB8AC3E}">
-        <p14:creationId xmlns:p14="http://schemas.microsoft.com/office/powerpoint/2010/main" val="3494812723"/>
-      </p:ext>
-    </p:extLst>
-  </p:cSld>
-  <p:clrMapOvr>
-    <a:masterClrMapping/>
-  </p:clrMapOvr>
-</p:sld>
-</file>
-
-<file path=ppt/slides/slide9.xml><?xml version="1.0" encoding="utf-8"?>
 <p:sld xmlns:a="http://schemas.openxmlformats.org/drawingml/2006/main" xmlns:r="http://schemas.openxmlformats.org/officeDocument/2006/relationships" xmlns:p="http://schemas.openxmlformats.org/presentationml/2006/main">
   <p:cSld>
     <p:spTree>
@@ -11184,7 +10208,7 @@
         <p:spPr>
           <a:xfrm>
             <a:off x="211464" y="92800"/>
-            <a:ext cx="1912703" cy="523220"/>
+            <a:ext cx="6882782" cy="523220"/>
           </a:xfrm>
           <a:prstGeom prst="rect">
             <a:avLst/>
@@ -11199,88 +10223,27 @@
           <a:p>
             <a:r>
               <a:rPr lang="it-IT" sz="2800" dirty="0"/>
-              <a:t>Module #1:</a:t>
+              <a:t>Feature #1: JSON </a:t>
+            </a:r>
+            <a:r>
+              <a:rPr lang="it-IT" sz="2800" dirty="0" err="1"/>
+              <a:t>Communication</a:t>
+            </a:r>
+            <a:r>
+              <a:rPr lang="it-IT" sz="2800" dirty="0"/>
+              <a:t> </a:t>
+            </a:r>
+            <a:r>
+              <a:rPr lang="it-IT" sz="2800" dirty="0" err="1"/>
+              <a:t>Protocol</a:t>
+            </a:r>
+            <a:r>
+              <a:rPr lang="it-IT" sz="2800" dirty="0"/>
+              <a:t> </a:t>
             </a:r>
           </a:p>
         </p:txBody>
       </p:sp>
-      <p:pic>
-        <p:nvPicPr>
-          <p:cNvPr id="6" name="Immagine 5">
-            <a:extLst>
-              <a:ext uri="{FF2B5EF4-FFF2-40B4-BE49-F238E27FC236}">
-                <a16:creationId xmlns:a16="http://schemas.microsoft.com/office/drawing/2014/main" id="{85B71850-91D1-E6CD-8AD8-A425F88B1A05}"/>
-              </a:ext>
-            </a:extLst>
-          </p:cNvPr>
-          <p:cNvPicPr>
-            <a:picLocks noChangeAspect="1"/>
-          </p:cNvPicPr>
-          <p:nvPr/>
-        </p:nvPicPr>
-        <p:blipFill>
-          <a:blip r:embed="rId2"/>
-          <a:stretch>
-            <a:fillRect/>
-          </a:stretch>
-        </p:blipFill>
-        <p:spPr>
-          <a:xfrm>
-            <a:off x="6425045" y="3129072"/>
-            <a:ext cx="5107776" cy="2446771"/>
-          </a:xfrm>
-          <a:prstGeom prst="rect">
-            <a:avLst/>
-          </a:prstGeom>
-        </p:spPr>
-      </p:pic>
-      <p:pic>
-        <p:nvPicPr>
-          <p:cNvPr id="1028" name="Picture 4" descr="Class Diagram - UML 2 Tutorial | Sparx Systems">
-            <a:extLst>
-              <a:ext uri="{FF2B5EF4-FFF2-40B4-BE49-F238E27FC236}">
-                <a16:creationId xmlns:a16="http://schemas.microsoft.com/office/drawing/2014/main" id="{8B9BC641-1ED3-4478-373B-B72C486AFF56}"/>
-              </a:ext>
-            </a:extLst>
-          </p:cNvPr>
-          <p:cNvPicPr>
-            <a:picLocks noChangeAspect="1" noChangeArrowheads="1"/>
-          </p:cNvPicPr>
-          <p:nvPr/>
-        </p:nvPicPr>
-        <p:blipFill>
-          <a:blip r:embed="rId3">
-            <a:extLst>
-              <a:ext uri="{28A0092B-C50C-407E-A947-70E740481C1C}">
-                <a14:useLocalDpi xmlns:a14="http://schemas.microsoft.com/office/drawing/2010/main" val="0"/>
-              </a:ext>
-            </a:extLst>
-          </a:blip>
-          <a:srcRect/>
-          <a:stretch>
-            <a:fillRect/>
-          </a:stretch>
-        </p:blipFill>
-        <p:spPr bwMode="auto">
-          <a:xfrm>
-            <a:off x="451360" y="2489923"/>
-            <a:ext cx="5725391" cy="4036796"/>
-          </a:xfrm>
-          <a:prstGeom prst="rect">
-            <a:avLst/>
-          </a:prstGeom>
-          <a:noFill/>
-          <a:extLst>
-            <a:ext uri="{909E8E84-426E-40DD-AFC4-6F175D3DCCD1}">
-              <a14:hiddenFill xmlns:a14="http://schemas.microsoft.com/office/drawing/2010/main">
-                <a:solidFill>
-                  <a:srgbClr val="FFFFFF"/>
-                </a:solidFill>
-              </a14:hiddenFill>
-            </a:ext>
-          </a:extLst>
-        </p:spPr>
-      </p:pic>
       <p:sp>
         <p:nvSpPr>
           <p:cNvPr id="7" name="CasellaDiTesto 6">
@@ -11295,8 +10258,8 @@
         </p:nvSpPr>
         <p:spPr>
           <a:xfrm>
-            <a:off x="211464" y="831273"/>
-            <a:ext cx="1700017" cy="923330"/>
+            <a:off x="0" y="616020"/>
+            <a:ext cx="12192000" cy="1569660"/>
           </a:xfrm>
           <a:prstGeom prst="rect">
             <a:avLst/>
@@ -11304,43 +10267,1829 @@
           <a:noFill/>
         </p:spPr>
         <p:txBody>
+          <a:bodyPr wrap="square" rtlCol="0">
+            <a:spAutoFit/>
+          </a:bodyPr>
+          <a:lstStyle/>
+          <a:p>
+            <a:pPr marL="285750" indent="-285750">
+              <a:buFont typeface="Arial" panose="020B0604020202020204" pitchFamily="34" charset="0"/>
+              <a:buChar char="•"/>
+            </a:pPr>
+            <a:r>
+              <a:rPr lang="it-IT" sz="1600" b="1" dirty="0" err="1"/>
+              <a:t>Overview</a:t>
+            </a:r>
+            <a:r>
+              <a:rPr lang="it-IT" sz="1600" b="1" dirty="0"/>
+              <a:t>: </a:t>
+            </a:r>
+          </a:p>
+          <a:p>
+            <a:pPr marL="342900" indent="-342900">
+              <a:buFont typeface="+mj-lt"/>
+              <a:buAutoNum type="arabicPeriod"/>
+            </a:pPr>
+            <a:r>
+              <a:rPr lang="it-IT" sz="1600" dirty="0"/>
+              <a:t>For </a:t>
+            </a:r>
+            <a:r>
+              <a:rPr lang="it-IT" sz="1600" dirty="0" err="1"/>
+              <a:t>this</a:t>
+            </a:r>
+            <a:r>
+              <a:rPr lang="it-IT" sz="1600" dirty="0"/>
+              <a:t> feature </a:t>
+            </a:r>
+            <a:r>
+              <a:rPr lang="it-IT" sz="1600" dirty="0" err="1"/>
+              <a:t>we</a:t>
+            </a:r>
+            <a:r>
+              <a:rPr lang="it-IT" sz="1600" dirty="0"/>
+              <a:t> </a:t>
+            </a:r>
+            <a:r>
+              <a:rPr lang="it-IT" sz="1600" dirty="0" err="1"/>
+              <a:t>nned</a:t>
+            </a:r>
+            <a:r>
+              <a:rPr lang="it-IT" sz="1600" dirty="0"/>
+              <a:t> to </a:t>
+            </a:r>
+            <a:r>
+              <a:rPr lang="it-IT" sz="1600" dirty="0" err="1"/>
+              <a:t>implement</a:t>
+            </a:r>
+            <a:r>
+              <a:rPr lang="it-IT" sz="1600" dirty="0"/>
+              <a:t> the </a:t>
+            </a:r>
+            <a:r>
+              <a:rPr lang="it-IT" sz="1600" dirty="0" err="1"/>
+              <a:t>communication</a:t>
+            </a:r>
+            <a:r>
+              <a:rPr lang="it-IT" sz="1600" dirty="0"/>
+              <a:t> </a:t>
+            </a:r>
+            <a:r>
+              <a:rPr lang="it-IT" sz="1600" dirty="0" err="1"/>
+              <a:t>protocol</a:t>
+            </a:r>
+            <a:r>
+              <a:rPr lang="it-IT" sz="1600" dirty="0"/>
+              <a:t> </a:t>
+            </a:r>
+            <a:r>
+              <a:rPr lang="it-IT" sz="1600" dirty="0" err="1"/>
+              <a:t>between</a:t>
+            </a:r>
+            <a:r>
+              <a:rPr lang="it-IT" sz="1600" dirty="0"/>
+              <a:t> front-end and </a:t>
+            </a:r>
+            <a:r>
+              <a:rPr lang="it-IT" sz="1600" dirty="0" err="1"/>
+              <a:t>wasm</a:t>
+            </a:r>
+            <a:r>
+              <a:rPr lang="it-IT" sz="1600" dirty="0"/>
+              <a:t> solver.</a:t>
+            </a:r>
+          </a:p>
+          <a:p>
+            <a:pPr marL="342900" indent="-342900">
+              <a:buFont typeface="+mj-lt"/>
+              <a:buAutoNum type="arabicPeriod"/>
+            </a:pPr>
+            <a:r>
+              <a:rPr lang="it-IT" sz="1600" dirty="0"/>
+              <a:t>The </a:t>
+            </a:r>
+            <a:r>
+              <a:rPr lang="it-IT" sz="1600" dirty="0" err="1"/>
+              <a:t>patter</a:t>
+            </a:r>
+            <a:r>
+              <a:rPr lang="it-IT" sz="1600" dirty="0"/>
+              <a:t> </a:t>
+            </a:r>
+            <a:r>
+              <a:rPr lang="it-IT" sz="1600" dirty="0" err="1"/>
+              <a:t>should</a:t>
+            </a:r>
+            <a:r>
+              <a:rPr lang="it-IT" sz="1600" dirty="0"/>
+              <a:t> be </a:t>
+            </a:r>
+            <a:r>
+              <a:rPr lang="it-IT" sz="1600" dirty="0" err="1"/>
+              <a:t>request</a:t>
+            </a:r>
+            <a:r>
+              <a:rPr lang="it-IT" sz="1600" dirty="0"/>
+              <a:t> </a:t>
+            </a:r>
+            <a:r>
+              <a:rPr lang="it-IT" sz="1600" dirty="0" err="1"/>
+              <a:t>response</a:t>
+            </a:r>
+            <a:r>
+              <a:rPr lang="it-IT" sz="1600" dirty="0"/>
+              <a:t> with payload. </a:t>
+            </a:r>
+          </a:p>
+          <a:p>
+            <a:pPr marL="342900" indent="-342900">
+              <a:buFont typeface="+mj-lt"/>
+              <a:buAutoNum type="arabicPeriod"/>
+            </a:pPr>
+            <a:r>
+              <a:rPr lang="it-IT" sz="1600" dirty="0" err="1"/>
+              <a:t>Different</a:t>
+            </a:r>
+            <a:r>
+              <a:rPr lang="it-IT" sz="1600" dirty="0"/>
+              <a:t> </a:t>
+            </a:r>
+            <a:r>
+              <a:rPr lang="it-IT" sz="1600" dirty="0" err="1"/>
+              <a:t>types</a:t>
+            </a:r>
+            <a:r>
+              <a:rPr lang="it-IT" sz="1600" dirty="0"/>
+              <a:t> of </a:t>
+            </a:r>
+            <a:r>
+              <a:rPr lang="it-IT" sz="1600" dirty="0" err="1"/>
+              <a:t>messages</a:t>
+            </a:r>
+            <a:r>
+              <a:rPr lang="it-IT" sz="1600" dirty="0"/>
+              <a:t> </a:t>
+            </a:r>
+            <a:r>
+              <a:rPr lang="it-IT" sz="1600" dirty="0" err="1"/>
+              <a:t>should</a:t>
+            </a:r>
+            <a:r>
+              <a:rPr lang="it-IT" sz="1600" dirty="0"/>
+              <a:t> be </a:t>
+            </a:r>
+            <a:r>
+              <a:rPr lang="it-IT" sz="1600" dirty="0" err="1"/>
+              <a:t>implemented</a:t>
+            </a:r>
+            <a:r>
+              <a:rPr lang="it-IT" sz="1600" dirty="0"/>
+              <a:t> </a:t>
+            </a:r>
+            <a:r>
+              <a:rPr lang="it-IT" sz="1600" dirty="0" err="1"/>
+              <a:t>as</a:t>
+            </a:r>
+            <a:r>
+              <a:rPr lang="it-IT" sz="1600" dirty="0"/>
+              <a:t> </a:t>
+            </a:r>
+            <a:r>
+              <a:rPr lang="it-IT" sz="1600" dirty="0" err="1"/>
+              <a:t>explained</a:t>
+            </a:r>
+            <a:r>
+              <a:rPr lang="it-IT" sz="1600" dirty="0"/>
+              <a:t> in the </a:t>
+            </a:r>
+            <a:r>
+              <a:rPr lang="it-IT" sz="1600" dirty="0" err="1"/>
+              <a:t>protocol_example,txt</a:t>
+            </a:r>
+            <a:r>
+              <a:rPr lang="it-IT" sz="1600" dirty="0"/>
+              <a:t> file </a:t>
+            </a:r>
+            <a:r>
+              <a:rPr lang="it-IT" sz="1600" dirty="0" err="1"/>
+              <a:t>attached</a:t>
+            </a:r>
+            <a:r>
+              <a:rPr lang="it-IT" sz="1600" dirty="0"/>
+              <a:t>.</a:t>
+            </a:r>
+          </a:p>
+          <a:p>
+            <a:pPr marL="342900" indent="-342900">
+              <a:buFont typeface="+mj-lt"/>
+              <a:buAutoNum type="arabicPeriod"/>
+            </a:pPr>
+            <a:r>
+              <a:rPr lang="it-IT" sz="1600" dirty="0"/>
+              <a:t> </a:t>
+            </a:r>
+          </a:p>
+          <a:p>
+            <a:endParaRPr lang="it-IT" sz="1600" dirty="0"/>
+          </a:p>
+        </p:txBody>
+      </p:sp>
+      <p:sp>
+        <p:nvSpPr>
+          <p:cNvPr id="6" name="CasellaDiTesto 5">
+            <a:extLst>
+              <a:ext uri="{FF2B5EF4-FFF2-40B4-BE49-F238E27FC236}">
+                <a16:creationId xmlns:a16="http://schemas.microsoft.com/office/drawing/2014/main" id="{4927ECAE-8D2A-2AF3-A9C3-7A08C5371AC8}"/>
+              </a:ext>
+            </a:extLst>
+          </p:cNvPr>
+          <p:cNvSpPr txBox="1"/>
+          <p:nvPr/>
+        </p:nvSpPr>
+        <p:spPr>
+          <a:xfrm>
+            <a:off x="2270865" y="3888180"/>
+            <a:ext cx="1775166" cy="369332"/>
+          </a:xfrm>
+          <a:prstGeom prst="rect">
+            <a:avLst/>
+          </a:prstGeom>
+          <a:noFill/>
+          <a:ln>
+            <a:solidFill>
+              <a:schemeClr val="tx1"/>
+            </a:solidFill>
+          </a:ln>
+        </p:spPr>
+        <p:txBody>
           <a:bodyPr wrap="none" rtlCol="0">
             <a:spAutoFit/>
           </a:bodyPr>
           <a:lstStyle/>
           <a:p>
-            <a:pPr marL="285750" indent="-285750">
-              <a:buFont typeface="Arial" panose="020B0604020202020204" pitchFamily="34" charset="0"/>
-              <a:buChar char="•"/>
-            </a:pPr>
             <a:r>
               <a:rPr lang="it-IT" dirty="0" err="1"/>
-              <a:t>Overview</a:t>
-            </a:r>
-            <a:r>
-              <a:rPr lang="it-IT" dirty="0"/>
-              <a:t>:</a:t>
-            </a:r>
-          </a:p>
-          <a:p>
+              <a:t>wasm_interface</a:t>
+            </a:r>
             <a:endParaRPr lang="it-IT" dirty="0"/>
-          </a:p>
-          <a:p>
-            <a:pPr marL="285750" indent="-285750">
-              <a:buFont typeface="Arial" panose="020B0604020202020204" pitchFamily="34" charset="0"/>
-              <a:buChar char="•"/>
-            </a:pPr>
-            <a:r>
-              <a:rPr lang="it-IT" dirty="0" err="1"/>
-              <a:t>Constraints</a:t>
-            </a:r>
-            <a:r>
-              <a:rPr lang="it-IT" dirty="0"/>
-              <a:t>:</a:t>
-            </a:r>
           </a:p>
         </p:txBody>
       </p:sp>
+      <p:sp>
+        <p:nvSpPr>
+          <p:cNvPr id="10" name="CasellaDiTesto 9">
+            <a:extLst>
+              <a:ext uri="{FF2B5EF4-FFF2-40B4-BE49-F238E27FC236}">
+                <a16:creationId xmlns:a16="http://schemas.microsoft.com/office/drawing/2014/main" id="{49696274-DDBE-F151-B85E-D0B6DDCDD439}"/>
+              </a:ext>
+            </a:extLst>
+          </p:cNvPr>
+          <p:cNvSpPr txBox="1"/>
+          <p:nvPr/>
+        </p:nvSpPr>
+        <p:spPr>
+          <a:xfrm>
+            <a:off x="2270865" y="4872946"/>
+            <a:ext cx="1814920" cy="369332"/>
+          </a:xfrm>
+          <a:prstGeom prst="rect">
+            <a:avLst/>
+          </a:prstGeom>
+          <a:noFill/>
+          <a:ln>
+            <a:solidFill>
+              <a:schemeClr val="tx1"/>
+            </a:solidFill>
+          </a:ln>
+        </p:spPr>
+        <p:txBody>
+          <a:bodyPr wrap="none" rtlCol="0">
+            <a:spAutoFit/>
+          </a:bodyPr>
+          <a:lstStyle/>
+          <a:p>
+            <a:r>
+              <a:rPr lang="it-IT" dirty="0" err="1"/>
+              <a:t>Native_interface</a:t>
+            </a:r>
+            <a:endParaRPr lang="it-IT" dirty="0"/>
+          </a:p>
+        </p:txBody>
+      </p:sp>
+      <p:sp>
+        <p:nvSpPr>
+          <p:cNvPr id="12" name="CasellaDiTesto 11">
+            <a:extLst>
+              <a:ext uri="{FF2B5EF4-FFF2-40B4-BE49-F238E27FC236}">
+                <a16:creationId xmlns:a16="http://schemas.microsoft.com/office/drawing/2014/main" id="{66BA3FB1-2D7D-5270-3EC9-CD2466BED51A}"/>
+              </a:ext>
+            </a:extLst>
+          </p:cNvPr>
+          <p:cNvSpPr txBox="1"/>
+          <p:nvPr/>
+        </p:nvSpPr>
+        <p:spPr>
+          <a:xfrm>
+            <a:off x="4254670" y="3529286"/>
+            <a:ext cx="1093376" cy="369332"/>
+          </a:xfrm>
+          <a:prstGeom prst="rect">
+            <a:avLst/>
+          </a:prstGeom>
+          <a:noFill/>
+          <a:ln>
+            <a:solidFill>
+              <a:schemeClr val="tx1"/>
+            </a:solidFill>
+          </a:ln>
+        </p:spPr>
+        <p:txBody>
+          <a:bodyPr wrap="none" rtlCol="0">
+            <a:spAutoFit/>
+          </a:bodyPr>
+          <a:lstStyle/>
+          <a:p>
+            <a:r>
+              <a:rPr lang="it-IT" dirty="0" err="1"/>
+              <a:t>envelope</a:t>
+            </a:r>
+            <a:endParaRPr lang="it-IT" dirty="0"/>
+          </a:p>
+        </p:txBody>
+      </p:sp>
+      <p:sp>
+        <p:nvSpPr>
+          <p:cNvPr id="22" name="CasellaDiTesto 21">
+            <a:extLst>
+              <a:ext uri="{FF2B5EF4-FFF2-40B4-BE49-F238E27FC236}">
+                <a16:creationId xmlns:a16="http://schemas.microsoft.com/office/drawing/2014/main" id="{C5430687-41B5-68DF-9EA9-6111FD4BDE68}"/>
+              </a:ext>
+            </a:extLst>
+          </p:cNvPr>
+          <p:cNvSpPr txBox="1"/>
+          <p:nvPr/>
+        </p:nvSpPr>
+        <p:spPr>
+          <a:xfrm>
+            <a:off x="5598983" y="3518848"/>
+            <a:ext cx="1359988" cy="369332"/>
+          </a:xfrm>
+          <a:prstGeom prst="rect">
+            <a:avLst/>
+          </a:prstGeom>
+          <a:noFill/>
+          <a:ln>
+            <a:solidFill>
+              <a:schemeClr val="tx1"/>
+            </a:solidFill>
+          </a:ln>
+        </p:spPr>
+        <p:txBody>
+          <a:bodyPr wrap="none" rtlCol="0">
+            <a:spAutoFit/>
+          </a:bodyPr>
+          <a:lstStyle/>
+          <a:p>
+            <a:r>
+              <a:rPr lang="it-IT" dirty="0" err="1"/>
+              <a:t>request_api</a:t>
+            </a:r>
+            <a:endParaRPr lang="it-IT" dirty="0"/>
+          </a:p>
+        </p:txBody>
+      </p:sp>
+      <p:sp>
+        <p:nvSpPr>
+          <p:cNvPr id="32" name="CasellaDiTesto 31">
+            <a:extLst>
+              <a:ext uri="{FF2B5EF4-FFF2-40B4-BE49-F238E27FC236}">
+                <a16:creationId xmlns:a16="http://schemas.microsoft.com/office/drawing/2014/main" id="{3EBD8A74-D572-1EAD-6EB2-8FA8B00303B7}"/>
+              </a:ext>
+            </a:extLst>
+          </p:cNvPr>
+          <p:cNvSpPr txBox="1"/>
+          <p:nvPr/>
+        </p:nvSpPr>
+        <p:spPr>
+          <a:xfrm>
+            <a:off x="6898437" y="4498678"/>
+            <a:ext cx="1152944" cy="369332"/>
+          </a:xfrm>
+          <a:prstGeom prst="rect">
+            <a:avLst/>
+          </a:prstGeom>
+          <a:noFill/>
+          <a:ln>
+            <a:solidFill>
+              <a:schemeClr val="tx1"/>
+            </a:solidFill>
+          </a:ln>
+        </p:spPr>
+        <p:txBody>
+          <a:bodyPr wrap="none" rtlCol="0">
+            <a:spAutoFit/>
+          </a:bodyPr>
+          <a:lstStyle/>
+          <a:p>
+            <a:r>
+              <a:rPr lang="it-IT" dirty="0"/>
+              <a:t>controller</a:t>
+            </a:r>
+          </a:p>
+        </p:txBody>
+      </p:sp>
+      <p:sp>
+        <p:nvSpPr>
+          <p:cNvPr id="33" name="CasellaDiTesto 32">
+            <a:extLst>
+              <a:ext uri="{FF2B5EF4-FFF2-40B4-BE49-F238E27FC236}">
+                <a16:creationId xmlns:a16="http://schemas.microsoft.com/office/drawing/2014/main" id="{09547FC5-D5E8-0602-58FD-88D214DEC97B}"/>
+              </a:ext>
+            </a:extLst>
+          </p:cNvPr>
+          <p:cNvSpPr txBox="1"/>
+          <p:nvPr/>
+        </p:nvSpPr>
+        <p:spPr>
+          <a:xfrm>
+            <a:off x="8531546" y="3269792"/>
+            <a:ext cx="1271567" cy="369332"/>
+          </a:xfrm>
+          <a:prstGeom prst="rect">
+            <a:avLst/>
+          </a:prstGeom>
+          <a:noFill/>
+          <a:ln>
+            <a:solidFill>
+              <a:schemeClr val="tx1"/>
+            </a:solidFill>
+          </a:ln>
+        </p:spPr>
+        <p:txBody>
+          <a:bodyPr wrap="none" rtlCol="0">
+            <a:spAutoFit/>
+          </a:bodyPr>
+          <a:lstStyle/>
+          <a:p>
+            <a:r>
+              <a:rPr lang="it-IT" dirty="0" err="1"/>
+              <a:t>solver_test</a:t>
+            </a:r>
+            <a:endParaRPr lang="it-IT" dirty="0"/>
+          </a:p>
+        </p:txBody>
+      </p:sp>
+      <p:sp>
+        <p:nvSpPr>
+          <p:cNvPr id="36" name="CasellaDiTesto 35">
+            <a:extLst>
+              <a:ext uri="{FF2B5EF4-FFF2-40B4-BE49-F238E27FC236}">
+                <a16:creationId xmlns:a16="http://schemas.microsoft.com/office/drawing/2014/main" id="{A53AAC8A-6568-9175-BCA5-6E5F25744B8B}"/>
+              </a:ext>
+            </a:extLst>
+          </p:cNvPr>
+          <p:cNvSpPr txBox="1"/>
+          <p:nvPr/>
+        </p:nvSpPr>
+        <p:spPr>
+          <a:xfrm>
+            <a:off x="4652551" y="4498678"/>
+            <a:ext cx="1892864" cy="369332"/>
+          </a:xfrm>
+          <a:prstGeom prst="rect">
+            <a:avLst/>
+          </a:prstGeom>
+          <a:noFill/>
+          <a:ln>
+            <a:solidFill>
+              <a:schemeClr val="tx1"/>
+            </a:solidFill>
+          </a:ln>
+        </p:spPr>
+        <p:txBody>
+          <a:bodyPr wrap="square" rtlCol="0">
+            <a:spAutoFit/>
+          </a:bodyPr>
+          <a:lstStyle/>
+          <a:p>
+            <a:pPr algn="ctr"/>
+            <a:r>
+              <a:rPr lang="it-IT" dirty="0" err="1"/>
+              <a:t>dispatcher</a:t>
+            </a:r>
+            <a:endParaRPr lang="it-IT" dirty="0"/>
+          </a:p>
+        </p:txBody>
+      </p:sp>
+      <p:sp>
+        <p:nvSpPr>
+          <p:cNvPr id="37" name="CasellaDiTesto 36">
+            <a:extLst>
+              <a:ext uri="{FF2B5EF4-FFF2-40B4-BE49-F238E27FC236}">
+                <a16:creationId xmlns:a16="http://schemas.microsoft.com/office/drawing/2014/main" id="{F7DAC56D-2D3C-B97F-2DC8-FDFDEDCC903E}"/>
+              </a:ext>
+            </a:extLst>
+          </p:cNvPr>
+          <p:cNvSpPr txBox="1"/>
+          <p:nvPr/>
+        </p:nvSpPr>
+        <p:spPr>
+          <a:xfrm>
+            <a:off x="2835122" y="5857712"/>
+            <a:ext cx="686406" cy="369332"/>
+          </a:xfrm>
+          <a:prstGeom prst="rect">
+            <a:avLst/>
+          </a:prstGeom>
+          <a:noFill/>
+          <a:ln>
+            <a:solidFill>
+              <a:schemeClr val="tx1"/>
+            </a:solidFill>
+          </a:ln>
+        </p:spPr>
+        <p:txBody>
+          <a:bodyPr wrap="none" rtlCol="0">
+            <a:spAutoFit/>
+          </a:bodyPr>
+          <a:lstStyle/>
+          <a:p>
+            <a:r>
+              <a:rPr lang="it-IT" dirty="0" err="1"/>
+              <a:t>main</a:t>
+            </a:r>
+            <a:endParaRPr lang="it-IT" dirty="0"/>
+          </a:p>
+        </p:txBody>
+      </p:sp>
+      <p:cxnSp>
+        <p:nvCxnSpPr>
+          <p:cNvPr id="39" name="Connettore a gomito 38">
+            <a:extLst>
+              <a:ext uri="{FF2B5EF4-FFF2-40B4-BE49-F238E27FC236}">
+                <a16:creationId xmlns:a16="http://schemas.microsoft.com/office/drawing/2014/main" id="{53BCC99C-21A6-1387-0D6C-DB51B7BE5E19}"/>
+              </a:ext>
+            </a:extLst>
+          </p:cNvPr>
+          <p:cNvCxnSpPr>
+            <a:cxnSpLocks/>
+            <a:stCxn id="6" idx="3"/>
+            <a:endCxn id="36" idx="1"/>
+          </p:cNvCxnSpPr>
+          <p:nvPr/>
+        </p:nvCxnSpPr>
+        <p:spPr>
+          <a:xfrm>
+            <a:off x="4046031" y="4072846"/>
+            <a:ext cx="606520" cy="610498"/>
+          </a:xfrm>
+          <a:prstGeom prst="bentConnector3">
+            <a:avLst>
+              <a:gd name="adj1" fmla="val 50000"/>
+            </a:avLst>
+          </a:prstGeom>
+          <a:ln>
+            <a:headEnd type="triangle"/>
+            <a:tailEnd type="triangle"/>
+          </a:ln>
+        </p:spPr>
+        <p:style>
+          <a:lnRef idx="2">
+            <a:schemeClr val="dk1"/>
+          </a:lnRef>
+          <a:fillRef idx="0">
+            <a:schemeClr val="dk1"/>
+          </a:fillRef>
+          <a:effectRef idx="1">
+            <a:schemeClr val="dk1"/>
+          </a:effectRef>
+          <a:fontRef idx="minor">
+            <a:schemeClr val="tx1"/>
+          </a:fontRef>
+        </p:style>
+      </p:cxnSp>
+      <p:cxnSp>
+        <p:nvCxnSpPr>
+          <p:cNvPr id="41" name="Connettore a gomito 40">
+            <a:extLst>
+              <a:ext uri="{FF2B5EF4-FFF2-40B4-BE49-F238E27FC236}">
+                <a16:creationId xmlns:a16="http://schemas.microsoft.com/office/drawing/2014/main" id="{B7C1C2E8-ECE0-3EBB-D3F0-10CA6A45C493}"/>
+              </a:ext>
+            </a:extLst>
+          </p:cNvPr>
+          <p:cNvCxnSpPr>
+            <a:cxnSpLocks/>
+            <a:stCxn id="10" idx="3"/>
+            <a:endCxn id="36" idx="1"/>
+          </p:cNvCxnSpPr>
+          <p:nvPr/>
+        </p:nvCxnSpPr>
+        <p:spPr>
+          <a:xfrm flipV="1">
+            <a:off x="4085785" y="4683344"/>
+            <a:ext cx="566766" cy="374268"/>
+          </a:xfrm>
+          <a:prstGeom prst="bentConnector3">
+            <a:avLst>
+              <a:gd name="adj1" fmla="val 46333"/>
+            </a:avLst>
+          </a:prstGeom>
+          <a:ln>
+            <a:headEnd type="triangle"/>
+            <a:tailEnd type="triangle"/>
+          </a:ln>
+        </p:spPr>
+        <p:style>
+          <a:lnRef idx="2">
+            <a:schemeClr val="dk1"/>
+          </a:lnRef>
+          <a:fillRef idx="0">
+            <a:schemeClr val="dk1"/>
+          </a:fillRef>
+          <a:effectRef idx="1">
+            <a:schemeClr val="dk1"/>
+          </a:effectRef>
+          <a:fontRef idx="minor">
+            <a:schemeClr val="tx1"/>
+          </a:fontRef>
+        </p:style>
+      </p:cxnSp>
+      <p:cxnSp>
+        <p:nvCxnSpPr>
+          <p:cNvPr id="48" name="Connettore 2 47">
+            <a:extLst>
+              <a:ext uri="{FF2B5EF4-FFF2-40B4-BE49-F238E27FC236}">
+                <a16:creationId xmlns:a16="http://schemas.microsoft.com/office/drawing/2014/main" id="{4134EA2D-0E7B-4B36-DAF5-8829EF103897}"/>
+              </a:ext>
+            </a:extLst>
+          </p:cNvPr>
+          <p:cNvCxnSpPr>
+            <a:stCxn id="37" idx="0"/>
+            <a:endCxn id="10" idx="2"/>
+          </p:cNvCxnSpPr>
+          <p:nvPr/>
+        </p:nvCxnSpPr>
+        <p:spPr>
+          <a:xfrm flipV="1">
+            <a:off x="3178325" y="5242278"/>
+            <a:ext cx="0" cy="615434"/>
+          </a:xfrm>
+          <a:prstGeom prst="straightConnector1">
+            <a:avLst/>
+          </a:prstGeom>
+          <a:ln>
+            <a:headEnd type="triangle"/>
+            <a:tailEnd type="triangle"/>
+          </a:ln>
+        </p:spPr>
+        <p:style>
+          <a:lnRef idx="2">
+            <a:schemeClr val="dk1"/>
+          </a:lnRef>
+          <a:fillRef idx="0">
+            <a:schemeClr val="dk1"/>
+          </a:fillRef>
+          <a:effectRef idx="1">
+            <a:schemeClr val="dk1"/>
+          </a:effectRef>
+          <a:fontRef idx="minor">
+            <a:schemeClr val="tx1"/>
+          </a:fontRef>
+        </p:style>
+      </p:cxnSp>
+      <p:cxnSp>
+        <p:nvCxnSpPr>
+          <p:cNvPr id="60" name="Connettore a gomito 59">
+            <a:extLst>
+              <a:ext uri="{FF2B5EF4-FFF2-40B4-BE49-F238E27FC236}">
+                <a16:creationId xmlns:a16="http://schemas.microsoft.com/office/drawing/2014/main" id="{5743FB44-8AE5-C908-25DF-514BE73EC78B}"/>
+              </a:ext>
+            </a:extLst>
+          </p:cNvPr>
+          <p:cNvCxnSpPr>
+            <a:stCxn id="22" idx="2"/>
+            <a:endCxn id="36" idx="0"/>
+          </p:cNvCxnSpPr>
+          <p:nvPr/>
+        </p:nvCxnSpPr>
+        <p:spPr>
+          <a:xfrm rot="5400000">
+            <a:off x="5633731" y="3853432"/>
+            <a:ext cx="610498" cy="679994"/>
+          </a:xfrm>
+          <a:prstGeom prst="bentConnector3">
+            <a:avLst/>
+          </a:prstGeom>
+          <a:ln>
+            <a:tailEnd type="triangle"/>
+          </a:ln>
+        </p:spPr>
+        <p:style>
+          <a:lnRef idx="2">
+            <a:schemeClr val="dk1"/>
+          </a:lnRef>
+          <a:fillRef idx="0">
+            <a:schemeClr val="dk1"/>
+          </a:fillRef>
+          <a:effectRef idx="1">
+            <a:schemeClr val="dk1"/>
+          </a:effectRef>
+          <a:fontRef idx="minor">
+            <a:schemeClr val="tx1"/>
+          </a:fontRef>
+        </p:style>
+      </p:cxnSp>
+      <p:cxnSp>
+        <p:nvCxnSpPr>
+          <p:cNvPr id="62" name="Connettore a gomito 61">
+            <a:extLst>
+              <a:ext uri="{FF2B5EF4-FFF2-40B4-BE49-F238E27FC236}">
+                <a16:creationId xmlns:a16="http://schemas.microsoft.com/office/drawing/2014/main" id="{4497F7E6-56CA-11F9-2D4F-5BA78618FD40}"/>
+              </a:ext>
+            </a:extLst>
+          </p:cNvPr>
+          <p:cNvCxnSpPr>
+            <a:stCxn id="12" idx="2"/>
+            <a:endCxn id="36" idx="0"/>
+          </p:cNvCxnSpPr>
+          <p:nvPr/>
+        </p:nvCxnSpPr>
+        <p:spPr>
+          <a:xfrm rot="16200000" flipH="1">
+            <a:off x="4900140" y="3799835"/>
+            <a:ext cx="600060" cy="797625"/>
+          </a:xfrm>
+          <a:prstGeom prst="bentConnector3">
+            <a:avLst>
+              <a:gd name="adj1" fmla="val 48942"/>
+            </a:avLst>
+          </a:prstGeom>
+          <a:ln>
+            <a:tailEnd type="triangle"/>
+          </a:ln>
+        </p:spPr>
+        <p:style>
+          <a:lnRef idx="2">
+            <a:schemeClr val="dk1"/>
+          </a:lnRef>
+          <a:fillRef idx="0">
+            <a:schemeClr val="dk1"/>
+          </a:fillRef>
+          <a:effectRef idx="1">
+            <a:schemeClr val="dk1"/>
+          </a:effectRef>
+          <a:fontRef idx="minor">
+            <a:schemeClr val="tx1"/>
+          </a:fontRef>
+        </p:style>
+      </p:cxnSp>
+      <p:cxnSp>
+        <p:nvCxnSpPr>
+          <p:cNvPr id="66" name="Connettore 2 65">
+            <a:extLst>
+              <a:ext uri="{FF2B5EF4-FFF2-40B4-BE49-F238E27FC236}">
+                <a16:creationId xmlns:a16="http://schemas.microsoft.com/office/drawing/2014/main" id="{4A3963E7-823E-7D09-BEB9-93AD83B310EC}"/>
+              </a:ext>
+            </a:extLst>
+          </p:cNvPr>
+          <p:cNvCxnSpPr>
+            <a:cxnSpLocks/>
+            <a:stCxn id="36" idx="3"/>
+            <a:endCxn id="32" idx="1"/>
+          </p:cNvCxnSpPr>
+          <p:nvPr/>
+        </p:nvCxnSpPr>
+        <p:spPr>
+          <a:xfrm>
+            <a:off x="6545415" y="4683344"/>
+            <a:ext cx="353022" cy="0"/>
+          </a:xfrm>
+          <a:prstGeom prst="straightConnector1">
+            <a:avLst/>
+          </a:prstGeom>
+          <a:ln>
+            <a:headEnd type="triangle"/>
+            <a:tailEnd type="triangle"/>
+          </a:ln>
+        </p:spPr>
+        <p:style>
+          <a:lnRef idx="2">
+            <a:schemeClr val="dk1"/>
+          </a:lnRef>
+          <a:fillRef idx="0">
+            <a:schemeClr val="dk1"/>
+          </a:fillRef>
+          <a:effectRef idx="1">
+            <a:schemeClr val="dk1"/>
+          </a:effectRef>
+          <a:fontRef idx="minor">
+            <a:schemeClr val="tx1"/>
+          </a:fontRef>
+        </p:style>
+      </p:cxnSp>
+      <p:cxnSp>
+        <p:nvCxnSpPr>
+          <p:cNvPr id="70" name="Connettore 2 69">
+            <a:extLst>
+              <a:ext uri="{FF2B5EF4-FFF2-40B4-BE49-F238E27FC236}">
+                <a16:creationId xmlns:a16="http://schemas.microsoft.com/office/drawing/2014/main" id="{134870A4-F12D-9408-4585-6C321E6D7D82}"/>
+              </a:ext>
+            </a:extLst>
+          </p:cNvPr>
+          <p:cNvCxnSpPr>
+            <a:cxnSpLocks/>
+            <a:stCxn id="32" idx="3"/>
+            <a:endCxn id="74" idx="1"/>
+          </p:cNvCxnSpPr>
+          <p:nvPr/>
+        </p:nvCxnSpPr>
+        <p:spPr>
+          <a:xfrm>
+            <a:off x="8051381" y="4683344"/>
+            <a:ext cx="386898" cy="0"/>
+          </a:xfrm>
+          <a:prstGeom prst="straightConnector1">
+            <a:avLst/>
+          </a:prstGeom>
+          <a:ln>
+            <a:headEnd type="triangle"/>
+            <a:tailEnd type="triangle"/>
+          </a:ln>
+        </p:spPr>
+        <p:style>
+          <a:lnRef idx="2">
+            <a:schemeClr val="dk1"/>
+          </a:lnRef>
+          <a:fillRef idx="0">
+            <a:schemeClr val="dk1"/>
+          </a:fillRef>
+          <a:effectRef idx="1">
+            <a:schemeClr val="dk1"/>
+          </a:effectRef>
+          <a:fontRef idx="minor">
+            <a:schemeClr val="tx1"/>
+          </a:fontRef>
+        </p:style>
+      </p:cxnSp>
+      <p:sp>
+        <p:nvSpPr>
+          <p:cNvPr id="73" name="CasellaDiTesto 72">
+            <a:extLst>
+              <a:ext uri="{FF2B5EF4-FFF2-40B4-BE49-F238E27FC236}">
+                <a16:creationId xmlns:a16="http://schemas.microsoft.com/office/drawing/2014/main" id="{DB71A6FC-C92C-59F3-D69A-D2EEC97FBF88}"/>
+              </a:ext>
+            </a:extLst>
+          </p:cNvPr>
+          <p:cNvSpPr txBox="1"/>
+          <p:nvPr/>
+        </p:nvSpPr>
+        <p:spPr>
+          <a:xfrm>
+            <a:off x="10388434" y="3298935"/>
+            <a:ext cx="566886" cy="369332"/>
+          </a:xfrm>
+          <a:prstGeom prst="rect">
+            <a:avLst/>
+          </a:prstGeom>
+          <a:noFill/>
+          <a:ln>
+            <a:solidFill>
+              <a:schemeClr val="tx1"/>
+            </a:solidFill>
+          </a:ln>
+        </p:spPr>
+        <p:txBody>
+          <a:bodyPr wrap="none" rtlCol="0">
+            <a:spAutoFit/>
+          </a:bodyPr>
+          <a:lstStyle/>
+          <a:p>
+            <a:r>
+              <a:rPr lang="it-IT" dirty="0"/>
+              <a:t>test</a:t>
+            </a:r>
+          </a:p>
+        </p:txBody>
+      </p:sp>
+      <p:sp>
+        <p:nvSpPr>
+          <p:cNvPr id="74" name="Rettangolo 73">
+            <a:extLst>
+              <a:ext uri="{FF2B5EF4-FFF2-40B4-BE49-F238E27FC236}">
+                <a16:creationId xmlns:a16="http://schemas.microsoft.com/office/drawing/2014/main" id="{DB0A6061-13E0-9395-7A23-F468537EDB23}"/>
+              </a:ext>
+            </a:extLst>
+          </p:cNvPr>
+          <p:cNvSpPr/>
+          <p:nvPr/>
+        </p:nvSpPr>
+        <p:spPr>
+          <a:xfrm>
+            <a:off x="8438279" y="3124707"/>
+            <a:ext cx="1467941" cy="3117273"/>
+          </a:xfrm>
+          <a:custGeom>
+            <a:avLst/>
+            <a:gdLst>
+              <a:gd name="connsiteX0" fmla="*/ 0 w 1467941"/>
+              <a:gd name="connsiteY0" fmla="*/ 0 h 3117273"/>
+              <a:gd name="connsiteX1" fmla="*/ 474634 w 1467941"/>
+              <a:gd name="connsiteY1" fmla="*/ 0 h 3117273"/>
+              <a:gd name="connsiteX2" fmla="*/ 919910 w 1467941"/>
+              <a:gd name="connsiteY2" fmla="*/ 0 h 3117273"/>
+              <a:gd name="connsiteX3" fmla="*/ 1467941 w 1467941"/>
+              <a:gd name="connsiteY3" fmla="*/ 0 h 3117273"/>
+              <a:gd name="connsiteX4" fmla="*/ 1467941 w 1467941"/>
+              <a:gd name="connsiteY4" fmla="*/ 488373 h 3117273"/>
+              <a:gd name="connsiteX5" fmla="*/ 1467941 w 1467941"/>
+              <a:gd name="connsiteY5" fmla="*/ 945573 h 3117273"/>
+              <a:gd name="connsiteX6" fmla="*/ 1467941 w 1467941"/>
+              <a:gd name="connsiteY6" fmla="*/ 1402773 h 3117273"/>
+              <a:gd name="connsiteX7" fmla="*/ 1467941 w 1467941"/>
+              <a:gd name="connsiteY7" fmla="*/ 1922318 h 3117273"/>
+              <a:gd name="connsiteX8" fmla="*/ 1467941 w 1467941"/>
+              <a:gd name="connsiteY8" fmla="*/ 2441864 h 3117273"/>
+              <a:gd name="connsiteX9" fmla="*/ 1467941 w 1467941"/>
+              <a:gd name="connsiteY9" fmla="*/ 3117273 h 3117273"/>
+              <a:gd name="connsiteX10" fmla="*/ 1007986 w 1467941"/>
+              <a:gd name="connsiteY10" fmla="*/ 3117273 h 3117273"/>
+              <a:gd name="connsiteX11" fmla="*/ 518672 w 1467941"/>
+              <a:gd name="connsiteY11" fmla="*/ 3117273 h 3117273"/>
+              <a:gd name="connsiteX12" fmla="*/ 0 w 1467941"/>
+              <a:gd name="connsiteY12" fmla="*/ 3117273 h 3117273"/>
+              <a:gd name="connsiteX13" fmla="*/ 0 w 1467941"/>
+              <a:gd name="connsiteY13" fmla="*/ 2535382 h 3117273"/>
+              <a:gd name="connsiteX14" fmla="*/ 0 w 1467941"/>
+              <a:gd name="connsiteY14" fmla="*/ 1953491 h 3117273"/>
+              <a:gd name="connsiteX15" fmla="*/ 0 w 1467941"/>
+              <a:gd name="connsiteY15" fmla="*/ 1371600 h 3117273"/>
+              <a:gd name="connsiteX16" fmla="*/ 0 w 1467941"/>
+              <a:gd name="connsiteY16" fmla="*/ 852055 h 3117273"/>
+              <a:gd name="connsiteX17" fmla="*/ 0 w 1467941"/>
+              <a:gd name="connsiteY17" fmla="*/ 0 h 3117273"/>
+            </a:gdLst>
+            <a:ahLst/>
+            <a:cxnLst>
+              <a:cxn ang="0">
+                <a:pos x="connsiteX0" y="connsiteY0"/>
+              </a:cxn>
+              <a:cxn ang="0">
+                <a:pos x="connsiteX1" y="connsiteY1"/>
+              </a:cxn>
+              <a:cxn ang="0">
+                <a:pos x="connsiteX2" y="connsiteY2"/>
+              </a:cxn>
+              <a:cxn ang="0">
+                <a:pos x="connsiteX3" y="connsiteY3"/>
+              </a:cxn>
+              <a:cxn ang="0">
+                <a:pos x="connsiteX4" y="connsiteY4"/>
+              </a:cxn>
+              <a:cxn ang="0">
+                <a:pos x="connsiteX5" y="connsiteY5"/>
+              </a:cxn>
+              <a:cxn ang="0">
+                <a:pos x="connsiteX6" y="connsiteY6"/>
+              </a:cxn>
+              <a:cxn ang="0">
+                <a:pos x="connsiteX7" y="connsiteY7"/>
+              </a:cxn>
+              <a:cxn ang="0">
+                <a:pos x="connsiteX8" y="connsiteY8"/>
+              </a:cxn>
+              <a:cxn ang="0">
+                <a:pos x="connsiteX9" y="connsiteY9"/>
+              </a:cxn>
+              <a:cxn ang="0">
+                <a:pos x="connsiteX10" y="connsiteY10"/>
+              </a:cxn>
+              <a:cxn ang="0">
+                <a:pos x="connsiteX11" y="connsiteY11"/>
+              </a:cxn>
+              <a:cxn ang="0">
+                <a:pos x="connsiteX12" y="connsiteY12"/>
+              </a:cxn>
+              <a:cxn ang="0">
+                <a:pos x="connsiteX13" y="connsiteY13"/>
+              </a:cxn>
+              <a:cxn ang="0">
+                <a:pos x="connsiteX14" y="connsiteY14"/>
+              </a:cxn>
+              <a:cxn ang="0">
+                <a:pos x="connsiteX15" y="connsiteY15"/>
+              </a:cxn>
+              <a:cxn ang="0">
+                <a:pos x="connsiteX16" y="connsiteY16"/>
+              </a:cxn>
+              <a:cxn ang="0">
+                <a:pos x="connsiteX17" y="connsiteY17"/>
+              </a:cxn>
+            </a:cxnLst>
+            <a:rect l="l" t="t" r="r" b="b"/>
+            <a:pathLst>
+              <a:path w="1467941" h="3117273" extrusionOk="0">
+                <a:moveTo>
+                  <a:pt x="0" y="0"/>
+                </a:moveTo>
+                <a:cubicBezTo>
+                  <a:pt x="211877" y="-52386"/>
+                  <a:pt x="307341" y="18973"/>
+                  <a:pt x="474634" y="0"/>
+                </a:cubicBezTo>
+                <a:cubicBezTo>
+                  <a:pt x="641927" y="-18973"/>
+                  <a:pt x="759383" y="51385"/>
+                  <a:pt x="919910" y="0"/>
+                </a:cubicBezTo>
+                <a:cubicBezTo>
+                  <a:pt x="1080437" y="-51385"/>
+                  <a:pt x="1249433" y="39903"/>
+                  <a:pt x="1467941" y="0"/>
+                </a:cubicBezTo>
+                <a:cubicBezTo>
+                  <a:pt x="1502799" y="100769"/>
+                  <a:pt x="1454178" y="354173"/>
+                  <a:pt x="1467941" y="488373"/>
+                </a:cubicBezTo>
+                <a:cubicBezTo>
+                  <a:pt x="1481704" y="622573"/>
+                  <a:pt x="1450797" y="735245"/>
+                  <a:pt x="1467941" y="945573"/>
+                </a:cubicBezTo>
+                <a:cubicBezTo>
+                  <a:pt x="1485085" y="1155901"/>
+                  <a:pt x="1416204" y="1205883"/>
+                  <a:pt x="1467941" y="1402773"/>
+                </a:cubicBezTo>
+                <a:cubicBezTo>
+                  <a:pt x="1519678" y="1599663"/>
+                  <a:pt x="1438947" y="1697085"/>
+                  <a:pt x="1467941" y="1922318"/>
+                </a:cubicBezTo>
+                <a:cubicBezTo>
+                  <a:pt x="1496935" y="2147551"/>
+                  <a:pt x="1412868" y="2206899"/>
+                  <a:pt x="1467941" y="2441864"/>
+                </a:cubicBezTo>
+                <a:cubicBezTo>
+                  <a:pt x="1523014" y="2676829"/>
+                  <a:pt x="1404538" y="2949407"/>
+                  <a:pt x="1467941" y="3117273"/>
+                </a:cubicBezTo>
+                <a:cubicBezTo>
+                  <a:pt x="1253318" y="3119792"/>
+                  <a:pt x="1208377" y="3092330"/>
+                  <a:pt x="1007986" y="3117273"/>
+                </a:cubicBezTo>
+                <a:cubicBezTo>
+                  <a:pt x="807595" y="3142216"/>
+                  <a:pt x="629148" y="3113570"/>
+                  <a:pt x="518672" y="3117273"/>
+                </a:cubicBezTo>
+                <a:cubicBezTo>
+                  <a:pt x="408196" y="3120976"/>
+                  <a:pt x="250709" y="3086378"/>
+                  <a:pt x="0" y="3117273"/>
+                </a:cubicBezTo>
+                <a:cubicBezTo>
+                  <a:pt x="-31990" y="2867740"/>
+                  <a:pt x="57248" y="2701683"/>
+                  <a:pt x="0" y="2535382"/>
+                </a:cubicBezTo>
+                <a:cubicBezTo>
+                  <a:pt x="-57248" y="2369081"/>
+                  <a:pt x="52870" y="2105598"/>
+                  <a:pt x="0" y="1953491"/>
+                </a:cubicBezTo>
+                <a:cubicBezTo>
+                  <a:pt x="-52870" y="1801384"/>
+                  <a:pt x="53612" y="1621815"/>
+                  <a:pt x="0" y="1371600"/>
+                </a:cubicBezTo>
+                <a:cubicBezTo>
+                  <a:pt x="-53612" y="1121385"/>
+                  <a:pt x="29" y="968717"/>
+                  <a:pt x="0" y="852055"/>
+                </a:cubicBezTo>
+                <a:cubicBezTo>
+                  <a:pt x="-29" y="735394"/>
+                  <a:pt x="35022" y="185476"/>
+                  <a:pt x="0" y="0"/>
+                </a:cubicBezTo>
+                <a:close/>
+              </a:path>
+            </a:pathLst>
+          </a:custGeom>
+          <a:noFill/>
+          <a:ln>
+            <a:extLst>
+              <a:ext uri="{C807C97D-BFC1-408E-A445-0C87EB9F89A2}">
+                <ask:lineSketchStyleProps xmlns:ask="http://schemas.microsoft.com/office/drawing/2018/sketchyshapes" sd="1219033472">
+                  <a:prstGeom prst="rect">
+                    <a:avLst/>
+                  </a:prstGeom>
+                  <ask:type>
+                    <ask:lineSketchScribble/>
+                  </ask:type>
+                </ask:lineSketchStyleProps>
+              </a:ext>
+            </a:extLst>
+          </a:ln>
+        </p:spPr>
+        <p:style>
+          <a:lnRef idx="2">
+            <a:schemeClr val="accent1">
+              <a:shade val="15000"/>
+            </a:schemeClr>
+          </a:lnRef>
+          <a:fillRef idx="1">
+            <a:schemeClr val="accent1"/>
+          </a:fillRef>
+          <a:effectRef idx="0">
+            <a:schemeClr val="accent1"/>
+          </a:effectRef>
+          <a:fontRef idx="minor">
+            <a:schemeClr val="lt1"/>
+          </a:fontRef>
+        </p:style>
+        <p:txBody>
+          <a:bodyPr rtlCol="0" anchor="ctr"/>
+          <a:lstStyle/>
+          <a:p>
+            <a:pPr algn="ctr"/>
+            <a:endParaRPr lang="it-IT"/>
+          </a:p>
+        </p:txBody>
+      </p:sp>
+      <p:sp>
+        <p:nvSpPr>
+          <p:cNvPr id="76" name="CasellaDiTesto 75">
+            <a:extLst>
+              <a:ext uri="{FF2B5EF4-FFF2-40B4-BE49-F238E27FC236}">
+                <a16:creationId xmlns:a16="http://schemas.microsoft.com/office/drawing/2014/main" id="{2D3C53E5-1F12-5852-CBC4-D5BD11E071C0}"/>
+              </a:ext>
+            </a:extLst>
+          </p:cNvPr>
+          <p:cNvSpPr txBox="1"/>
+          <p:nvPr/>
+        </p:nvSpPr>
+        <p:spPr>
+          <a:xfrm>
+            <a:off x="8695843" y="2765347"/>
+            <a:ext cx="942975" cy="369332"/>
+          </a:xfrm>
+          <a:prstGeom prst="rect">
+            <a:avLst/>
+          </a:prstGeom>
+          <a:noFill/>
+        </p:spPr>
+        <p:txBody>
+          <a:bodyPr wrap="square">
+            <a:spAutoFit/>
+          </a:bodyPr>
+          <a:lstStyle/>
+          <a:p>
+            <a:r>
+              <a:rPr lang="it-IT" b="1" dirty="0" err="1"/>
+              <a:t>solvers</a:t>
+            </a:r>
+            <a:endParaRPr lang="it-IT" b="1" dirty="0"/>
+          </a:p>
+        </p:txBody>
+      </p:sp>
+      <p:sp>
+        <p:nvSpPr>
+          <p:cNvPr id="79" name="Rettangolo 78">
+            <a:extLst>
+              <a:ext uri="{FF2B5EF4-FFF2-40B4-BE49-F238E27FC236}">
+                <a16:creationId xmlns:a16="http://schemas.microsoft.com/office/drawing/2014/main" id="{5635BDEE-63BC-CED8-101C-766F0C076F5D}"/>
+              </a:ext>
+            </a:extLst>
+          </p:cNvPr>
+          <p:cNvSpPr/>
+          <p:nvPr/>
+        </p:nvSpPr>
+        <p:spPr>
+          <a:xfrm>
+            <a:off x="10222388" y="3124707"/>
+            <a:ext cx="1827750" cy="3117273"/>
+          </a:xfrm>
+          <a:custGeom>
+            <a:avLst/>
+            <a:gdLst>
+              <a:gd name="connsiteX0" fmla="*/ 0 w 1827750"/>
+              <a:gd name="connsiteY0" fmla="*/ 0 h 3117273"/>
+              <a:gd name="connsiteX1" fmla="*/ 438660 w 1827750"/>
+              <a:gd name="connsiteY1" fmla="*/ 0 h 3117273"/>
+              <a:gd name="connsiteX2" fmla="*/ 840765 w 1827750"/>
+              <a:gd name="connsiteY2" fmla="*/ 0 h 3117273"/>
+              <a:gd name="connsiteX3" fmla="*/ 1334258 w 1827750"/>
+              <a:gd name="connsiteY3" fmla="*/ 0 h 3117273"/>
+              <a:gd name="connsiteX4" fmla="*/ 1827750 w 1827750"/>
+              <a:gd name="connsiteY4" fmla="*/ 0 h 3117273"/>
+              <a:gd name="connsiteX5" fmla="*/ 1827750 w 1827750"/>
+              <a:gd name="connsiteY5" fmla="*/ 488373 h 3117273"/>
+              <a:gd name="connsiteX6" fmla="*/ 1827750 w 1827750"/>
+              <a:gd name="connsiteY6" fmla="*/ 945573 h 3117273"/>
+              <a:gd name="connsiteX7" fmla="*/ 1827750 w 1827750"/>
+              <a:gd name="connsiteY7" fmla="*/ 1465118 h 3117273"/>
+              <a:gd name="connsiteX8" fmla="*/ 1827750 w 1827750"/>
+              <a:gd name="connsiteY8" fmla="*/ 1984664 h 3117273"/>
+              <a:gd name="connsiteX9" fmla="*/ 1827750 w 1827750"/>
+              <a:gd name="connsiteY9" fmla="*/ 2441864 h 3117273"/>
+              <a:gd name="connsiteX10" fmla="*/ 1827750 w 1827750"/>
+              <a:gd name="connsiteY10" fmla="*/ 3117273 h 3117273"/>
+              <a:gd name="connsiteX11" fmla="*/ 1370813 w 1827750"/>
+              <a:gd name="connsiteY11" fmla="*/ 3117273 h 3117273"/>
+              <a:gd name="connsiteX12" fmla="*/ 932153 w 1827750"/>
+              <a:gd name="connsiteY12" fmla="*/ 3117273 h 3117273"/>
+              <a:gd name="connsiteX13" fmla="*/ 438660 w 1827750"/>
+              <a:gd name="connsiteY13" fmla="*/ 3117273 h 3117273"/>
+              <a:gd name="connsiteX14" fmla="*/ 0 w 1827750"/>
+              <a:gd name="connsiteY14" fmla="*/ 3117273 h 3117273"/>
+              <a:gd name="connsiteX15" fmla="*/ 0 w 1827750"/>
+              <a:gd name="connsiteY15" fmla="*/ 2660073 h 3117273"/>
+              <a:gd name="connsiteX16" fmla="*/ 0 w 1827750"/>
+              <a:gd name="connsiteY16" fmla="*/ 2140527 h 3117273"/>
+              <a:gd name="connsiteX17" fmla="*/ 0 w 1827750"/>
+              <a:gd name="connsiteY17" fmla="*/ 1652155 h 3117273"/>
+              <a:gd name="connsiteX18" fmla="*/ 0 w 1827750"/>
+              <a:gd name="connsiteY18" fmla="*/ 1226127 h 3117273"/>
+              <a:gd name="connsiteX19" fmla="*/ 0 w 1827750"/>
+              <a:gd name="connsiteY19" fmla="*/ 768927 h 3117273"/>
+              <a:gd name="connsiteX20" fmla="*/ 0 w 1827750"/>
+              <a:gd name="connsiteY20" fmla="*/ 0 h 3117273"/>
+            </a:gdLst>
+            <a:ahLst/>
+            <a:cxnLst>
+              <a:cxn ang="0">
+                <a:pos x="connsiteX0" y="connsiteY0"/>
+              </a:cxn>
+              <a:cxn ang="0">
+                <a:pos x="connsiteX1" y="connsiteY1"/>
+              </a:cxn>
+              <a:cxn ang="0">
+                <a:pos x="connsiteX2" y="connsiteY2"/>
+              </a:cxn>
+              <a:cxn ang="0">
+                <a:pos x="connsiteX3" y="connsiteY3"/>
+              </a:cxn>
+              <a:cxn ang="0">
+                <a:pos x="connsiteX4" y="connsiteY4"/>
+              </a:cxn>
+              <a:cxn ang="0">
+                <a:pos x="connsiteX5" y="connsiteY5"/>
+              </a:cxn>
+              <a:cxn ang="0">
+                <a:pos x="connsiteX6" y="connsiteY6"/>
+              </a:cxn>
+              <a:cxn ang="0">
+                <a:pos x="connsiteX7" y="connsiteY7"/>
+              </a:cxn>
+              <a:cxn ang="0">
+                <a:pos x="connsiteX8" y="connsiteY8"/>
+              </a:cxn>
+              <a:cxn ang="0">
+                <a:pos x="connsiteX9" y="connsiteY9"/>
+              </a:cxn>
+              <a:cxn ang="0">
+                <a:pos x="connsiteX10" y="connsiteY10"/>
+              </a:cxn>
+              <a:cxn ang="0">
+                <a:pos x="connsiteX11" y="connsiteY11"/>
+              </a:cxn>
+              <a:cxn ang="0">
+                <a:pos x="connsiteX12" y="connsiteY12"/>
+              </a:cxn>
+              <a:cxn ang="0">
+                <a:pos x="connsiteX13" y="connsiteY13"/>
+              </a:cxn>
+              <a:cxn ang="0">
+                <a:pos x="connsiteX14" y="connsiteY14"/>
+              </a:cxn>
+              <a:cxn ang="0">
+                <a:pos x="connsiteX15" y="connsiteY15"/>
+              </a:cxn>
+              <a:cxn ang="0">
+                <a:pos x="connsiteX16" y="connsiteY16"/>
+              </a:cxn>
+              <a:cxn ang="0">
+                <a:pos x="connsiteX17" y="connsiteY17"/>
+              </a:cxn>
+              <a:cxn ang="0">
+                <a:pos x="connsiteX18" y="connsiteY18"/>
+              </a:cxn>
+              <a:cxn ang="0">
+                <a:pos x="connsiteX19" y="connsiteY19"/>
+              </a:cxn>
+              <a:cxn ang="0">
+                <a:pos x="connsiteX20" y="connsiteY20"/>
+              </a:cxn>
+            </a:cxnLst>
+            <a:rect l="l" t="t" r="r" b="b"/>
+            <a:pathLst>
+              <a:path w="1827750" h="3117273" extrusionOk="0">
+                <a:moveTo>
+                  <a:pt x="0" y="0"/>
+                </a:moveTo>
+                <a:cubicBezTo>
+                  <a:pt x="146258" y="-29137"/>
+                  <a:pt x="292439" y="13717"/>
+                  <a:pt x="438660" y="0"/>
+                </a:cubicBezTo>
+                <a:cubicBezTo>
+                  <a:pt x="584881" y="-13717"/>
+                  <a:pt x="640501" y="3961"/>
+                  <a:pt x="840765" y="0"/>
+                </a:cubicBezTo>
+                <a:cubicBezTo>
+                  <a:pt x="1041030" y="-3961"/>
+                  <a:pt x="1125334" y="44417"/>
+                  <a:pt x="1334258" y="0"/>
+                </a:cubicBezTo>
+                <a:cubicBezTo>
+                  <a:pt x="1543182" y="-44417"/>
+                  <a:pt x="1636731" y="30386"/>
+                  <a:pt x="1827750" y="0"/>
+                </a:cubicBezTo>
+                <a:cubicBezTo>
+                  <a:pt x="1835214" y="133769"/>
+                  <a:pt x="1804973" y="362110"/>
+                  <a:pt x="1827750" y="488373"/>
+                </a:cubicBezTo>
+                <a:cubicBezTo>
+                  <a:pt x="1850527" y="614636"/>
+                  <a:pt x="1776013" y="748683"/>
+                  <a:pt x="1827750" y="945573"/>
+                </a:cubicBezTo>
+                <a:cubicBezTo>
+                  <a:pt x="1879487" y="1142463"/>
+                  <a:pt x="1798756" y="1239885"/>
+                  <a:pt x="1827750" y="1465118"/>
+                </a:cubicBezTo>
+                <a:cubicBezTo>
+                  <a:pt x="1856744" y="1690351"/>
+                  <a:pt x="1772677" y="1749699"/>
+                  <a:pt x="1827750" y="1984664"/>
+                </a:cubicBezTo>
+                <a:cubicBezTo>
+                  <a:pt x="1882823" y="2219629"/>
+                  <a:pt x="1785882" y="2239993"/>
+                  <a:pt x="1827750" y="2441864"/>
+                </a:cubicBezTo>
+                <a:cubicBezTo>
+                  <a:pt x="1869618" y="2643735"/>
+                  <a:pt x="1824243" y="2833449"/>
+                  <a:pt x="1827750" y="3117273"/>
+                </a:cubicBezTo>
+                <a:cubicBezTo>
+                  <a:pt x="1672735" y="3146203"/>
+                  <a:pt x="1462841" y="3064954"/>
+                  <a:pt x="1370813" y="3117273"/>
+                </a:cubicBezTo>
+                <a:cubicBezTo>
+                  <a:pt x="1278785" y="3169592"/>
+                  <a:pt x="1135052" y="3072568"/>
+                  <a:pt x="932153" y="3117273"/>
+                </a:cubicBezTo>
+                <a:cubicBezTo>
+                  <a:pt x="729254" y="3161978"/>
+                  <a:pt x="640642" y="3103726"/>
+                  <a:pt x="438660" y="3117273"/>
+                </a:cubicBezTo>
+                <a:cubicBezTo>
+                  <a:pt x="236678" y="3130820"/>
+                  <a:pt x="157665" y="3101301"/>
+                  <a:pt x="0" y="3117273"/>
+                </a:cubicBezTo>
+                <a:cubicBezTo>
+                  <a:pt x="-25261" y="2956228"/>
+                  <a:pt x="34240" y="2876772"/>
+                  <a:pt x="0" y="2660073"/>
+                </a:cubicBezTo>
+                <a:cubicBezTo>
+                  <a:pt x="-34240" y="2443374"/>
+                  <a:pt x="60107" y="2258438"/>
+                  <a:pt x="0" y="2140527"/>
+                </a:cubicBezTo>
+                <a:cubicBezTo>
+                  <a:pt x="-60107" y="2022616"/>
+                  <a:pt x="57803" y="1765393"/>
+                  <a:pt x="0" y="1652155"/>
+                </a:cubicBezTo>
+                <a:cubicBezTo>
+                  <a:pt x="-57803" y="1538917"/>
+                  <a:pt x="9696" y="1438641"/>
+                  <a:pt x="0" y="1226127"/>
+                </a:cubicBezTo>
+                <a:cubicBezTo>
+                  <a:pt x="-9696" y="1013613"/>
+                  <a:pt x="48673" y="966617"/>
+                  <a:pt x="0" y="768927"/>
+                </a:cubicBezTo>
+                <a:cubicBezTo>
+                  <a:pt x="-48673" y="571237"/>
+                  <a:pt x="89471" y="322221"/>
+                  <a:pt x="0" y="0"/>
+                </a:cubicBezTo>
+                <a:close/>
+              </a:path>
+            </a:pathLst>
+          </a:custGeom>
+          <a:noFill/>
+          <a:ln>
+            <a:extLst>
+              <a:ext uri="{C807C97D-BFC1-408E-A445-0C87EB9F89A2}">
+                <ask:lineSketchStyleProps xmlns:ask="http://schemas.microsoft.com/office/drawing/2018/sketchyshapes" sd="1219033472">
+                  <a:prstGeom prst="rect">
+                    <a:avLst/>
+                  </a:prstGeom>
+                  <ask:type>
+                    <ask:lineSketchScribble/>
+                  </ask:type>
+                </ask:lineSketchStyleProps>
+              </a:ext>
+            </a:extLst>
+          </a:ln>
+        </p:spPr>
+        <p:style>
+          <a:lnRef idx="2">
+            <a:schemeClr val="accent1">
+              <a:shade val="15000"/>
+            </a:schemeClr>
+          </a:lnRef>
+          <a:fillRef idx="1">
+            <a:schemeClr val="accent1"/>
+          </a:fillRef>
+          <a:effectRef idx="0">
+            <a:schemeClr val="accent1"/>
+          </a:effectRef>
+          <a:fontRef idx="minor">
+            <a:schemeClr val="lt1"/>
+          </a:fontRef>
+        </p:style>
+        <p:txBody>
+          <a:bodyPr rtlCol="0" anchor="ctr"/>
+          <a:lstStyle/>
+          <a:p>
+            <a:pPr algn="ctr"/>
+            <a:endParaRPr lang="it-IT"/>
+          </a:p>
+        </p:txBody>
+      </p:sp>
+      <p:sp>
+        <p:nvSpPr>
+          <p:cNvPr id="80" name="CasellaDiTesto 79">
+            <a:extLst>
+              <a:ext uri="{FF2B5EF4-FFF2-40B4-BE49-F238E27FC236}">
+                <a16:creationId xmlns:a16="http://schemas.microsoft.com/office/drawing/2014/main" id="{63A32B1F-1633-E2B2-39D0-F65CF9DDD6D1}"/>
+              </a:ext>
+            </a:extLst>
+          </p:cNvPr>
+          <p:cNvSpPr txBox="1"/>
+          <p:nvPr/>
+        </p:nvSpPr>
+        <p:spPr>
+          <a:xfrm>
+            <a:off x="10729023" y="2755375"/>
+            <a:ext cx="942975" cy="369332"/>
+          </a:xfrm>
+          <a:prstGeom prst="rect">
+            <a:avLst/>
+          </a:prstGeom>
+          <a:noFill/>
+        </p:spPr>
+        <p:txBody>
+          <a:bodyPr wrap="square">
+            <a:spAutoFit/>
+          </a:bodyPr>
+          <a:lstStyle/>
+          <a:p>
+            <a:r>
+              <a:rPr lang="it-IT" b="1" dirty="0" err="1"/>
+              <a:t>GPUs</a:t>
+            </a:r>
+            <a:endParaRPr lang="it-IT" b="1" dirty="0"/>
+          </a:p>
+        </p:txBody>
+      </p:sp>
+      <p:sp>
+        <p:nvSpPr>
+          <p:cNvPr id="81" name="CasellaDiTesto 80">
+            <a:extLst>
+              <a:ext uri="{FF2B5EF4-FFF2-40B4-BE49-F238E27FC236}">
+                <a16:creationId xmlns:a16="http://schemas.microsoft.com/office/drawing/2014/main" id="{A9255058-FF73-5C63-04B4-7B2085F029C4}"/>
+              </a:ext>
+            </a:extLst>
+          </p:cNvPr>
+          <p:cNvSpPr txBox="1"/>
+          <p:nvPr/>
+        </p:nvSpPr>
+        <p:spPr>
+          <a:xfrm>
+            <a:off x="10388434" y="3734704"/>
+            <a:ext cx="1455207" cy="369332"/>
+          </a:xfrm>
+          <a:prstGeom prst="rect">
+            <a:avLst/>
+          </a:prstGeom>
+          <a:noFill/>
+          <a:ln>
+            <a:solidFill>
+              <a:schemeClr val="tx1"/>
+            </a:solidFill>
+          </a:ln>
+        </p:spPr>
+        <p:txBody>
+          <a:bodyPr wrap="none" rtlCol="0">
+            <a:spAutoFit/>
+          </a:bodyPr>
+          <a:lstStyle/>
+          <a:p>
+            <a:r>
+              <a:rPr lang="it-IT" dirty="0"/>
+              <a:t>Sub-network</a:t>
+            </a:r>
+          </a:p>
+        </p:txBody>
+      </p:sp>
+      <p:cxnSp>
+        <p:nvCxnSpPr>
+          <p:cNvPr id="83" name="Connettore 2 82">
+            <a:extLst>
+              <a:ext uri="{FF2B5EF4-FFF2-40B4-BE49-F238E27FC236}">
+                <a16:creationId xmlns:a16="http://schemas.microsoft.com/office/drawing/2014/main" id="{D7936B54-C2D1-7626-D836-D66AC76A7B90}"/>
+              </a:ext>
+            </a:extLst>
+          </p:cNvPr>
+          <p:cNvCxnSpPr>
+            <a:cxnSpLocks/>
+            <a:stCxn id="74" idx="3"/>
+            <a:endCxn id="79" idx="1"/>
+          </p:cNvCxnSpPr>
+          <p:nvPr/>
+        </p:nvCxnSpPr>
+        <p:spPr>
+          <a:xfrm>
+            <a:off x="9906220" y="4683344"/>
+            <a:ext cx="316168" cy="0"/>
+          </a:xfrm>
+          <a:prstGeom prst="straightConnector1">
+            <a:avLst/>
+          </a:prstGeom>
+          <a:ln>
+            <a:headEnd type="triangle"/>
+            <a:tailEnd type="triangle"/>
+          </a:ln>
+        </p:spPr>
+        <p:style>
+          <a:lnRef idx="2">
+            <a:schemeClr val="dk1"/>
+          </a:lnRef>
+          <a:fillRef idx="0">
+            <a:schemeClr val="dk1"/>
+          </a:fillRef>
+          <a:effectRef idx="1">
+            <a:schemeClr val="dk1"/>
+          </a:effectRef>
+          <a:fontRef idx="minor">
+            <a:schemeClr val="tx1"/>
+          </a:fontRef>
+        </p:style>
+      </p:cxnSp>
+      <p:sp>
+        <p:nvSpPr>
+          <p:cNvPr id="86" name="CasellaDiTesto 85">
+            <a:extLst>
+              <a:ext uri="{FF2B5EF4-FFF2-40B4-BE49-F238E27FC236}">
+                <a16:creationId xmlns:a16="http://schemas.microsoft.com/office/drawing/2014/main" id="{07F66DD0-14D3-5F7F-E122-207D142A1FB4}"/>
+              </a:ext>
+            </a:extLst>
+          </p:cNvPr>
+          <p:cNvSpPr txBox="1"/>
+          <p:nvPr/>
+        </p:nvSpPr>
+        <p:spPr>
+          <a:xfrm>
+            <a:off x="8531546" y="3813818"/>
+            <a:ext cx="1131400" cy="369332"/>
+          </a:xfrm>
+          <a:prstGeom prst="rect">
+            <a:avLst/>
+          </a:prstGeom>
+          <a:noFill/>
+          <a:ln>
+            <a:solidFill>
+              <a:schemeClr val="tx1"/>
+            </a:solidFill>
+          </a:ln>
+        </p:spPr>
+        <p:txBody>
+          <a:bodyPr wrap="none" rtlCol="0">
+            <a:spAutoFit/>
+          </a:bodyPr>
+          <a:lstStyle/>
+          <a:p>
+            <a:r>
+              <a:rPr lang="it-IT" dirty="0" err="1"/>
+              <a:t>solver_sp</a:t>
+            </a:r>
+            <a:endParaRPr lang="it-IT" dirty="0"/>
+          </a:p>
+        </p:txBody>
+      </p:sp>
+      <p:graphicFrame>
+        <p:nvGraphicFramePr>
+          <p:cNvPr id="89" name="Oggetto 88">
+            <a:extLst>
+              <a:ext uri="{FF2B5EF4-FFF2-40B4-BE49-F238E27FC236}">
+                <a16:creationId xmlns:a16="http://schemas.microsoft.com/office/drawing/2014/main" id="{1A6B29A6-3C8A-6621-37C1-499694FAC422}"/>
+              </a:ext>
+            </a:extLst>
+          </p:cNvPr>
+          <p:cNvGraphicFramePr>
+            <a:graphicFrameLocks noChangeAspect="1"/>
+          </p:cNvGraphicFramePr>
+          <p:nvPr>
+            <p:extLst>
+              <p:ext uri="{D42A27DB-BD31-4B8C-83A1-F6EECF244321}">
+                <p14:modId xmlns:p14="http://schemas.microsoft.com/office/powerpoint/2010/main" val="3893697625"/>
+              </p:ext>
+            </p:extLst>
+          </p:nvPr>
+        </p:nvGraphicFramePr>
+        <p:xfrm>
+          <a:off x="5644521" y="2931989"/>
+          <a:ext cx="1314450" cy="514350"/>
+        </p:xfrm>
+        <a:graphic>
+          <a:graphicData uri="http://schemas.openxmlformats.org/presentationml/2006/ole">
+            <mc:AlternateContent xmlns:mc="http://schemas.openxmlformats.org/markup-compatibility/2006">
+              <mc:Choice xmlns:v="urn:schemas-microsoft-com:vml" Requires="v">
+                <p:oleObj name="Oggetto shell Packager" showAsIcon="1" r:id="rId2" imgW="1314412" imgH="514350" progId="Package">
+                  <p:embed/>
+                </p:oleObj>
+              </mc:Choice>
+              <mc:Fallback>
+                <p:oleObj name="Oggetto shell Packager" showAsIcon="1" r:id="rId2" imgW="1314412" imgH="514350" progId="Package">
+                  <p:embed/>
+                  <p:pic>
+                    <p:nvPicPr>
+                      <p:cNvPr id="0" name=""/>
+                      <p:cNvPicPr/>
+                      <p:nvPr/>
+                    </p:nvPicPr>
+                    <p:blipFill>
+                      <a:blip r:embed="rId3"/>
+                      <a:stretch>
+                        <a:fillRect/>
+                      </a:stretch>
+                    </p:blipFill>
+                    <p:spPr>
+                      <a:xfrm>
+                        <a:off x="5644521" y="2931989"/>
+                        <a:ext cx="1314450" cy="514350"/>
+                      </a:xfrm>
+                      <a:prstGeom prst="rect">
+                        <a:avLst/>
+                      </a:prstGeom>
+                    </p:spPr>
+                  </p:pic>
+                </p:oleObj>
+              </mc:Fallback>
+            </mc:AlternateContent>
+          </a:graphicData>
+        </a:graphic>
+      </p:graphicFrame>
+      <p:sp>
+        <p:nvSpPr>
+          <p:cNvPr id="93" name="CasellaDiTesto 92">
+            <a:extLst>
+              <a:ext uri="{FF2B5EF4-FFF2-40B4-BE49-F238E27FC236}">
+                <a16:creationId xmlns:a16="http://schemas.microsoft.com/office/drawing/2014/main" id="{487C6CA1-F806-E653-4B10-FB1702B8F262}"/>
+              </a:ext>
+            </a:extLst>
+          </p:cNvPr>
+          <p:cNvSpPr txBox="1"/>
+          <p:nvPr/>
+        </p:nvSpPr>
+        <p:spPr>
+          <a:xfrm>
+            <a:off x="148932" y="4378095"/>
+            <a:ext cx="947695" cy="369332"/>
+          </a:xfrm>
+          <a:prstGeom prst="rect">
+            <a:avLst/>
+          </a:prstGeom>
+          <a:noFill/>
+          <a:ln>
+            <a:solidFill>
+              <a:schemeClr val="tx1"/>
+            </a:solidFill>
+          </a:ln>
+        </p:spPr>
+        <p:txBody>
+          <a:bodyPr wrap="none" rtlCol="0">
+            <a:spAutoFit/>
+          </a:bodyPr>
+          <a:lstStyle/>
+          <a:p>
+            <a:r>
+              <a:rPr lang="it-IT" dirty="0" err="1"/>
+              <a:t>Angular</a:t>
+            </a:r>
+            <a:endParaRPr lang="it-IT" dirty="0"/>
+          </a:p>
+        </p:txBody>
+      </p:sp>
+      <p:sp>
+        <p:nvSpPr>
+          <p:cNvPr id="94" name="Freccia a destra 93">
+            <a:extLst>
+              <a:ext uri="{FF2B5EF4-FFF2-40B4-BE49-F238E27FC236}">
+                <a16:creationId xmlns:a16="http://schemas.microsoft.com/office/drawing/2014/main" id="{52FEE13F-3202-9608-627E-54FAE1A4688D}"/>
+              </a:ext>
+            </a:extLst>
+          </p:cNvPr>
+          <p:cNvSpPr/>
+          <p:nvPr/>
+        </p:nvSpPr>
+        <p:spPr>
+          <a:xfrm>
+            <a:off x="1162859" y="4320445"/>
+            <a:ext cx="887356" cy="484632"/>
+          </a:xfrm>
+          <a:prstGeom prst="rightArrow">
+            <a:avLst/>
+          </a:prstGeom>
+        </p:spPr>
+        <p:style>
+          <a:lnRef idx="2">
+            <a:schemeClr val="accent1">
+              <a:shade val="15000"/>
+            </a:schemeClr>
+          </a:lnRef>
+          <a:fillRef idx="1">
+            <a:schemeClr val="accent1"/>
+          </a:fillRef>
+          <a:effectRef idx="0">
+            <a:schemeClr val="accent1"/>
+          </a:effectRef>
+          <a:fontRef idx="minor">
+            <a:schemeClr val="lt1"/>
+          </a:fontRef>
+        </p:style>
+        <p:txBody>
+          <a:bodyPr rtlCol="0" anchor="ctr"/>
+          <a:lstStyle/>
+          <a:p>
+            <a:pPr algn="ctr"/>
+            <a:r>
+              <a:rPr lang="it-IT" dirty="0"/>
+              <a:t>JSON</a:t>
+            </a:r>
+          </a:p>
+        </p:txBody>
+      </p:sp>
+      <p:cxnSp>
+        <p:nvCxnSpPr>
+          <p:cNvPr id="96" name="Connettore diritto 95">
+            <a:extLst>
+              <a:ext uri="{FF2B5EF4-FFF2-40B4-BE49-F238E27FC236}">
+                <a16:creationId xmlns:a16="http://schemas.microsoft.com/office/drawing/2014/main" id="{FCC0162A-A433-07E0-9AAE-6885A3A00D49}"/>
+              </a:ext>
+            </a:extLst>
+          </p:cNvPr>
+          <p:cNvCxnSpPr/>
+          <p:nvPr/>
+        </p:nvCxnSpPr>
+        <p:spPr>
+          <a:xfrm>
+            <a:off x="2112561" y="2951018"/>
+            <a:ext cx="0" cy="3470564"/>
+          </a:xfrm>
+          <a:prstGeom prst="line">
+            <a:avLst/>
+          </a:prstGeom>
+          <a:ln>
+            <a:prstDash val="dashDot"/>
+          </a:ln>
+        </p:spPr>
+        <p:style>
+          <a:lnRef idx="2">
+            <a:schemeClr val="dk1"/>
+          </a:lnRef>
+          <a:fillRef idx="0">
+            <a:schemeClr val="dk1"/>
+          </a:fillRef>
+          <a:effectRef idx="1">
+            <a:schemeClr val="dk1"/>
+          </a:effectRef>
+          <a:fontRef idx="minor">
+            <a:schemeClr val="tx1"/>
+          </a:fontRef>
+        </p:style>
+      </p:cxnSp>
     </p:spTree>
     <p:extLst>
       <p:ext uri="{BB962C8B-B14F-4D97-AF65-F5344CB8AC3E}">

--- a/INTEGRA Editor Project.pptx
+++ b/INTEGRA Editor Project.pptx
@@ -6,14 +6,15 @@
   </p:sldMasterIdLst>
   <p:sldIdLst>
     <p:sldId id="256" r:id="rId2"/>
-    <p:sldId id="257" r:id="rId3"/>
-    <p:sldId id="258" r:id="rId4"/>
-    <p:sldId id="259" r:id="rId5"/>
-    <p:sldId id="260" r:id="rId6"/>
-    <p:sldId id="261" r:id="rId7"/>
-    <p:sldId id="263" r:id="rId8"/>
-    <p:sldId id="262" r:id="rId9"/>
-    <p:sldId id="264" r:id="rId10"/>
+    <p:sldId id="265" r:id="rId3"/>
+    <p:sldId id="257" r:id="rId4"/>
+    <p:sldId id="258" r:id="rId5"/>
+    <p:sldId id="259" r:id="rId6"/>
+    <p:sldId id="260" r:id="rId7"/>
+    <p:sldId id="261" r:id="rId8"/>
+    <p:sldId id="263" r:id="rId9"/>
+    <p:sldId id="262" r:id="rId10"/>
+    <p:sldId id="264" r:id="rId11"/>
   </p:sldIdLst>
   <p:sldSz cx="12192000" cy="6858000"/>
   <p:notesSz cx="6858000" cy="9144000"/>
@@ -267,7 +268,7 @@
           <a:p>
             <a:fld id="{CB813C40-EE66-436C-AD33-4DC4D8836DCF}" type="datetimeFigureOut">
               <a:rPr lang="it-IT" smtClean="0"/>
-              <a:t>02/12/2025</a:t>
+              <a:t>03/12/2025</a:t>
             </a:fld>
             <a:endParaRPr lang="it-IT"/>
           </a:p>
@@ -321,7 +322,7 @@
           <a:p>
             <a:fld id="{FC5AB196-C602-44CD-8EA1-EB993AE36885}" type="slidenum">
               <a:rPr lang="it-IT" smtClean="0"/>
-              <a:t>‹N›</a:t>
+              <a:t>‹#›</a:t>
             </a:fld>
             <a:endParaRPr lang="it-IT"/>
           </a:p>
@@ -465,7 +466,7 @@
           <a:p>
             <a:fld id="{CB813C40-EE66-436C-AD33-4DC4D8836DCF}" type="datetimeFigureOut">
               <a:rPr lang="it-IT" smtClean="0"/>
-              <a:t>02/12/2025</a:t>
+              <a:t>03/12/2025</a:t>
             </a:fld>
             <a:endParaRPr lang="it-IT"/>
           </a:p>
@@ -519,7 +520,7 @@
           <a:p>
             <a:fld id="{FC5AB196-C602-44CD-8EA1-EB993AE36885}" type="slidenum">
               <a:rPr lang="it-IT" smtClean="0"/>
-              <a:t>‹N›</a:t>
+              <a:t>‹#›</a:t>
             </a:fld>
             <a:endParaRPr lang="it-IT"/>
           </a:p>
@@ -673,7 +674,7 @@
           <a:p>
             <a:fld id="{CB813C40-EE66-436C-AD33-4DC4D8836DCF}" type="datetimeFigureOut">
               <a:rPr lang="it-IT" smtClean="0"/>
-              <a:t>02/12/2025</a:t>
+              <a:t>03/12/2025</a:t>
             </a:fld>
             <a:endParaRPr lang="it-IT"/>
           </a:p>
@@ -727,7 +728,7 @@
           <a:p>
             <a:fld id="{FC5AB196-C602-44CD-8EA1-EB993AE36885}" type="slidenum">
               <a:rPr lang="it-IT" smtClean="0"/>
-              <a:t>‹N›</a:t>
+              <a:t>‹#›</a:t>
             </a:fld>
             <a:endParaRPr lang="it-IT"/>
           </a:p>
@@ -871,7 +872,7 @@
           <a:p>
             <a:fld id="{CB813C40-EE66-436C-AD33-4DC4D8836DCF}" type="datetimeFigureOut">
               <a:rPr lang="it-IT" smtClean="0"/>
-              <a:t>02/12/2025</a:t>
+              <a:t>03/12/2025</a:t>
             </a:fld>
             <a:endParaRPr lang="it-IT"/>
           </a:p>
@@ -925,7 +926,7 @@
           <a:p>
             <a:fld id="{FC5AB196-C602-44CD-8EA1-EB993AE36885}" type="slidenum">
               <a:rPr lang="it-IT" smtClean="0"/>
-              <a:t>‹N›</a:t>
+              <a:t>‹#›</a:t>
             </a:fld>
             <a:endParaRPr lang="it-IT"/>
           </a:p>
@@ -1146,7 +1147,7 @@
           <a:p>
             <a:fld id="{CB813C40-EE66-436C-AD33-4DC4D8836DCF}" type="datetimeFigureOut">
               <a:rPr lang="it-IT" smtClean="0"/>
-              <a:t>02/12/2025</a:t>
+              <a:t>03/12/2025</a:t>
             </a:fld>
             <a:endParaRPr lang="it-IT"/>
           </a:p>
@@ -1200,7 +1201,7 @@
           <a:p>
             <a:fld id="{FC5AB196-C602-44CD-8EA1-EB993AE36885}" type="slidenum">
               <a:rPr lang="it-IT" smtClean="0"/>
-              <a:t>‹N›</a:t>
+              <a:t>‹#›</a:t>
             </a:fld>
             <a:endParaRPr lang="it-IT"/>
           </a:p>
@@ -1411,7 +1412,7 @@
           <a:p>
             <a:fld id="{CB813C40-EE66-436C-AD33-4DC4D8836DCF}" type="datetimeFigureOut">
               <a:rPr lang="it-IT" smtClean="0"/>
-              <a:t>02/12/2025</a:t>
+              <a:t>03/12/2025</a:t>
             </a:fld>
             <a:endParaRPr lang="it-IT"/>
           </a:p>
@@ -1465,7 +1466,7 @@
           <a:p>
             <a:fld id="{FC5AB196-C602-44CD-8EA1-EB993AE36885}" type="slidenum">
               <a:rPr lang="it-IT" smtClean="0"/>
-              <a:t>‹N›</a:t>
+              <a:t>‹#›</a:t>
             </a:fld>
             <a:endParaRPr lang="it-IT"/>
           </a:p>
@@ -1823,7 +1824,7 @@
           <a:p>
             <a:fld id="{CB813C40-EE66-436C-AD33-4DC4D8836DCF}" type="datetimeFigureOut">
               <a:rPr lang="it-IT" smtClean="0"/>
-              <a:t>02/12/2025</a:t>
+              <a:t>03/12/2025</a:t>
             </a:fld>
             <a:endParaRPr lang="it-IT"/>
           </a:p>
@@ -1877,7 +1878,7 @@
           <a:p>
             <a:fld id="{FC5AB196-C602-44CD-8EA1-EB993AE36885}" type="slidenum">
               <a:rPr lang="it-IT" smtClean="0"/>
-              <a:t>‹N›</a:t>
+              <a:t>‹#›</a:t>
             </a:fld>
             <a:endParaRPr lang="it-IT"/>
           </a:p>
@@ -1964,7 +1965,7 @@
           <a:p>
             <a:fld id="{CB813C40-EE66-436C-AD33-4DC4D8836DCF}" type="datetimeFigureOut">
               <a:rPr lang="it-IT" smtClean="0"/>
-              <a:t>02/12/2025</a:t>
+              <a:t>03/12/2025</a:t>
             </a:fld>
             <a:endParaRPr lang="it-IT"/>
           </a:p>
@@ -2018,7 +2019,7 @@
           <a:p>
             <a:fld id="{FC5AB196-C602-44CD-8EA1-EB993AE36885}" type="slidenum">
               <a:rPr lang="it-IT" smtClean="0"/>
-              <a:t>‹N›</a:t>
+              <a:t>‹#›</a:t>
             </a:fld>
             <a:endParaRPr lang="it-IT"/>
           </a:p>
@@ -2077,7 +2078,7 @@
           <a:p>
             <a:fld id="{CB813C40-EE66-436C-AD33-4DC4D8836DCF}" type="datetimeFigureOut">
               <a:rPr lang="it-IT" smtClean="0"/>
-              <a:t>02/12/2025</a:t>
+              <a:t>03/12/2025</a:t>
             </a:fld>
             <a:endParaRPr lang="it-IT"/>
           </a:p>
@@ -2131,7 +2132,7 @@
           <a:p>
             <a:fld id="{FC5AB196-C602-44CD-8EA1-EB993AE36885}" type="slidenum">
               <a:rPr lang="it-IT" smtClean="0"/>
-              <a:t>‹N›</a:t>
+              <a:t>‹#›</a:t>
             </a:fld>
             <a:endParaRPr lang="it-IT"/>
           </a:p>
@@ -2388,7 +2389,7 @@
           <a:p>
             <a:fld id="{CB813C40-EE66-436C-AD33-4DC4D8836DCF}" type="datetimeFigureOut">
               <a:rPr lang="it-IT" smtClean="0"/>
-              <a:t>02/12/2025</a:t>
+              <a:t>03/12/2025</a:t>
             </a:fld>
             <a:endParaRPr lang="it-IT"/>
           </a:p>
@@ -2442,7 +2443,7 @@
           <a:p>
             <a:fld id="{FC5AB196-C602-44CD-8EA1-EB993AE36885}" type="slidenum">
               <a:rPr lang="it-IT" smtClean="0"/>
-              <a:t>‹N›</a:t>
+              <a:t>‹#›</a:t>
             </a:fld>
             <a:endParaRPr lang="it-IT"/>
           </a:p>
@@ -2676,7 +2677,7 @@
           <a:p>
             <a:fld id="{CB813C40-EE66-436C-AD33-4DC4D8836DCF}" type="datetimeFigureOut">
               <a:rPr lang="it-IT" smtClean="0"/>
-              <a:t>02/12/2025</a:t>
+              <a:t>03/12/2025</a:t>
             </a:fld>
             <a:endParaRPr lang="it-IT"/>
           </a:p>
@@ -2730,7 +2731,7 @@
           <a:p>
             <a:fld id="{FC5AB196-C602-44CD-8EA1-EB993AE36885}" type="slidenum">
               <a:rPr lang="it-IT" smtClean="0"/>
-              <a:t>‹N›</a:t>
+              <a:t>‹#›</a:t>
             </a:fld>
             <a:endParaRPr lang="it-IT"/>
           </a:p>
@@ -2917,7 +2918,7 @@
           <a:p>
             <a:fld id="{CB813C40-EE66-436C-AD33-4DC4D8836DCF}" type="datetimeFigureOut">
               <a:rPr lang="it-IT" smtClean="0"/>
-              <a:t>02/12/2025</a:t>
+              <a:t>03/12/2025</a:t>
             </a:fld>
             <a:endParaRPr lang="it-IT"/>
           </a:p>
@@ -3007,7 +3008,7 @@
           <a:p>
             <a:fld id="{FC5AB196-C602-44CD-8EA1-EB993AE36885}" type="slidenum">
               <a:rPr lang="it-IT" smtClean="0"/>
-              <a:t>‹N›</a:t>
+              <a:t>‹#›</a:t>
             </a:fld>
             <a:endParaRPr lang="it-IT"/>
           </a:p>
@@ -3349,6 +3350,361 @@
         <p:spPr>
           <a:xfrm>
             <a:off x="294968" y="255638"/>
+            <a:ext cx="1717137" cy="523220"/>
+          </a:xfrm>
+          <a:prstGeom prst="rect">
+            <a:avLst/>
+          </a:prstGeom>
+          <a:noFill/>
+        </p:spPr>
+        <p:txBody>
+          <a:bodyPr wrap="none" rtlCol="0">
+            <a:spAutoFit/>
+          </a:bodyPr>
+          <a:lstStyle/>
+          <a:p>
+            <a:r>
+              <a:rPr lang="it-IT" sz="2800" dirty="0"/>
+              <a:t>Overview:</a:t>
+            </a:r>
+          </a:p>
+        </p:txBody>
+      </p:sp>
+      <p:sp>
+        <p:nvSpPr>
+          <p:cNvPr id="2" name="CasellaDiTesto 3">
+            <a:extLst>
+              <a:ext uri="{FF2B5EF4-FFF2-40B4-BE49-F238E27FC236}">
+                <a16:creationId xmlns:a16="http://schemas.microsoft.com/office/drawing/2014/main" id="{39A24B47-F0B1-7950-8740-37ADE8ADAA67}"/>
+              </a:ext>
+            </a:extLst>
+          </p:cNvPr>
+          <p:cNvSpPr txBox="1"/>
+          <p:nvPr/>
+        </p:nvSpPr>
+        <p:spPr>
+          <a:xfrm>
+            <a:off x="211464" y="649994"/>
+            <a:ext cx="11631669" cy="1323439"/>
+          </a:xfrm>
+          <a:prstGeom prst="rect">
+            <a:avLst/>
+          </a:prstGeom>
+          <a:noFill/>
+        </p:spPr>
+        <p:txBody>
+          <a:bodyPr wrap="square" rtlCol="0">
+            <a:spAutoFit/>
+          </a:bodyPr>
+          <a:lstStyle/>
+          <a:p>
+            <a:pPr marL="342900" indent="-342900">
+              <a:buFont typeface="+mj-lt"/>
+              <a:buAutoNum type="arabicPeriod"/>
+            </a:pPr>
+            <a:r>
+              <a:rPr lang="it-IT" sz="1600" dirty="0"/>
+              <a:t>The SW should</a:t>
+            </a:r>
+          </a:p>
+          <a:p>
+            <a:pPr marL="342900" indent="-342900">
+              <a:buFont typeface="+mj-lt"/>
+              <a:buAutoNum type="arabicPeriod"/>
+            </a:pPr>
+            <a:r>
+              <a:rPr lang="it-IT" sz="1600" dirty="0"/>
+              <a:t>The SW should</a:t>
+            </a:r>
+          </a:p>
+          <a:p>
+            <a:pPr marL="342900" indent="-342900">
+              <a:buFont typeface="+mj-lt"/>
+              <a:buAutoNum type="arabicPeriod"/>
+            </a:pPr>
+            <a:r>
+              <a:rPr lang="it-IT" sz="1600" dirty="0"/>
+              <a:t>The SW should</a:t>
+            </a:r>
+          </a:p>
+          <a:p>
+            <a:pPr marL="342900" indent="-342900">
+              <a:buFont typeface="+mj-lt"/>
+              <a:buAutoNum type="arabicPeriod"/>
+            </a:pPr>
+            <a:r>
+              <a:rPr lang="it-IT" sz="1600" dirty="0"/>
+              <a:t>The SW should</a:t>
+            </a:r>
+          </a:p>
+          <a:p>
+            <a:pPr marL="342900" indent="-342900">
+              <a:buFont typeface="+mj-lt"/>
+              <a:buAutoNum type="arabicPeriod"/>
+            </a:pPr>
+            <a:endParaRPr lang="it-IT" sz="1600" dirty="0"/>
+          </a:p>
+        </p:txBody>
+      </p:sp>
+    </p:spTree>
+    <p:extLst>
+      <p:ext uri="{BB962C8B-B14F-4D97-AF65-F5344CB8AC3E}">
+        <p14:creationId xmlns:p14="http://schemas.microsoft.com/office/powerpoint/2010/main" val="2282532433"/>
+      </p:ext>
+    </p:extLst>
+  </p:cSld>
+  <p:clrMapOvr>
+    <a:masterClrMapping/>
+  </p:clrMapOvr>
+</p:sld>
+</file>
+
+<file path=ppt/slides/slide10.xml><?xml version="1.0" encoding="utf-8"?>
+<p:sld xmlns:a="http://schemas.openxmlformats.org/drawingml/2006/main" xmlns:r="http://schemas.openxmlformats.org/officeDocument/2006/relationships" xmlns:p="http://schemas.openxmlformats.org/presentationml/2006/main">
+  <p:cSld>
+    <p:spTree>
+      <p:nvGrpSpPr>
+        <p:cNvPr id="1" name="">
+          <a:extLst>
+            <a:ext uri="{FF2B5EF4-FFF2-40B4-BE49-F238E27FC236}">
+              <a16:creationId xmlns:a16="http://schemas.microsoft.com/office/drawing/2014/main" id="{9409E066-5697-9E51-975D-EA4B36796439}"/>
+            </a:ext>
+          </a:extLst>
+        </p:cNvPr>
+        <p:cNvGrpSpPr/>
+        <p:nvPr/>
+      </p:nvGrpSpPr>
+      <p:grpSpPr>
+        <a:xfrm>
+          <a:off x="0" y="0"/>
+          <a:ext cx="0" cy="0"/>
+          <a:chOff x="0" y="0"/>
+          <a:chExt cx="0" cy="0"/>
+        </a:xfrm>
+      </p:grpSpPr>
+      <p:sp>
+        <p:nvSpPr>
+          <p:cNvPr id="35" name="CasellaDiTesto 34">
+            <a:extLst>
+              <a:ext uri="{FF2B5EF4-FFF2-40B4-BE49-F238E27FC236}">
+                <a16:creationId xmlns:a16="http://schemas.microsoft.com/office/drawing/2014/main" id="{C340A552-B0B3-C053-F399-CF7AA3AE3FE3}"/>
+              </a:ext>
+            </a:extLst>
+          </p:cNvPr>
+          <p:cNvSpPr txBox="1"/>
+          <p:nvPr/>
+        </p:nvSpPr>
+        <p:spPr>
+          <a:xfrm>
+            <a:off x="211464" y="92800"/>
+            <a:ext cx="1912703" cy="523220"/>
+          </a:xfrm>
+          <a:prstGeom prst="rect">
+            <a:avLst/>
+          </a:prstGeom>
+          <a:noFill/>
+        </p:spPr>
+        <p:txBody>
+          <a:bodyPr wrap="none" rtlCol="0">
+            <a:spAutoFit/>
+          </a:bodyPr>
+          <a:lstStyle/>
+          <a:p>
+            <a:r>
+              <a:rPr lang="it-IT" sz="2800" dirty="0"/>
+              <a:t>Module #1:</a:t>
+            </a:r>
+          </a:p>
+        </p:txBody>
+      </p:sp>
+      <p:pic>
+        <p:nvPicPr>
+          <p:cNvPr id="6" name="Immagine 5">
+            <a:extLst>
+              <a:ext uri="{FF2B5EF4-FFF2-40B4-BE49-F238E27FC236}">
+                <a16:creationId xmlns:a16="http://schemas.microsoft.com/office/drawing/2014/main" id="{85B71850-91D1-E6CD-8AD8-A425F88B1A05}"/>
+              </a:ext>
+            </a:extLst>
+          </p:cNvPr>
+          <p:cNvPicPr>
+            <a:picLocks noChangeAspect="1"/>
+          </p:cNvPicPr>
+          <p:nvPr/>
+        </p:nvPicPr>
+        <p:blipFill>
+          <a:blip r:embed="rId2"/>
+          <a:stretch>
+            <a:fillRect/>
+          </a:stretch>
+        </p:blipFill>
+        <p:spPr>
+          <a:xfrm>
+            <a:off x="6425045" y="3129072"/>
+            <a:ext cx="5107776" cy="2446771"/>
+          </a:xfrm>
+          <a:prstGeom prst="rect">
+            <a:avLst/>
+          </a:prstGeom>
+        </p:spPr>
+      </p:pic>
+      <p:pic>
+        <p:nvPicPr>
+          <p:cNvPr id="1028" name="Picture 4" descr="Class Diagram - UML 2 Tutorial | Sparx Systems">
+            <a:extLst>
+              <a:ext uri="{FF2B5EF4-FFF2-40B4-BE49-F238E27FC236}">
+                <a16:creationId xmlns:a16="http://schemas.microsoft.com/office/drawing/2014/main" id="{8B9BC641-1ED3-4478-373B-B72C486AFF56}"/>
+              </a:ext>
+            </a:extLst>
+          </p:cNvPr>
+          <p:cNvPicPr>
+            <a:picLocks noChangeAspect="1" noChangeArrowheads="1"/>
+          </p:cNvPicPr>
+          <p:nvPr/>
+        </p:nvPicPr>
+        <p:blipFill>
+          <a:blip r:embed="rId3">
+            <a:extLst>
+              <a:ext uri="{28A0092B-C50C-407E-A947-70E740481C1C}">
+                <a14:useLocalDpi xmlns:a14="http://schemas.microsoft.com/office/drawing/2010/main" val="0"/>
+              </a:ext>
+            </a:extLst>
+          </a:blip>
+          <a:srcRect/>
+          <a:stretch>
+            <a:fillRect/>
+          </a:stretch>
+        </p:blipFill>
+        <p:spPr bwMode="auto">
+          <a:xfrm>
+            <a:off x="451360" y="2489923"/>
+            <a:ext cx="5725391" cy="4036796"/>
+          </a:xfrm>
+          <a:prstGeom prst="rect">
+            <a:avLst/>
+          </a:prstGeom>
+          <a:noFill/>
+          <a:extLst>
+            <a:ext uri="{909E8E84-426E-40DD-AFC4-6F175D3DCCD1}">
+              <a14:hiddenFill xmlns:a14="http://schemas.microsoft.com/office/drawing/2010/main">
+                <a:solidFill>
+                  <a:srgbClr val="FFFFFF"/>
+                </a:solidFill>
+              </a14:hiddenFill>
+            </a:ext>
+          </a:extLst>
+        </p:spPr>
+      </p:pic>
+      <p:sp>
+        <p:nvSpPr>
+          <p:cNvPr id="7" name="CasellaDiTesto 6">
+            <a:extLst>
+              <a:ext uri="{FF2B5EF4-FFF2-40B4-BE49-F238E27FC236}">
+                <a16:creationId xmlns:a16="http://schemas.microsoft.com/office/drawing/2014/main" id="{737A948C-0CC2-B65A-05CC-AE847D0FF609}"/>
+              </a:ext>
+            </a:extLst>
+          </p:cNvPr>
+          <p:cNvSpPr txBox="1"/>
+          <p:nvPr/>
+        </p:nvSpPr>
+        <p:spPr>
+          <a:xfrm>
+            <a:off x="211464" y="831273"/>
+            <a:ext cx="1700017" cy="923330"/>
+          </a:xfrm>
+          <a:prstGeom prst="rect">
+            <a:avLst/>
+          </a:prstGeom>
+          <a:noFill/>
+        </p:spPr>
+        <p:txBody>
+          <a:bodyPr wrap="none" rtlCol="0">
+            <a:spAutoFit/>
+          </a:bodyPr>
+          <a:lstStyle/>
+          <a:p>
+            <a:pPr marL="285750" indent="-285750">
+              <a:buFont typeface="Arial" panose="020B0604020202020204" pitchFamily="34" charset="0"/>
+              <a:buChar char="•"/>
+            </a:pPr>
+            <a:r>
+              <a:rPr lang="it-IT" dirty="0" err="1"/>
+              <a:t>Overview</a:t>
+            </a:r>
+            <a:r>
+              <a:rPr lang="it-IT" dirty="0"/>
+              <a:t>:</a:t>
+            </a:r>
+          </a:p>
+          <a:p>
+            <a:endParaRPr lang="it-IT" dirty="0"/>
+          </a:p>
+          <a:p>
+            <a:pPr marL="285750" indent="-285750">
+              <a:buFont typeface="Arial" panose="020B0604020202020204" pitchFamily="34" charset="0"/>
+              <a:buChar char="•"/>
+            </a:pPr>
+            <a:r>
+              <a:rPr lang="it-IT" dirty="0" err="1"/>
+              <a:t>Constraints</a:t>
+            </a:r>
+            <a:r>
+              <a:rPr lang="it-IT" dirty="0"/>
+              <a:t>:</a:t>
+            </a:r>
+          </a:p>
+        </p:txBody>
+      </p:sp>
+    </p:spTree>
+    <p:extLst>
+      <p:ext uri="{BB962C8B-B14F-4D97-AF65-F5344CB8AC3E}">
+        <p14:creationId xmlns:p14="http://schemas.microsoft.com/office/powerpoint/2010/main" val="1055265191"/>
+      </p:ext>
+    </p:extLst>
+  </p:cSld>
+  <p:clrMapOvr>
+    <a:masterClrMapping/>
+  </p:clrMapOvr>
+</p:sld>
+</file>
+
+<file path=ppt/slides/slide2.xml><?xml version="1.0" encoding="utf-8"?>
+<p:sld xmlns:a="http://schemas.openxmlformats.org/drawingml/2006/main" xmlns:r="http://schemas.openxmlformats.org/officeDocument/2006/relationships" xmlns:p="http://schemas.openxmlformats.org/presentationml/2006/main">
+  <p:cSld>
+    <p:spTree>
+      <p:nvGrpSpPr>
+        <p:cNvPr id="1" name="">
+          <a:extLst>
+            <a:ext uri="{FF2B5EF4-FFF2-40B4-BE49-F238E27FC236}">
+              <a16:creationId xmlns:a16="http://schemas.microsoft.com/office/drawing/2014/main" id="{CB83F419-2200-DE54-B80E-FE08F63828C0}"/>
+            </a:ext>
+          </a:extLst>
+        </p:cNvPr>
+        <p:cNvGrpSpPr/>
+        <p:nvPr/>
+      </p:nvGrpSpPr>
+      <p:grpSpPr>
+        <a:xfrm>
+          <a:off x="0" y="0"/>
+          <a:ext cx="0" cy="0"/>
+          <a:chOff x="0" y="0"/>
+          <a:chExt cx="0" cy="0"/>
+        </a:xfrm>
+      </p:grpSpPr>
+      <p:sp>
+        <p:nvSpPr>
+          <p:cNvPr id="4" name="CasellaDiTesto 3">
+            <a:extLst>
+              <a:ext uri="{FF2B5EF4-FFF2-40B4-BE49-F238E27FC236}">
+                <a16:creationId xmlns:a16="http://schemas.microsoft.com/office/drawing/2014/main" id="{4EEFABF1-FCF2-D9EE-37D7-6F14E17CADEE}"/>
+              </a:ext>
+            </a:extLst>
+          </p:cNvPr>
+          <p:cNvSpPr txBox="1"/>
+          <p:nvPr/>
+        </p:nvSpPr>
+        <p:spPr>
+          <a:xfrm>
+            <a:off x="294968" y="255638"/>
             <a:ext cx="2858860" cy="523220"/>
           </a:xfrm>
           <a:prstGeom prst="rect">
@@ -3382,7 +3738,7 @@
           <p:cNvPr id="14" name="CasellaDiTesto 13">
             <a:extLst>
               <a:ext uri="{FF2B5EF4-FFF2-40B4-BE49-F238E27FC236}">
-                <a16:creationId xmlns:a16="http://schemas.microsoft.com/office/drawing/2014/main" id="{73CCA339-21CB-5013-192A-8ABA3EC5E090}"/>
+                <a16:creationId xmlns:a16="http://schemas.microsoft.com/office/drawing/2014/main" id="{21789F6B-D14A-C796-AA00-1ACF06C08663}"/>
               </a:ext>
             </a:extLst>
           </p:cNvPr>
@@ -3492,7 +3848,7 @@
           <p:cNvPr id="17" name="CasellaDiTesto 16">
             <a:extLst>
               <a:ext uri="{FF2B5EF4-FFF2-40B4-BE49-F238E27FC236}">
-                <a16:creationId xmlns:a16="http://schemas.microsoft.com/office/drawing/2014/main" id="{3C1E0CA5-2F15-535C-EF19-9CC536F7DC7C}"/>
+                <a16:creationId xmlns:a16="http://schemas.microsoft.com/office/drawing/2014/main" id="{A334FC0A-D94A-E1A8-909E-5FF4650F850E}"/>
               </a:ext>
             </a:extLst>
           </p:cNvPr>
@@ -3815,7 +4171,7 @@
           <p:cNvPr id="36" name="Connettore 2 35">
             <a:extLst>
               <a:ext uri="{FF2B5EF4-FFF2-40B4-BE49-F238E27FC236}">
-                <a16:creationId xmlns:a16="http://schemas.microsoft.com/office/drawing/2014/main" id="{2EFB2B3D-955B-3811-BACB-EDFE092E4D7B}"/>
+                <a16:creationId xmlns:a16="http://schemas.microsoft.com/office/drawing/2014/main" id="{535728D0-73C2-E41D-C05D-0DFF59E19587}"/>
               </a:ext>
             </a:extLst>
           </p:cNvPr>
@@ -3862,7 +4218,7 @@
           <p:cNvPr id="58" name="CasellaDiTesto 57">
             <a:extLst>
               <a:ext uri="{FF2B5EF4-FFF2-40B4-BE49-F238E27FC236}">
-                <a16:creationId xmlns:a16="http://schemas.microsoft.com/office/drawing/2014/main" id="{0BFB5981-2A97-913D-6556-8D31EF3C8DD2}"/>
+                <a16:creationId xmlns:a16="http://schemas.microsoft.com/office/drawing/2014/main" id="{995425DE-3D9D-3139-0449-C4674096418B}"/>
               </a:ext>
             </a:extLst>
           </p:cNvPr>
@@ -3898,7 +4254,7 @@
           <p:cNvPr id="61" name="CasellaDiTesto 60">
             <a:extLst>
               <a:ext uri="{FF2B5EF4-FFF2-40B4-BE49-F238E27FC236}">
-                <a16:creationId xmlns:a16="http://schemas.microsoft.com/office/drawing/2014/main" id="{756C32C0-EFFE-3234-33D1-ACC2171788DD}"/>
+                <a16:creationId xmlns:a16="http://schemas.microsoft.com/office/drawing/2014/main" id="{F622D5FE-C65E-6661-7315-A2ACA0B55FEF}"/>
               </a:ext>
             </a:extLst>
           </p:cNvPr>
@@ -3938,15 +4294,7 @@
             </a:pPr>
             <a:r>
               <a:rPr lang="it-IT" sz="1600" dirty="0"/>
-              <a:t>Dual-</a:t>
-            </a:r>
-            <a:r>
-              <a:rPr lang="it-IT" sz="1600" dirty="0" err="1"/>
-              <a:t>application</a:t>
-            </a:r>
-            <a:r>
-              <a:rPr lang="it-IT" sz="1600" dirty="0"/>
-              <a:t>: web app and desktop app</a:t>
+              <a:t>Dual-target: web app and desktop app</a:t>
             </a:r>
           </a:p>
           <a:p>
@@ -4085,7 +4433,7 @@
           <p:cNvPr id="63" name="Connettore 2 62">
             <a:extLst>
               <a:ext uri="{FF2B5EF4-FFF2-40B4-BE49-F238E27FC236}">
-                <a16:creationId xmlns:a16="http://schemas.microsoft.com/office/drawing/2014/main" id="{8F686E94-D17F-5DA3-5430-D88328AADD7A}"/>
+                <a16:creationId xmlns:a16="http://schemas.microsoft.com/office/drawing/2014/main" id="{D5736337-4D8B-CBF8-1455-0231C890A228}"/>
               </a:ext>
             </a:extLst>
           </p:cNvPr>
@@ -4132,7 +4480,7 @@
           <p:cNvPr id="67" name="CasellaDiTesto 66">
             <a:extLst>
               <a:ext uri="{FF2B5EF4-FFF2-40B4-BE49-F238E27FC236}">
-                <a16:creationId xmlns:a16="http://schemas.microsoft.com/office/drawing/2014/main" id="{0523DFA3-AF1A-17A1-F99E-091041D82D1C}"/>
+                <a16:creationId xmlns:a16="http://schemas.microsoft.com/office/drawing/2014/main" id="{9C3E6F7D-E991-D67E-73BD-D8F6306EB52A}"/>
               </a:ext>
             </a:extLst>
           </p:cNvPr>
@@ -4173,7 +4521,7 @@
           <p:cNvPr id="79" name="CasellaDiTesto 78">
             <a:extLst>
               <a:ext uri="{FF2B5EF4-FFF2-40B4-BE49-F238E27FC236}">
-                <a16:creationId xmlns:a16="http://schemas.microsoft.com/office/drawing/2014/main" id="{E431608C-4216-8AF2-F2CE-AA2C808BEC84}"/>
+                <a16:creationId xmlns:a16="http://schemas.microsoft.com/office/drawing/2014/main" id="{3C7F2B63-C688-0969-8035-1B2C4372E60B}"/>
               </a:ext>
             </a:extLst>
           </p:cNvPr>
@@ -4224,7 +4572,7 @@
           <p:cNvPr id="80" name="CasellaDiTesto 79">
             <a:extLst>
               <a:ext uri="{FF2B5EF4-FFF2-40B4-BE49-F238E27FC236}">
-                <a16:creationId xmlns:a16="http://schemas.microsoft.com/office/drawing/2014/main" id="{A1FCE3A5-87A9-ADE8-0666-DFC2B5B69325}"/>
+                <a16:creationId xmlns:a16="http://schemas.microsoft.com/office/drawing/2014/main" id="{505DC38E-2A76-3E88-71C5-112309BE9D1A}"/>
               </a:ext>
             </a:extLst>
           </p:cNvPr>
@@ -4286,7 +4634,7 @@
           <p:cNvPr id="82" name="Connettore a gomito 81">
             <a:extLst>
               <a:ext uri="{FF2B5EF4-FFF2-40B4-BE49-F238E27FC236}">
-                <a16:creationId xmlns:a16="http://schemas.microsoft.com/office/drawing/2014/main" id="{5655CD98-3F08-C79C-D70C-CD12A9FDD4D9}"/>
+                <a16:creationId xmlns:a16="http://schemas.microsoft.com/office/drawing/2014/main" id="{E2530D9F-D874-9253-23E9-B027C1EA07C7}"/>
               </a:ext>
             </a:extLst>
           </p:cNvPr>
@@ -4329,7 +4677,7 @@
           <p:cNvPr id="83" name="Connettore a gomito 82">
             <a:extLst>
               <a:ext uri="{FF2B5EF4-FFF2-40B4-BE49-F238E27FC236}">
-                <a16:creationId xmlns:a16="http://schemas.microsoft.com/office/drawing/2014/main" id="{7E6144FC-1170-BECD-8F76-DDD2F3608E1F}"/>
+                <a16:creationId xmlns:a16="http://schemas.microsoft.com/office/drawing/2014/main" id="{95155EA0-8147-C7AA-A5E1-DDE3F40F5428}"/>
               </a:ext>
             </a:extLst>
           </p:cNvPr>
@@ -4371,7 +4719,7 @@
     </p:spTree>
     <p:extLst>
       <p:ext uri="{BB962C8B-B14F-4D97-AF65-F5344CB8AC3E}">
-        <p14:creationId xmlns:p14="http://schemas.microsoft.com/office/powerpoint/2010/main" val="2282532433"/>
+        <p14:creationId xmlns:p14="http://schemas.microsoft.com/office/powerpoint/2010/main" val="3444050283"/>
       </p:ext>
     </p:extLst>
   </p:cSld>
@@ -4381,7 +4729,7 @@
 </p:sld>
 </file>
 
-<file path=ppt/slides/slide2.xml><?xml version="1.0" encoding="utf-8"?>
+<file path=ppt/slides/slide3.xml><?xml version="1.0" encoding="utf-8"?>
 <p:sld xmlns:a="http://schemas.openxmlformats.org/drawingml/2006/main" xmlns:r="http://schemas.openxmlformats.org/officeDocument/2006/relationships" xmlns:p="http://schemas.openxmlformats.org/presentationml/2006/main">
   <p:cSld>
     <p:spTree>
@@ -7433,7 +7781,7 @@
 </p:sld>
 </file>
 
-<file path=ppt/slides/slide3.xml><?xml version="1.0" encoding="utf-8"?>
+<file path=ppt/slides/slide4.xml><?xml version="1.0" encoding="utf-8"?>
 <p:sld xmlns:a="http://schemas.openxmlformats.org/drawingml/2006/main" xmlns:r="http://schemas.openxmlformats.org/officeDocument/2006/relationships" xmlns:p="http://schemas.openxmlformats.org/presentationml/2006/main">
   <p:cSld>
     <p:spTree>
@@ -7727,7 +8075,7 @@
 </p:sld>
 </file>
 
-<file path=ppt/slides/slide4.xml><?xml version="1.0" encoding="utf-8"?>
+<file path=ppt/slides/slide5.xml><?xml version="1.0" encoding="utf-8"?>
 <p:sld xmlns:a="http://schemas.openxmlformats.org/drawingml/2006/main" xmlns:r="http://schemas.openxmlformats.org/officeDocument/2006/relationships" xmlns:p="http://schemas.openxmlformats.org/presentationml/2006/main">
   <p:cSld>
     <p:spTree>
@@ -8262,7 +8610,7 @@
 </p:sld>
 </file>
 
-<file path=ppt/slides/slide5.xml><?xml version="1.0" encoding="utf-8"?>
+<file path=ppt/slides/slide6.xml><?xml version="1.0" encoding="utf-8"?>
 <p:sld xmlns:a="http://schemas.openxmlformats.org/drawingml/2006/main" xmlns:r="http://schemas.openxmlformats.org/officeDocument/2006/relationships" xmlns:p="http://schemas.openxmlformats.org/presentationml/2006/main">
   <p:cSld>
     <p:spTree>
@@ -8983,7 +9331,7 @@
 </p:sld>
 </file>
 
-<file path=ppt/slides/slide6.xml><?xml version="1.0" encoding="utf-8"?>
+<file path=ppt/slides/slide7.xml><?xml version="1.0" encoding="utf-8"?>
 <p:sld xmlns:a="http://schemas.openxmlformats.org/drawingml/2006/main" xmlns:r="http://schemas.openxmlformats.org/officeDocument/2006/relationships" xmlns:p="http://schemas.openxmlformats.org/presentationml/2006/main">
   <p:cSld>
     <p:spTree>
@@ -9704,7 +10052,7 @@
 </p:sld>
 </file>
 
-<file path=ppt/slides/slide7.xml><?xml version="1.0" encoding="utf-8"?>
+<file path=ppt/slides/slide8.xml><?xml version="1.0" encoding="utf-8"?>
 <p:sld xmlns:a="http://schemas.openxmlformats.org/drawingml/2006/main" xmlns:r="http://schemas.openxmlformats.org/officeDocument/2006/relationships" xmlns:p="http://schemas.openxmlformats.org/presentationml/2006/main">
   <p:cSld>
     <p:spTree>
@@ -10425,7 +10773,7 @@
 </p:sld>
 </file>
 
-<file path=ppt/slides/slide8.xml><?xml version="1.0" encoding="utf-8"?>
+<file path=ppt/slides/slide9.xml><?xml version="1.0" encoding="utf-8"?>
 <p:sld xmlns:a="http://schemas.openxmlformats.org/drawingml/2006/main" xmlns:r="http://schemas.openxmlformats.org/officeDocument/2006/relationships" xmlns:p="http://schemas.openxmlformats.org/presentationml/2006/main">
   <p:cSld>
     <p:spTree>
@@ -11137,214 +11485,6 @@
     <p:extLst>
       <p:ext uri="{BB962C8B-B14F-4D97-AF65-F5344CB8AC3E}">
         <p14:creationId xmlns:p14="http://schemas.microsoft.com/office/powerpoint/2010/main" val="3494812723"/>
-      </p:ext>
-    </p:extLst>
-  </p:cSld>
-  <p:clrMapOvr>
-    <a:masterClrMapping/>
-  </p:clrMapOvr>
-</p:sld>
-</file>
-
-<file path=ppt/slides/slide9.xml><?xml version="1.0" encoding="utf-8"?>
-<p:sld xmlns:a="http://schemas.openxmlformats.org/drawingml/2006/main" xmlns:r="http://schemas.openxmlformats.org/officeDocument/2006/relationships" xmlns:p="http://schemas.openxmlformats.org/presentationml/2006/main">
-  <p:cSld>
-    <p:spTree>
-      <p:nvGrpSpPr>
-        <p:cNvPr id="1" name="">
-          <a:extLst>
-            <a:ext uri="{FF2B5EF4-FFF2-40B4-BE49-F238E27FC236}">
-              <a16:creationId xmlns:a16="http://schemas.microsoft.com/office/drawing/2014/main" id="{9409E066-5697-9E51-975D-EA4B36796439}"/>
-            </a:ext>
-          </a:extLst>
-        </p:cNvPr>
-        <p:cNvGrpSpPr/>
-        <p:nvPr/>
-      </p:nvGrpSpPr>
-      <p:grpSpPr>
-        <a:xfrm>
-          <a:off x="0" y="0"/>
-          <a:ext cx="0" cy="0"/>
-          <a:chOff x="0" y="0"/>
-          <a:chExt cx="0" cy="0"/>
-        </a:xfrm>
-      </p:grpSpPr>
-      <p:sp>
-        <p:nvSpPr>
-          <p:cNvPr id="35" name="CasellaDiTesto 34">
-            <a:extLst>
-              <a:ext uri="{FF2B5EF4-FFF2-40B4-BE49-F238E27FC236}">
-                <a16:creationId xmlns:a16="http://schemas.microsoft.com/office/drawing/2014/main" id="{C340A552-B0B3-C053-F399-CF7AA3AE3FE3}"/>
-              </a:ext>
-            </a:extLst>
-          </p:cNvPr>
-          <p:cNvSpPr txBox="1"/>
-          <p:nvPr/>
-        </p:nvSpPr>
-        <p:spPr>
-          <a:xfrm>
-            <a:off x="211464" y="92800"/>
-            <a:ext cx="1912703" cy="523220"/>
-          </a:xfrm>
-          <a:prstGeom prst="rect">
-            <a:avLst/>
-          </a:prstGeom>
-          <a:noFill/>
-        </p:spPr>
-        <p:txBody>
-          <a:bodyPr wrap="none" rtlCol="0">
-            <a:spAutoFit/>
-          </a:bodyPr>
-          <a:lstStyle/>
-          <a:p>
-            <a:r>
-              <a:rPr lang="it-IT" sz="2800" dirty="0"/>
-              <a:t>Module #1:</a:t>
-            </a:r>
-          </a:p>
-        </p:txBody>
-      </p:sp>
-      <p:pic>
-        <p:nvPicPr>
-          <p:cNvPr id="6" name="Immagine 5">
-            <a:extLst>
-              <a:ext uri="{FF2B5EF4-FFF2-40B4-BE49-F238E27FC236}">
-                <a16:creationId xmlns:a16="http://schemas.microsoft.com/office/drawing/2014/main" id="{85B71850-91D1-E6CD-8AD8-A425F88B1A05}"/>
-              </a:ext>
-            </a:extLst>
-          </p:cNvPr>
-          <p:cNvPicPr>
-            <a:picLocks noChangeAspect="1"/>
-          </p:cNvPicPr>
-          <p:nvPr/>
-        </p:nvPicPr>
-        <p:blipFill>
-          <a:blip r:embed="rId2"/>
-          <a:stretch>
-            <a:fillRect/>
-          </a:stretch>
-        </p:blipFill>
-        <p:spPr>
-          <a:xfrm>
-            <a:off x="6425045" y="3129072"/>
-            <a:ext cx="5107776" cy="2446771"/>
-          </a:xfrm>
-          <a:prstGeom prst="rect">
-            <a:avLst/>
-          </a:prstGeom>
-        </p:spPr>
-      </p:pic>
-      <p:pic>
-        <p:nvPicPr>
-          <p:cNvPr id="1028" name="Picture 4" descr="Class Diagram - UML 2 Tutorial | Sparx Systems">
-            <a:extLst>
-              <a:ext uri="{FF2B5EF4-FFF2-40B4-BE49-F238E27FC236}">
-                <a16:creationId xmlns:a16="http://schemas.microsoft.com/office/drawing/2014/main" id="{8B9BC641-1ED3-4478-373B-B72C486AFF56}"/>
-              </a:ext>
-            </a:extLst>
-          </p:cNvPr>
-          <p:cNvPicPr>
-            <a:picLocks noChangeAspect="1" noChangeArrowheads="1"/>
-          </p:cNvPicPr>
-          <p:nvPr/>
-        </p:nvPicPr>
-        <p:blipFill>
-          <a:blip r:embed="rId3">
-            <a:extLst>
-              <a:ext uri="{28A0092B-C50C-407E-A947-70E740481C1C}">
-                <a14:useLocalDpi xmlns:a14="http://schemas.microsoft.com/office/drawing/2010/main" val="0"/>
-              </a:ext>
-            </a:extLst>
-          </a:blip>
-          <a:srcRect/>
-          <a:stretch>
-            <a:fillRect/>
-          </a:stretch>
-        </p:blipFill>
-        <p:spPr bwMode="auto">
-          <a:xfrm>
-            <a:off x="451360" y="2489923"/>
-            <a:ext cx="5725391" cy="4036796"/>
-          </a:xfrm>
-          <a:prstGeom prst="rect">
-            <a:avLst/>
-          </a:prstGeom>
-          <a:noFill/>
-          <a:extLst>
-            <a:ext uri="{909E8E84-426E-40DD-AFC4-6F175D3DCCD1}">
-              <a14:hiddenFill xmlns:a14="http://schemas.microsoft.com/office/drawing/2010/main">
-                <a:solidFill>
-                  <a:srgbClr val="FFFFFF"/>
-                </a:solidFill>
-              </a14:hiddenFill>
-            </a:ext>
-          </a:extLst>
-        </p:spPr>
-      </p:pic>
-      <p:sp>
-        <p:nvSpPr>
-          <p:cNvPr id="7" name="CasellaDiTesto 6">
-            <a:extLst>
-              <a:ext uri="{FF2B5EF4-FFF2-40B4-BE49-F238E27FC236}">
-                <a16:creationId xmlns:a16="http://schemas.microsoft.com/office/drawing/2014/main" id="{737A948C-0CC2-B65A-05CC-AE847D0FF609}"/>
-              </a:ext>
-            </a:extLst>
-          </p:cNvPr>
-          <p:cNvSpPr txBox="1"/>
-          <p:nvPr/>
-        </p:nvSpPr>
-        <p:spPr>
-          <a:xfrm>
-            <a:off x="211464" y="831273"/>
-            <a:ext cx="1700017" cy="923330"/>
-          </a:xfrm>
-          <a:prstGeom prst="rect">
-            <a:avLst/>
-          </a:prstGeom>
-          <a:noFill/>
-        </p:spPr>
-        <p:txBody>
-          <a:bodyPr wrap="none" rtlCol="0">
-            <a:spAutoFit/>
-          </a:bodyPr>
-          <a:lstStyle/>
-          <a:p>
-            <a:pPr marL="285750" indent="-285750">
-              <a:buFont typeface="Arial" panose="020B0604020202020204" pitchFamily="34" charset="0"/>
-              <a:buChar char="•"/>
-            </a:pPr>
-            <a:r>
-              <a:rPr lang="it-IT" dirty="0" err="1"/>
-              <a:t>Overview</a:t>
-            </a:r>
-            <a:r>
-              <a:rPr lang="it-IT" dirty="0"/>
-              <a:t>:</a:t>
-            </a:r>
-          </a:p>
-          <a:p>
-            <a:endParaRPr lang="it-IT" dirty="0"/>
-          </a:p>
-          <a:p>
-            <a:pPr marL="285750" indent="-285750">
-              <a:buFont typeface="Arial" panose="020B0604020202020204" pitchFamily="34" charset="0"/>
-              <a:buChar char="•"/>
-            </a:pPr>
-            <a:r>
-              <a:rPr lang="it-IT" dirty="0" err="1"/>
-              <a:t>Constraints</a:t>
-            </a:r>
-            <a:r>
-              <a:rPr lang="it-IT" dirty="0"/>
-              <a:t>:</a:t>
-            </a:r>
-          </a:p>
-        </p:txBody>
-      </p:sp>
-    </p:spTree>
-    <p:extLst>
-      <p:ext uri="{BB962C8B-B14F-4D97-AF65-F5344CB8AC3E}">
-        <p14:creationId xmlns:p14="http://schemas.microsoft.com/office/powerpoint/2010/main" val="1055265191"/>
       </p:ext>
     </p:extLst>
   </p:cSld>

--- a/INTEGRA Editor Project.pptx
+++ b/INTEGRA Editor Project.pptx
@@ -266,7 +266,7 @@
           <a:p>
             <a:fld id="{CB813C40-EE66-436C-AD33-4DC4D8836DCF}" type="datetimeFigureOut">
               <a:rPr lang="it-IT" smtClean="0"/>
-              <a:t>03/12/2025</a:t>
+              <a:t>05/12/2025</a:t>
             </a:fld>
             <a:endParaRPr lang="it-IT"/>
           </a:p>
@@ -320,7 +320,7 @@
           <a:p>
             <a:fld id="{FC5AB196-C602-44CD-8EA1-EB993AE36885}" type="slidenum">
               <a:rPr lang="it-IT" smtClean="0"/>
-              <a:t>‹N›</a:t>
+              <a:t>‹#›</a:t>
             </a:fld>
             <a:endParaRPr lang="it-IT"/>
           </a:p>
@@ -464,7 +464,7 @@
           <a:p>
             <a:fld id="{CB813C40-EE66-436C-AD33-4DC4D8836DCF}" type="datetimeFigureOut">
               <a:rPr lang="it-IT" smtClean="0"/>
-              <a:t>03/12/2025</a:t>
+              <a:t>05/12/2025</a:t>
             </a:fld>
             <a:endParaRPr lang="it-IT"/>
           </a:p>
@@ -518,7 +518,7 @@
           <a:p>
             <a:fld id="{FC5AB196-C602-44CD-8EA1-EB993AE36885}" type="slidenum">
               <a:rPr lang="it-IT" smtClean="0"/>
-              <a:t>‹N›</a:t>
+              <a:t>‹#›</a:t>
             </a:fld>
             <a:endParaRPr lang="it-IT"/>
           </a:p>
@@ -672,7 +672,7 @@
           <a:p>
             <a:fld id="{CB813C40-EE66-436C-AD33-4DC4D8836DCF}" type="datetimeFigureOut">
               <a:rPr lang="it-IT" smtClean="0"/>
-              <a:t>03/12/2025</a:t>
+              <a:t>05/12/2025</a:t>
             </a:fld>
             <a:endParaRPr lang="it-IT"/>
           </a:p>
@@ -726,7 +726,7 @@
           <a:p>
             <a:fld id="{FC5AB196-C602-44CD-8EA1-EB993AE36885}" type="slidenum">
               <a:rPr lang="it-IT" smtClean="0"/>
-              <a:t>‹N›</a:t>
+              <a:t>‹#›</a:t>
             </a:fld>
             <a:endParaRPr lang="it-IT"/>
           </a:p>
@@ -870,7 +870,7 @@
           <a:p>
             <a:fld id="{CB813C40-EE66-436C-AD33-4DC4D8836DCF}" type="datetimeFigureOut">
               <a:rPr lang="it-IT" smtClean="0"/>
-              <a:t>03/12/2025</a:t>
+              <a:t>05/12/2025</a:t>
             </a:fld>
             <a:endParaRPr lang="it-IT"/>
           </a:p>
@@ -924,7 +924,7 @@
           <a:p>
             <a:fld id="{FC5AB196-C602-44CD-8EA1-EB993AE36885}" type="slidenum">
               <a:rPr lang="it-IT" smtClean="0"/>
-              <a:t>‹N›</a:t>
+              <a:t>‹#›</a:t>
             </a:fld>
             <a:endParaRPr lang="it-IT"/>
           </a:p>
@@ -1145,7 +1145,7 @@
           <a:p>
             <a:fld id="{CB813C40-EE66-436C-AD33-4DC4D8836DCF}" type="datetimeFigureOut">
               <a:rPr lang="it-IT" smtClean="0"/>
-              <a:t>03/12/2025</a:t>
+              <a:t>05/12/2025</a:t>
             </a:fld>
             <a:endParaRPr lang="it-IT"/>
           </a:p>
@@ -1199,7 +1199,7 @@
           <a:p>
             <a:fld id="{FC5AB196-C602-44CD-8EA1-EB993AE36885}" type="slidenum">
               <a:rPr lang="it-IT" smtClean="0"/>
-              <a:t>‹N›</a:t>
+              <a:t>‹#›</a:t>
             </a:fld>
             <a:endParaRPr lang="it-IT"/>
           </a:p>
@@ -1410,7 +1410,7 @@
           <a:p>
             <a:fld id="{CB813C40-EE66-436C-AD33-4DC4D8836DCF}" type="datetimeFigureOut">
               <a:rPr lang="it-IT" smtClean="0"/>
-              <a:t>03/12/2025</a:t>
+              <a:t>05/12/2025</a:t>
             </a:fld>
             <a:endParaRPr lang="it-IT"/>
           </a:p>
@@ -1464,7 +1464,7 @@
           <a:p>
             <a:fld id="{FC5AB196-C602-44CD-8EA1-EB993AE36885}" type="slidenum">
               <a:rPr lang="it-IT" smtClean="0"/>
-              <a:t>‹N›</a:t>
+              <a:t>‹#›</a:t>
             </a:fld>
             <a:endParaRPr lang="it-IT"/>
           </a:p>
@@ -1822,7 +1822,7 @@
           <a:p>
             <a:fld id="{CB813C40-EE66-436C-AD33-4DC4D8836DCF}" type="datetimeFigureOut">
               <a:rPr lang="it-IT" smtClean="0"/>
-              <a:t>03/12/2025</a:t>
+              <a:t>05/12/2025</a:t>
             </a:fld>
             <a:endParaRPr lang="it-IT"/>
           </a:p>
@@ -1876,7 +1876,7 @@
           <a:p>
             <a:fld id="{FC5AB196-C602-44CD-8EA1-EB993AE36885}" type="slidenum">
               <a:rPr lang="it-IT" smtClean="0"/>
-              <a:t>‹N›</a:t>
+              <a:t>‹#›</a:t>
             </a:fld>
             <a:endParaRPr lang="it-IT"/>
           </a:p>
@@ -1963,7 +1963,7 @@
           <a:p>
             <a:fld id="{CB813C40-EE66-436C-AD33-4DC4D8836DCF}" type="datetimeFigureOut">
               <a:rPr lang="it-IT" smtClean="0"/>
-              <a:t>03/12/2025</a:t>
+              <a:t>05/12/2025</a:t>
             </a:fld>
             <a:endParaRPr lang="it-IT"/>
           </a:p>
@@ -2017,7 +2017,7 @@
           <a:p>
             <a:fld id="{FC5AB196-C602-44CD-8EA1-EB993AE36885}" type="slidenum">
               <a:rPr lang="it-IT" smtClean="0"/>
-              <a:t>‹N›</a:t>
+              <a:t>‹#›</a:t>
             </a:fld>
             <a:endParaRPr lang="it-IT"/>
           </a:p>
@@ -2076,7 +2076,7 @@
           <a:p>
             <a:fld id="{CB813C40-EE66-436C-AD33-4DC4D8836DCF}" type="datetimeFigureOut">
               <a:rPr lang="it-IT" smtClean="0"/>
-              <a:t>03/12/2025</a:t>
+              <a:t>05/12/2025</a:t>
             </a:fld>
             <a:endParaRPr lang="it-IT"/>
           </a:p>
@@ -2130,7 +2130,7 @@
           <a:p>
             <a:fld id="{FC5AB196-C602-44CD-8EA1-EB993AE36885}" type="slidenum">
               <a:rPr lang="it-IT" smtClean="0"/>
-              <a:t>‹N›</a:t>
+              <a:t>‹#›</a:t>
             </a:fld>
             <a:endParaRPr lang="it-IT"/>
           </a:p>
@@ -2387,7 +2387,7 @@
           <a:p>
             <a:fld id="{CB813C40-EE66-436C-AD33-4DC4D8836DCF}" type="datetimeFigureOut">
               <a:rPr lang="it-IT" smtClean="0"/>
-              <a:t>03/12/2025</a:t>
+              <a:t>05/12/2025</a:t>
             </a:fld>
             <a:endParaRPr lang="it-IT"/>
           </a:p>
@@ -2441,7 +2441,7 @@
           <a:p>
             <a:fld id="{FC5AB196-C602-44CD-8EA1-EB993AE36885}" type="slidenum">
               <a:rPr lang="it-IT" smtClean="0"/>
-              <a:t>‹N›</a:t>
+              <a:t>‹#›</a:t>
             </a:fld>
             <a:endParaRPr lang="it-IT"/>
           </a:p>
@@ -2675,7 +2675,7 @@
           <a:p>
             <a:fld id="{CB813C40-EE66-436C-AD33-4DC4D8836DCF}" type="datetimeFigureOut">
               <a:rPr lang="it-IT" smtClean="0"/>
-              <a:t>03/12/2025</a:t>
+              <a:t>05/12/2025</a:t>
             </a:fld>
             <a:endParaRPr lang="it-IT"/>
           </a:p>
@@ -2729,7 +2729,7 @@
           <a:p>
             <a:fld id="{FC5AB196-C602-44CD-8EA1-EB993AE36885}" type="slidenum">
               <a:rPr lang="it-IT" smtClean="0"/>
-              <a:t>‹N›</a:t>
+              <a:t>‹#›</a:t>
             </a:fld>
             <a:endParaRPr lang="it-IT"/>
           </a:p>
@@ -2916,7 +2916,7 @@
           <a:p>
             <a:fld id="{CB813C40-EE66-436C-AD33-4DC4D8836DCF}" type="datetimeFigureOut">
               <a:rPr lang="it-IT" smtClean="0"/>
-              <a:t>03/12/2025</a:t>
+              <a:t>05/12/2025</a:t>
             </a:fld>
             <a:endParaRPr lang="it-IT"/>
           </a:p>
@@ -3006,7 +3006,7 @@
           <a:p>
             <a:fld id="{FC5AB196-C602-44CD-8EA1-EB993AE36885}" type="slidenum">
               <a:rPr lang="it-IT" smtClean="0"/>
-              <a:t>‹N›</a:t>
+              <a:t>‹#›</a:t>
             </a:fld>
             <a:endParaRPr lang="it-IT"/>
           </a:p>
@@ -9822,8 +9822,8 @@
         </p:nvSpPr>
         <p:spPr>
           <a:xfrm>
-            <a:off x="211464" y="649994"/>
-            <a:ext cx="11631669" cy="6740307"/>
+            <a:off x="211465" y="649994"/>
+            <a:ext cx="8856336" cy="6001643"/>
           </a:xfrm>
           <a:prstGeom prst="rect">
             <a:avLst/>
@@ -10134,26 +10134,278 @@
             </a:pPr>
             <a:endParaRPr lang="it-IT" sz="1600" dirty="0"/>
           </a:p>
-          <a:p>
-            <a:pPr marL="342900" indent="-342900">
-              <a:buFont typeface="+mj-lt"/>
-              <a:buAutoNum type="arabicPeriod"/>
-            </a:pPr>
-            <a:endParaRPr lang="it-IT" sz="1600" dirty="0"/>
-          </a:p>
-          <a:p>
-            <a:pPr marL="342900" indent="-342900">
-              <a:buFont typeface="+mj-lt"/>
-              <a:buAutoNum type="arabicPeriod"/>
-            </a:pPr>
-            <a:endParaRPr lang="it-IT" sz="1600" dirty="0"/>
-          </a:p>
-          <a:p>
-            <a:pPr marL="342900" indent="-342900">
-              <a:buFont typeface="+mj-lt"/>
-              <a:buAutoNum type="arabicPeriod"/>
-            </a:pPr>
-            <a:endParaRPr lang="it-IT" sz="1600" dirty="0"/>
+        </p:txBody>
+      </p:sp>
+      <p:sp>
+        <p:nvSpPr>
+          <p:cNvPr id="3" name="TextBox 2">
+            <a:extLst>
+              <a:ext uri="{FF2B5EF4-FFF2-40B4-BE49-F238E27FC236}">
+                <a16:creationId xmlns:a16="http://schemas.microsoft.com/office/drawing/2014/main" id="{1624A2CC-31AC-B580-61F3-003EB50C4FA0}"/>
+              </a:ext>
+            </a:extLst>
+          </p:cNvPr>
+          <p:cNvSpPr txBox="1"/>
+          <p:nvPr/>
+        </p:nvSpPr>
+        <p:spPr>
+          <a:xfrm>
+            <a:off x="9201150" y="92800"/>
+            <a:ext cx="2419350" cy="6694140"/>
+          </a:xfrm>
+          <a:prstGeom prst="rect">
+            <a:avLst/>
+          </a:prstGeom>
+          <a:noFill/>
+        </p:spPr>
+        <p:txBody>
+          <a:bodyPr wrap="square">
+            <a:spAutoFit/>
+          </a:bodyPr>
+          <a:lstStyle/>
+          <a:p>
+            <a:r>
+              <a:rPr lang="it-IT" sz="1100" b="1" dirty="0"/>
+              <a:t>FOLDER STRUCTURE:</a:t>
+            </a:r>
+          </a:p>
+          <a:p>
+            <a:r>
+              <a:rPr lang="it-IT" sz="1100" b="1" dirty="0"/>
+              <a:t>integra-sim/</a:t>
+            </a:r>
+          </a:p>
+          <a:p>
+            <a:r>
+              <a:rPr lang="it-IT" sz="1100" b="1" dirty="0"/>
+              <a:t>  src/</a:t>
+            </a:r>
+          </a:p>
+          <a:p>
+            <a:r>
+              <a:rPr lang="it-IT" sz="1100" dirty="0"/>
+              <a:t>    lib.rs</a:t>
+            </a:r>
+          </a:p>
+          <a:p>
+            <a:r>
+              <a:rPr lang="it-IT" sz="1100" dirty="0"/>
+              <a:t>    </a:t>
+            </a:r>
+            <a:r>
+              <a:rPr lang="it-IT" sz="1100" b="1" dirty="0"/>
+              <a:t>protocol/</a:t>
+            </a:r>
+          </a:p>
+          <a:p>
+            <a:r>
+              <a:rPr lang="it-IT" sz="1100" dirty="0"/>
+              <a:t>      mod.rs</a:t>
+            </a:r>
+          </a:p>
+          <a:p>
+            <a:r>
+              <a:rPr lang="it-IT" sz="1100" dirty="0"/>
+              <a:t>      request.rs</a:t>
+            </a:r>
+          </a:p>
+          <a:p>
+            <a:r>
+              <a:rPr lang="it-IT" sz="1100" dirty="0"/>
+              <a:t>      response.rs</a:t>
+            </a:r>
+          </a:p>
+          <a:p>
+            <a:r>
+              <a:rPr lang="it-IT" sz="1100" dirty="0"/>
+              <a:t>      netlist.rs</a:t>
+            </a:r>
+          </a:p>
+          <a:p>
+            <a:r>
+              <a:rPr lang="it-IT" sz="1100" dirty="0"/>
+              <a:t>      dataset.rs</a:t>
+            </a:r>
+          </a:p>
+          <a:p>
+            <a:r>
+              <a:rPr lang="it-IT" sz="1100" dirty="0"/>
+              <a:t>      error.rs</a:t>
+            </a:r>
+          </a:p>
+          <a:p>
+            <a:r>
+              <a:rPr lang="it-IT" sz="1100" dirty="0"/>
+              <a:t>    </a:t>
+            </a:r>
+            <a:r>
+              <a:rPr lang="it-IT" sz="1100" b="1" dirty="0"/>
+              <a:t>core/</a:t>
+            </a:r>
+          </a:p>
+          <a:p>
+            <a:r>
+              <a:rPr lang="it-IT" sz="1100" dirty="0"/>
+              <a:t>      mod.rs</a:t>
+            </a:r>
+          </a:p>
+          <a:p>
+            <a:r>
+              <a:rPr lang="it-IT" sz="1100" dirty="0"/>
+              <a:t>      circuit.rs</a:t>
+            </a:r>
+          </a:p>
+          <a:p>
+            <a:r>
+              <a:rPr lang="it-IT" sz="1100" dirty="0"/>
+              <a:t>      element.rs</a:t>
+            </a:r>
+          </a:p>
+          <a:p>
+            <a:r>
+              <a:rPr lang="it-IT" sz="1100" dirty="0"/>
+              <a:t>      node.rs</a:t>
+            </a:r>
+          </a:p>
+          <a:p>
+            <a:r>
+              <a:rPr lang="it-IT" sz="1100" dirty="0"/>
+              <a:t>      analysis.rs</a:t>
+            </a:r>
+          </a:p>
+          <a:p>
+            <a:r>
+              <a:rPr lang="it-IT" sz="1100" dirty="0"/>
+              <a:t>    </a:t>
+            </a:r>
+            <a:r>
+              <a:rPr lang="it-IT" sz="1100" b="1" dirty="0"/>
+              <a:t>solvers/</a:t>
+            </a:r>
+          </a:p>
+          <a:p>
+            <a:r>
+              <a:rPr lang="it-IT" sz="1100" dirty="0"/>
+              <a:t>      mod.rs</a:t>
+            </a:r>
+          </a:p>
+          <a:p>
+            <a:r>
+              <a:rPr lang="it-IT" sz="1100" dirty="0"/>
+              <a:t>      rf_budget.rs</a:t>
+            </a:r>
+          </a:p>
+          <a:p>
+            <a:r>
+              <a:rPr lang="it-IT" sz="1100" dirty="0"/>
+              <a:t>      sparam.rs</a:t>
+            </a:r>
+          </a:p>
+          <a:p>
+            <a:r>
+              <a:rPr lang="it-IT" sz="1100" dirty="0"/>
+              <a:t>      acdc.rs</a:t>
+            </a:r>
+          </a:p>
+          <a:p>
+            <a:r>
+              <a:rPr lang="it-IT" sz="1100" dirty="0"/>
+              <a:t>      hb.rs</a:t>
+            </a:r>
+          </a:p>
+          <a:p>
+            <a:r>
+              <a:rPr lang="it-IT" sz="1100" dirty="0"/>
+              <a:t>      transient.rs</a:t>
+            </a:r>
+          </a:p>
+          <a:p>
+            <a:r>
+              <a:rPr lang="it-IT" sz="1100" dirty="0"/>
+              <a:t>      fdtd.rs</a:t>
+            </a:r>
+          </a:p>
+          <a:p>
+            <a:r>
+              <a:rPr lang="it-IT" sz="1100" dirty="0"/>
+              <a:t>    </a:t>
+            </a:r>
+            <a:r>
+              <a:rPr lang="it-IT" sz="1100" b="1" dirty="0"/>
+              <a:t>gpu/</a:t>
+            </a:r>
+          </a:p>
+          <a:p>
+            <a:r>
+              <a:rPr lang="it-IT" sz="1100" dirty="0"/>
+              <a:t>      mod.rs</a:t>
+            </a:r>
+          </a:p>
+          <a:p>
+            <a:r>
+              <a:rPr lang="it-IT" sz="1100" dirty="0"/>
+              <a:t>      fft.rs</a:t>
+            </a:r>
+          </a:p>
+          <a:p>
+            <a:r>
+              <a:rPr lang="it-IT" sz="1100" dirty="0"/>
+              <a:t>      fdtd_kernel.rs</a:t>
+            </a:r>
+          </a:p>
+          <a:p>
+            <a:r>
+              <a:rPr lang="it-IT" sz="1100" b="1" dirty="0"/>
+              <a:t>    import/</a:t>
+            </a:r>
+          </a:p>
+          <a:p>
+            <a:r>
+              <a:rPr lang="it-IT" sz="1100" dirty="0"/>
+              <a:t>      mod.rs</a:t>
+            </a:r>
+          </a:p>
+          <a:p>
+            <a:r>
+              <a:rPr lang="it-IT" sz="1100" dirty="0"/>
+              <a:t>      touchstone.rs</a:t>
+            </a:r>
+          </a:p>
+          <a:p>
+            <a:r>
+              <a:rPr lang="it-IT" sz="1100" dirty="0"/>
+              <a:t>      spice.rs</a:t>
+            </a:r>
+          </a:p>
+          <a:p>
+            <a:r>
+              <a:rPr lang="it-IT" sz="1100" dirty="0"/>
+              <a:t>      ibis.rs</a:t>
+            </a:r>
+          </a:p>
+          <a:p>
+            <a:r>
+              <a:rPr lang="it-IT" sz="1100" dirty="0"/>
+              <a:t>    dispatcher.rs</a:t>
+            </a:r>
+          </a:p>
+          <a:p>
+            <a:r>
+              <a:rPr lang="it-IT" sz="1100" dirty="0"/>
+              <a:t>    wasm_interface.rs</a:t>
+            </a:r>
+          </a:p>
+          <a:p>
+            <a:r>
+              <a:rPr lang="it-IT" sz="1100" dirty="0"/>
+              <a:t>    native_interface.rs</a:t>
+            </a:r>
+          </a:p>
+          <a:p>
+            <a:r>
+              <a:rPr lang="it-IT" sz="1100" dirty="0"/>
+              <a:t>    storage.rs</a:t>
+            </a:r>
           </a:p>
         </p:txBody>
       </p:sp>
@@ -10259,7 +10511,7 @@
         <p:spPr>
           <a:xfrm>
             <a:off x="0" y="616020"/>
-            <a:ext cx="12192000" cy="1569660"/>
+            <a:ext cx="12192000" cy="2554545"/>
           </a:xfrm>
           <a:prstGeom prst="rect">
             <a:avLst/>
@@ -10292,71 +10544,7 @@
             </a:pPr>
             <a:r>
               <a:rPr lang="it-IT" sz="1600" dirty="0"/>
-              <a:t>For </a:t>
-            </a:r>
-            <a:r>
-              <a:rPr lang="it-IT" sz="1600" dirty="0" err="1"/>
-              <a:t>this</a:t>
-            </a:r>
-            <a:r>
-              <a:rPr lang="it-IT" sz="1600" dirty="0"/>
-              <a:t> feature </a:t>
-            </a:r>
-            <a:r>
-              <a:rPr lang="it-IT" sz="1600" dirty="0" err="1"/>
-              <a:t>we</a:t>
-            </a:r>
-            <a:r>
-              <a:rPr lang="it-IT" sz="1600" dirty="0"/>
-              <a:t> </a:t>
-            </a:r>
-            <a:r>
-              <a:rPr lang="it-IT" sz="1600" dirty="0" err="1"/>
-              <a:t>nned</a:t>
-            </a:r>
-            <a:r>
-              <a:rPr lang="it-IT" sz="1600" dirty="0"/>
-              <a:t> to </a:t>
-            </a:r>
-            <a:r>
-              <a:rPr lang="it-IT" sz="1600" dirty="0" err="1"/>
-              <a:t>implement</a:t>
-            </a:r>
-            <a:r>
-              <a:rPr lang="it-IT" sz="1600" dirty="0"/>
-              <a:t> the </a:t>
-            </a:r>
-            <a:r>
-              <a:rPr lang="it-IT" sz="1600" dirty="0" err="1"/>
-              <a:t>communication</a:t>
-            </a:r>
-            <a:r>
-              <a:rPr lang="it-IT" sz="1600" dirty="0"/>
-              <a:t> </a:t>
-            </a:r>
-            <a:r>
-              <a:rPr lang="it-IT" sz="1600" dirty="0" err="1"/>
-              <a:t>protocol</a:t>
-            </a:r>
-            <a:r>
-              <a:rPr lang="it-IT" sz="1600" dirty="0"/>
-              <a:t> </a:t>
-            </a:r>
-            <a:r>
-              <a:rPr lang="it-IT" sz="1600" dirty="0" err="1"/>
-              <a:t>between</a:t>
-            </a:r>
-            <a:r>
-              <a:rPr lang="it-IT" sz="1600" dirty="0"/>
-              <a:t> front-end and </a:t>
-            </a:r>
-            <a:r>
-              <a:rPr lang="it-IT" sz="1600" dirty="0" err="1"/>
-              <a:t>wasm</a:t>
-            </a:r>
-            <a:r>
-              <a:rPr lang="it-IT" sz="1600" dirty="0"/>
-              <a:t> solver.</a:t>
+              <a:t>For this feature we need to implement the communication protocol between front-end and wasm solver.</a:t>
             </a:r>
           </a:p>
           <a:p>
@@ -10407,76 +10595,8 @@
               <a:buAutoNum type="arabicPeriod"/>
             </a:pPr>
             <a:r>
-              <a:rPr lang="it-IT" sz="1600" dirty="0" err="1"/>
-              <a:t>Different</a:t>
-            </a:r>
-            <a:r>
               <a:rPr lang="it-IT" sz="1600" dirty="0"/>
-              <a:t> </a:t>
-            </a:r>
-            <a:r>
-              <a:rPr lang="it-IT" sz="1600" dirty="0" err="1"/>
-              <a:t>types</a:t>
-            </a:r>
-            <a:r>
-              <a:rPr lang="it-IT" sz="1600" dirty="0"/>
-              <a:t> of </a:t>
-            </a:r>
-            <a:r>
-              <a:rPr lang="it-IT" sz="1600" dirty="0" err="1"/>
-              <a:t>messages</a:t>
-            </a:r>
-            <a:r>
-              <a:rPr lang="it-IT" sz="1600" dirty="0"/>
-              <a:t> </a:t>
-            </a:r>
-            <a:r>
-              <a:rPr lang="it-IT" sz="1600" dirty="0" err="1"/>
-              <a:t>should</a:t>
-            </a:r>
-            <a:r>
-              <a:rPr lang="it-IT" sz="1600" dirty="0"/>
-              <a:t> be </a:t>
-            </a:r>
-            <a:r>
-              <a:rPr lang="it-IT" sz="1600" dirty="0" err="1"/>
-              <a:t>implemented</a:t>
-            </a:r>
-            <a:r>
-              <a:rPr lang="it-IT" sz="1600" dirty="0"/>
-              <a:t> </a:t>
-            </a:r>
-            <a:r>
-              <a:rPr lang="it-IT" sz="1600" dirty="0" err="1"/>
-              <a:t>as</a:t>
-            </a:r>
-            <a:r>
-              <a:rPr lang="it-IT" sz="1600" dirty="0"/>
-              <a:t> </a:t>
-            </a:r>
-            <a:r>
-              <a:rPr lang="it-IT" sz="1600" dirty="0" err="1"/>
-              <a:t>explained</a:t>
-            </a:r>
-            <a:r>
-              <a:rPr lang="it-IT" sz="1600" dirty="0"/>
-              <a:t> in the </a:t>
-            </a:r>
-            <a:r>
-              <a:rPr lang="it-IT" sz="1600" dirty="0" err="1"/>
-              <a:t>protocol_example,txt</a:t>
-            </a:r>
-            <a:r>
-              <a:rPr lang="it-IT" sz="1600" dirty="0"/>
-              <a:t> file </a:t>
-            </a:r>
-            <a:r>
-              <a:rPr lang="it-IT" sz="1600" dirty="0" err="1"/>
-              <a:t>attached</a:t>
-            </a:r>
-            <a:r>
-              <a:rPr lang="it-IT" sz="1600" dirty="0"/>
-              <a:t>.</a:t>
+              <a:t>Different types of messages should be implemented as explained in the protocol_example.txt file attached.</a:t>
             </a:r>
           </a:p>
           <a:p>
@@ -10486,7 +10606,37 @@
             </a:pPr>
             <a:r>
               <a:rPr lang="it-IT" sz="1600" dirty="0"/>
-              <a:t> </a:t>
+              <a:t> Each JSON should also specify the Id and the version.</a:t>
+            </a:r>
+          </a:p>
+          <a:p>
+            <a:pPr marL="342900" indent="-342900">
+              <a:buFont typeface="+mj-lt"/>
+              <a:buAutoNum type="arabicPeriod"/>
+            </a:pPr>
+            <a:r>
+              <a:rPr lang="it-IT" sz="1600" dirty="0"/>
+              <a:t>I need a testing for Native_interface (main.rs) and wasm using angular front-end. The test function can also be a ac of the tx message for now.</a:t>
+            </a:r>
+          </a:p>
+          <a:p>
+            <a:pPr marL="342900" indent="-342900">
+              <a:buFont typeface="+mj-lt"/>
+              <a:buAutoNum type="arabicPeriod"/>
+            </a:pPr>
+            <a:r>
+              <a:rPr lang="it-IT" sz="1600" dirty="0"/>
+              <a:t>I want it with classes and object oriented. I want it using only one crate separate the fun ctions with folders and files mod.rs.</a:t>
+            </a:r>
+          </a:p>
+          <a:p>
+            <a:pPr marL="342900" indent="-342900">
+              <a:buFont typeface="+mj-lt"/>
+              <a:buAutoNum type="arabicPeriod"/>
+            </a:pPr>
+            <a:r>
+              <a:rPr lang="it-IT" sz="1600" dirty="0"/>
+              <a:t>The creation of the wasm angular side must be an object whch remain alive in the front-end.</a:t>
             </a:r>
           </a:p>
           <a:p>
@@ -10508,7 +10658,7 @@
         </p:nvSpPr>
         <p:spPr>
           <a:xfrm>
-            <a:off x="2270865" y="3888180"/>
+            <a:off x="2270865" y="4031055"/>
             <a:ext cx="1775166" cy="369332"/>
           </a:xfrm>
           <a:prstGeom prst="rect">
@@ -10549,7 +10699,7 @@
         </p:nvSpPr>
         <p:spPr>
           <a:xfrm>
-            <a:off x="2270865" y="4872946"/>
+            <a:off x="2242290" y="5015821"/>
             <a:ext cx="1814920" cy="369332"/>
           </a:xfrm>
           <a:prstGeom prst="rect">
@@ -10673,7 +10823,7 @@
         <p:spPr>
           <a:xfrm>
             <a:off x="6898437" y="4498678"/>
-            <a:ext cx="1152944" cy="369332"/>
+            <a:ext cx="783548" cy="369332"/>
           </a:xfrm>
           <a:prstGeom prst="rect">
             <a:avLst/>
@@ -10693,7 +10843,7 @@
           <a:p>
             <a:r>
               <a:rPr lang="it-IT" dirty="0"/>
-              <a:t>controller</a:t>
+              <a:t>solver</a:t>
             </a:r>
           </a:p>
         </p:txBody>
@@ -10795,8 +10945,8 @@
         </p:nvSpPr>
         <p:spPr>
           <a:xfrm>
-            <a:off x="2835122" y="5857712"/>
-            <a:ext cx="686406" cy="369332"/>
+            <a:off x="2690143" y="6000587"/>
+            <a:ext cx="924612" cy="369332"/>
           </a:xfrm>
           <a:prstGeom prst="rect">
             <a:avLst/>
@@ -10815,10 +10965,9 @@
           <a:lstStyle/>
           <a:p>
             <a:r>
-              <a:rPr lang="it-IT" dirty="0" err="1"/>
-              <a:t>main</a:t>
-            </a:r>
-            <a:endParaRPr lang="it-IT" dirty="0"/>
+              <a:rPr lang="it-IT" dirty="0"/>
+              <a:t>Main.rs</a:t>
+            </a:r>
           </a:p>
         </p:txBody>
       </p:sp>
@@ -10840,8 +10989,8 @@
         </p:nvCxnSpPr>
         <p:spPr>
           <a:xfrm>
-            <a:off x="4046031" y="4072846"/>
-            <a:ext cx="606520" cy="610498"/>
+            <a:off x="4046031" y="4215721"/>
+            <a:ext cx="606520" cy="467623"/>
           </a:xfrm>
           <a:prstGeom prst="bentConnector3">
             <a:avLst>
@@ -10886,12 +11035,12 @@
         </p:nvCxnSpPr>
         <p:spPr>
           <a:xfrm flipV="1">
-            <a:off x="4085785" y="4683344"/>
-            <a:ext cx="566766" cy="374268"/>
+            <a:off x="4057210" y="4683344"/>
+            <a:ext cx="595341" cy="517143"/>
           </a:xfrm>
           <a:prstGeom prst="bentConnector3">
             <a:avLst>
-              <a:gd name="adj1" fmla="val 46333"/>
+              <a:gd name="adj1" fmla="val 50000"/>
             </a:avLst>
           </a:prstGeom>
           <a:ln>
@@ -10930,9 +11079,9 @@
           <p:nvPr/>
         </p:nvCxnSpPr>
         <p:spPr>
-          <a:xfrm flipV="1">
-            <a:off x="3178325" y="5242278"/>
-            <a:ext cx="0" cy="615434"/>
+          <a:xfrm flipH="1" flipV="1">
+            <a:off x="3149750" y="5385153"/>
+            <a:ext cx="2699" cy="615434"/>
           </a:xfrm>
           <a:prstGeom prst="straightConnector1">
             <a:avLst/>
@@ -11105,8 +11254,8 @@
         </p:nvCxnSpPr>
         <p:spPr>
           <a:xfrm>
-            <a:off x="8051381" y="4683344"/>
-            <a:ext cx="386898" cy="0"/>
+            <a:off x="7681985" y="4683344"/>
+            <a:ext cx="756294" cy="0"/>
           </a:xfrm>
           <a:prstGeom prst="straightConnector1">
             <a:avLst/>
@@ -11913,7 +12062,7 @@
           <p:nvPr>
             <p:extLst>
               <p:ext uri="{D42A27DB-BD31-4B8C-83A1-F6EECF244321}">
-                <p14:modId xmlns:p14="http://schemas.microsoft.com/office/powerpoint/2010/main" val="3893697625"/>
+                <p14:modId xmlns:p14="http://schemas.microsoft.com/office/powerpoint/2010/main" val="1282445579"/>
               </p:ext>
             </p:extLst>
           </p:nvPr>
@@ -11926,12 +12075,12 @@
           <a:graphicData uri="http://schemas.openxmlformats.org/presentationml/2006/ole">
             <mc:AlternateContent xmlns:mc="http://schemas.openxmlformats.org/markup-compatibility/2006">
               <mc:Choice xmlns:v="urn:schemas-microsoft-com:vml" Requires="v">
-                <p:oleObj name="Oggetto shell Packager" showAsIcon="1" r:id="rId2" imgW="1314412" imgH="514350" progId="Package">
+                <p:oleObj name="Packager Shell Object" showAsIcon="1" r:id="rId2" imgW="1314412" imgH="514350" progId="Package">
                   <p:embed/>
                 </p:oleObj>
               </mc:Choice>
               <mc:Fallback>
-                <p:oleObj name="Oggetto shell Packager" showAsIcon="1" r:id="rId2" imgW="1314412" imgH="514350" progId="Package">
+                <p:oleObj name="Packager Shell Object" showAsIcon="1" r:id="rId2" imgW="1314412" imgH="514350" progId="Package">
                   <p:embed/>
                   <p:pic>
                     <p:nvPicPr>
@@ -12073,6 +12222,252 @@
           </a:prstGeom>
           <a:ln>
             <a:prstDash val="dashDot"/>
+          </a:ln>
+        </p:spPr>
+        <p:style>
+          <a:lnRef idx="2">
+            <a:schemeClr val="dk1"/>
+          </a:lnRef>
+          <a:fillRef idx="0">
+            <a:schemeClr val="dk1"/>
+          </a:fillRef>
+          <a:effectRef idx="1">
+            <a:schemeClr val="dk1"/>
+          </a:effectRef>
+          <a:fontRef idx="minor">
+            <a:schemeClr val="tx1"/>
+          </a:fontRef>
+        </p:style>
+      </p:cxnSp>
+      <p:sp>
+        <p:nvSpPr>
+          <p:cNvPr id="4" name="CasellaDiTesto 31">
+            <a:extLst>
+              <a:ext uri="{FF2B5EF4-FFF2-40B4-BE49-F238E27FC236}">
+                <a16:creationId xmlns:a16="http://schemas.microsoft.com/office/drawing/2014/main" id="{D2D471B9-DFB8-9700-E719-ABC993B9154F}"/>
+              </a:ext>
+            </a:extLst>
+          </p:cNvPr>
+          <p:cNvSpPr txBox="1"/>
+          <p:nvPr/>
+        </p:nvSpPr>
+        <p:spPr>
+          <a:xfrm>
+            <a:off x="6437993" y="5439997"/>
+            <a:ext cx="943143" cy="369332"/>
+          </a:xfrm>
+          <a:prstGeom prst="rect">
+            <a:avLst/>
+          </a:prstGeom>
+          <a:noFill/>
+          <a:ln>
+            <a:solidFill>
+              <a:schemeClr val="tx1"/>
+            </a:solidFill>
+          </a:ln>
+        </p:spPr>
+        <p:txBody>
+          <a:bodyPr wrap="none" rtlCol="0">
+            <a:spAutoFit/>
+          </a:bodyPr>
+          <a:lstStyle/>
+          <a:p>
+            <a:r>
+              <a:rPr lang="it-IT" dirty="0"/>
+              <a:t>dataset</a:t>
+            </a:r>
+          </a:p>
+        </p:txBody>
+      </p:sp>
+      <p:sp>
+        <p:nvSpPr>
+          <p:cNvPr id="5" name="CasellaDiTesto 31">
+            <a:extLst>
+              <a:ext uri="{FF2B5EF4-FFF2-40B4-BE49-F238E27FC236}">
+                <a16:creationId xmlns:a16="http://schemas.microsoft.com/office/drawing/2014/main" id="{892BC87E-F0BF-31F2-2D61-F044B4C6FC89}"/>
+              </a:ext>
+            </a:extLst>
+          </p:cNvPr>
+          <p:cNvSpPr txBox="1"/>
+          <p:nvPr/>
+        </p:nvSpPr>
+        <p:spPr>
+          <a:xfrm>
+            <a:off x="7493199" y="5439834"/>
+            <a:ext cx="633763" cy="369332"/>
+          </a:xfrm>
+          <a:prstGeom prst="rect">
+            <a:avLst/>
+          </a:prstGeom>
+          <a:noFill/>
+          <a:ln>
+            <a:solidFill>
+              <a:schemeClr val="tx1"/>
+            </a:solidFill>
+          </a:ln>
+        </p:spPr>
+        <p:txBody>
+          <a:bodyPr wrap="none" rtlCol="0">
+            <a:spAutoFit/>
+          </a:bodyPr>
+          <a:lstStyle/>
+          <a:p>
+            <a:r>
+              <a:rPr lang="it-IT" dirty="0"/>
+              <a:t>data</a:t>
+            </a:r>
+          </a:p>
+        </p:txBody>
+      </p:sp>
+      <p:sp>
+        <p:nvSpPr>
+          <p:cNvPr id="8" name="CasellaDiTesto 31">
+            <a:extLst>
+              <a:ext uri="{FF2B5EF4-FFF2-40B4-BE49-F238E27FC236}">
+                <a16:creationId xmlns:a16="http://schemas.microsoft.com/office/drawing/2014/main" id="{FFC4123F-5FD7-8645-949F-AA8E2DDA6E3C}"/>
+              </a:ext>
+            </a:extLst>
+          </p:cNvPr>
+          <p:cNvSpPr txBox="1"/>
+          <p:nvPr/>
+        </p:nvSpPr>
+        <p:spPr>
+          <a:xfrm>
+            <a:off x="5517439" y="5439997"/>
+            <a:ext cx="808491" cy="369332"/>
+          </a:xfrm>
+          <a:prstGeom prst="rect">
+            <a:avLst/>
+          </a:prstGeom>
+          <a:noFill/>
+          <a:ln>
+            <a:solidFill>
+              <a:schemeClr val="tx1"/>
+            </a:solidFill>
+          </a:ln>
+        </p:spPr>
+        <p:txBody>
+          <a:bodyPr wrap="none" rtlCol="0">
+            <a:spAutoFit/>
+          </a:bodyPr>
+          <a:lstStyle/>
+          <a:p>
+            <a:r>
+              <a:rPr lang="it-IT" dirty="0"/>
+              <a:t>netlist</a:t>
+            </a:r>
+          </a:p>
+        </p:txBody>
+      </p:sp>
+      <p:cxnSp>
+        <p:nvCxnSpPr>
+          <p:cNvPr id="13" name="Connector: Elbow 12">
+            <a:extLst>
+              <a:ext uri="{FF2B5EF4-FFF2-40B4-BE49-F238E27FC236}">
+                <a16:creationId xmlns:a16="http://schemas.microsoft.com/office/drawing/2014/main" id="{3ABE4552-7AB9-B4F3-043A-752F99CECE9A}"/>
+              </a:ext>
+            </a:extLst>
+          </p:cNvPr>
+          <p:cNvCxnSpPr>
+            <a:stCxn id="8" idx="0"/>
+            <a:endCxn id="32" idx="2"/>
+          </p:cNvCxnSpPr>
+          <p:nvPr/>
+        </p:nvCxnSpPr>
+        <p:spPr>
+          <a:xfrm rot="5400000" flipH="1" flipV="1">
+            <a:off x="6319955" y="4469741"/>
+            <a:ext cx="571987" cy="1368526"/>
+          </a:xfrm>
+          <a:prstGeom prst="bentConnector3">
+            <a:avLst/>
+          </a:prstGeom>
+          <a:ln>
+            <a:tailEnd type="triangle"/>
+          </a:ln>
+        </p:spPr>
+        <p:style>
+          <a:lnRef idx="2">
+            <a:schemeClr val="dk1"/>
+          </a:lnRef>
+          <a:fillRef idx="0">
+            <a:schemeClr val="dk1"/>
+          </a:fillRef>
+          <a:effectRef idx="1">
+            <a:schemeClr val="dk1"/>
+          </a:effectRef>
+          <a:fontRef idx="minor">
+            <a:schemeClr val="tx1"/>
+          </a:fontRef>
+        </p:style>
+      </p:cxnSp>
+      <p:cxnSp>
+        <p:nvCxnSpPr>
+          <p:cNvPr id="15" name="Connector: Elbow 14">
+            <a:extLst>
+              <a:ext uri="{FF2B5EF4-FFF2-40B4-BE49-F238E27FC236}">
+                <a16:creationId xmlns:a16="http://schemas.microsoft.com/office/drawing/2014/main" id="{26E79F38-5729-A6E2-76A8-1888634DB4BF}"/>
+              </a:ext>
+            </a:extLst>
+          </p:cNvPr>
+          <p:cNvCxnSpPr>
+            <a:stCxn id="4" idx="0"/>
+            <a:endCxn id="32" idx="2"/>
+          </p:cNvCxnSpPr>
+          <p:nvPr/>
+        </p:nvCxnSpPr>
+        <p:spPr>
+          <a:xfrm rot="5400000" flipH="1" flipV="1">
+            <a:off x="6813895" y="4963681"/>
+            <a:ext cx="571987" cy="380646"/>
+          </a:xfrm>
+          <a:prstGeom prst="bentConnector3">
+            <a:avLst/>
+          </a:prstGeom>
+          <a:ln>
+            <a:tailEnd type="triangle"/>
+          </a:ln>
+        </p:spPr>
+        <p:style>
+          <a:lnRef idx="2">
+            <a:schemeClr val="dk1"/>
+          </a:lnRef>
+          <a:fillRef idx="0">
+            <a:schemeClr val="dk1"/>
+          </a:fillRef>
+          <a:effectRef idx="1">
+            <a:schemeClr val="dk1"/>
+          </a:effectRef>
+          <a:fontRef idx="minor">
+            <a:schemeClr val="tx1"/>
+          </a:fontRef>
+        </p:style>
+      </p:cxnSp>
+      <p:cxnSp>
+        <p:nvCxnSpPr>
+          <p:cNvPr id="17" name="Connector: Elbow 16">
+            <a:extLst>
+              <a:ext uri="{FF2B5EF4-FFF2-40B4-BE49-F238E27FC236}">
+                <a16:creationId xmlns:a16="http://schemas.microsoft.com/office/drawing/2014/main" id="{A23FC2F5-B3C2-66B7-164B-031DABAD4DF8}"/>
+              </a:ext>
+            </a:extLst>
+          </p:cNvPr>
+          <p:cNvCxnSpPr>
+            <a:stCxn id="5" idx="0"/>
+            <a:endCxn id="32" idx="2"/>
+          </p:cNvCxnSpPr>
+          <p:nvPr/>
+        </p:nvCxnSpPr>
+        <p:spPr>
+          <a:xfrm rot="16200000" flipV="1">
+            <a:off x="7264234" y="4893987"/>
+            <a:ext cx="571824" cy="519870"/>
+          </a:xfrm>
+          <a:prstGeom prst="bentConnector3">
+            <a:avLst/>
+          </a:prstGeom>
+          <a:ln>
+            <a:tailEnd type="triangle"/>
           </a:ln>
         </p:spPr>
         <p:style>
